--- a/VLSI design 설계 실습/2025-06-13.pptx
+++ b/VLSI design 설계 실습/2025-06-13.pptx
@@ -6,14 +6,17 @@
   </p:sldMasterIdLst>
   <p:sldIdLst>
     <p:sldId id="256" r:id="rId2"/>
-    <p:sldId id="262" r:id="rId3"/>
-    <p:sldId id="263" r:id="rId4"/>
-    <p:sldId id="264" r:id="rId5"/>
-    <p:sldId id="257" r:id="rId6"/>
+    <p:sldId id="257" r:id="rId3"/>
+    <p:sldId id="262" r:id="rId4"/>
+    <p:sldId id="263" r:id="rId5"/>
+    <p:sldId id="264" r:id="rId6"/>
     <p:sldId id="258" r:id="rId7"/>
-    <p:sldId id="259" r:id="rId8"/>
-    <p:sldId id="260" r:id="rId9"/>
-    <p:sldId id="261" r:id="rId10"/>
+    <p:sldId id="260" r:id="rId8"/>
+    <p:sldId id="261" r:id="rId9"/>
+    <p:sldId id="265" r:id="rId10"/>
+    <p:sldId id="266" r:id="rId11"/>
+    <p:sldId id="267" r:id="rId12"/>
+    <p:sldId id="259" r:id="rId13"/>
   </p:sldIdLst>
   <p:sldSz cx="12192000" cy="6858000"/>
   <p:notesSz cx="6858000" cy="9144000"/>
@@ -249,7 +252,7 @@
           <a:p>
             <a:fld id="{088498B5-61CB-4D33-9D13-11B461C68DAA}" type="datetimeFigureOut">
               <a:rPr lang="ko-KR" altLang="en-US" smtClean="0"/>
-              <a:t>2025-06-15</a:t>
+              <a:t>2025-06-16</a:t>
             </a:fld>
             <a:endParaRPr lang="ko-KR" altLang="en-US"/>
           </a:p>
@@ -417,7 +420,7 @@
           <a:p>
             <a:fld id="{088498B5-61CB-4D33-9D13-11B461C68DAA}" type="datetimeFigureOut">
               <a:rPr lang="ko-KR" altLang="en-US" smtClean="0"/>
-              <a:t>2025-06-15</a:t>
+              <a:t>2025-06-16</a:t>
             </a:fld>
             <a:endParaRPr lang="ko-KR" altLang="en-US"/>
           </a:p>
@@ -595,7 +598,7 @@
           <a:p>
             <a:fld id="{088498B5-61CB-4D33-9D13-11B461C68DAA}" type="datetimeFigureOut">
               <a:rPr lang="ko-KR" altLang="en-US" smtClean="0"/>
-              <a:t>2025-06-15</a:t>
+              <a:t>2025-06-16</a:t>
             </a:fld>
             <a:endParaRPr lang="ko-KR" altLang="en-US"/>
           </a:p>
@@ -763,7 +766,7 @@
           <a:p>
             <a:fld id="{088498B5-61CB-4D33-9D13-11B461C68DAA}" type="datetimeFigureOut">
               <a:rPr lang="ko-KR" altLang="en-US" smtClean="0"/>
-              <a:t>2025-06-15</a:t>
+              <a:t>2025-06-16</a:t>
             </a:fld>
             <a:endParaRPr lang="ko-KR" altLang="en-US"/>
           </a:p>
@@ -1008,7 +1011,7 @@
           <a:p>
             <a:fld id="{088498B5-61CB-4D33-9D13-11B461C68DAA}" type="datetimeFigureOut">
               <a:rPr lang="ko-KR" altLang="en-US" smtClean="0"/>
-              <a:t>2025-06-15</a:t>
+              <a:t>2025-06-16</a:t>
             </a:fld>
             <a:endParaRPr lang="ko-KR" altLang="en-US"/>
           </a:p>
@@ -1237,7 +1240,7 @@
           <a:p>
             <a:fld id="{088498B5-61CB-4D33-9D13-11B461C68DAA}" type="datetimeFigureOut">
               <a:rPr lang="ko-KR" altLang="en-US" smtClean="0"/>
-              <a:t>2025-06-15</a:t>
+              <a:t>2025-06-16</a:t>
             </a:fld>
             <a:endParaRPr lang="ko-KR" altLang="en-US"/>
           </a:p>
@@ -1601,7 +1604,7 @@
           <a:p>
             <a:fld id="{088498B5-61CB-4D33-9D13-11B461C68DAA}" type="datetimeFigureOut">
               <a:rPr lang="ko-KR" altLang="en-US" smtClean="0"/>
-              <a:t>2025-06-15</a:t>
+              <a:t>2025-06-16</a:t>
             </a:fld>
             <a:endParaRPr lang="ko-KR" altLang="en-US"/>
           </a:p>
@@ -1718,7 +1721,7 @@
           <a:p>
             <a:fld id="{088498B5-61CB-4D33-9D13-11B461C68DAA}" type="datetimeFigureOut">
               <a:rPr lang="ko-KR" altLang="en-US" smtClean="0"/>
-              <a:t>2025-06-15</a:t>
+              <a:t>2025-06-16</a:t>
             </a:fld>
             <a:endParaRPr lang="ko-KR" altLang="en-US"/>
           </a:p>
@@ -1813,7 +1816,7 @@
           <a:p>
             <a:fld id="{088498B5-61CB-4D33-9D13-11B461C68DAA}" type="datetimeFigureOut">
               <a:rPr lang="ko-KR" altLang="en-US" smtClean="0"/>
-              <a:t>2025-06-15</a:t>
+              <a:t>2025-06-16</a:t>
             </a:fld>
             <a:endParaRPr lang="ko-KR" altLang="en-US"/>
           </a:p>
@@ -2088,7 +2091,7 @@
           <a:p>
             <a:fld id="{088498B5-61CB-4D33-9D13-11B461C68DAA}" type="datetimeFigureOut">
               <a:rPr lang="ko-KR" altLang="en-US" smtClean="0"/>
-              <a:t>2025-06-15</a:t>
+              <a:t>2025-06-16</a:t>
             </a:fld>
             <a:endParaRPr lang="ko-KR" altLang="en-US"/>
           </a:p>
@@ -2340,7 +2343,7 @@
           <a:p>
             <a:fld id="{088498B5-61CB-4D33-9D13-11B461C68DAA}" type="datetimeFigureOut">
               <a:rPr lang="ko-KR" altLang="en-US" smtClean="0"/>
-              <a:t>2025-06-15</a:t>
+              <a:t>2025-06-16</a:t>
             </a:fld>
             <a:endParaRPr lang="ko-KR" altLang="en-US"/>
           </a:p>
@@ -2405,9 +2408,27 @@
 <p:sldMaster xmlns:a="http://schemas.openxmlformats.org/drawingml/2006/main" xmlns:r="http://schemas.openxmlformats.org/officeDocument/2006/relationships" xmlns:p="http://schemas.openxmlformats.org/presentationml/2006/main">
   <p:cSld>
     <p:bg>
-      <p:bgRef idx="1001">
-        <a:schemeClr val="bg1"/>
-      </p:bgRef>
+      <p:bgPr>
+        <a:gradFill flip="none" rotWithShape="1">
+          <a:gsLst>
+            <a:gs pos="0">
+              <a:schemeClr val="accent6">
+                <a:lumMod val="20000"/>
+                <a:lumOff val="80000"/>
+              </a:schemeClr>
+            </a:gs>
+            <a:gs pos="100000">
+              <a:schemeClr val="accent6">
+                <a:lumMod val="60000"/>
+                <a:lumOff val="40000"/>
+              </a:schemeClr>
+            </a:gs>
+          </a:gsLst>
+          <a:lin ang="5400000" scaled="1"/>
+          <a:tileRect/>
+        </a:gradFill>
+        <a:effectLst/>
+      </p:bgPr>
     </p:bg>
     <p:spTree>
       <p:nvGrpSpPr>
@@ -2551,7 +2572,7 @@
           <a:p>
             <a:fld id="{088498B5-61CB-4D33-9D13-11B461C68DAA}" type="datetimeFigureOut">
               <a:rPr lang="ko-KR" altLang="en-US" smtClean="0"/>
-              <a:t>2025-06-15</a:t>
+              <a:t>2025-06-16</a:t>
             </a:fld>
             <a:endParaRPr lang="ko-KR" altLang="en-US"/>
           </a:p>
@@ -2994,7 +3015,10 @@
           <a:bodyPr/>
           <a:lstStyle/>
           <a:p>
-            <a:endParaRPr lang="ko-KR" altLang="en-US"/>
+            <a:r>
+              <a:rPr lang="ko-KR" altLang="en-US" dirty="0"/>
+              <a:t>이준우</a:t>
+            </a:r>
           </a:p>
         </p:txBody>
       </p:sp>
@@ -3002,6 +3026,241 @@
     <p:extLst>
       <p:ext uri="{BB962C8B-B14F-4D97-AF65-F5344CB8AC3E}">
         <p14:creationId xmlns:p14="http://schemas.microsoft.com/office/powerpoint/2010/main" val="2301951414"/>
+      </p:ext>
+    </p:extLst>
+  </p:cSld>
+  <p:clrMapOvr>
+    <a:masterClrMapping/>
+  </p:clrMapOvr>
+</p:sld>
+</file>
+
+<file path=ppt/slides/slide10.xml><?xml version="1.0" encoding="utf-8"?>
+<p:sld xmlns:a="http://schemas.openxmlformats.org/drawingml/2006/main" xmlns:r="http://schemas.openxmlformats.org/officeDocument/2006/relationships" xmlns:p="http://schemas.openxmlformats.org/presentationml/2006/main">
+  <p:cSld>
+    <p:spTree>
+      <p:nvGrpSpPr>
+        <p:cNvPr id="1" name=""/>
+        <p:cNvGrpSpPr/>
+        <p:nvPr/>
+      </p:nvGrpSpPr>
+      <p:grpSpPr>
+        <a:xfrm>
+          <a:off x="0" y="0"/>
+          <a:ext cx="0" cy="0"/>
+          <a:chOff x="0" y="0"/>
+          <a:chExt cx="0" cy="0"/>
+        </a:xfrm>
+      </p:grpSpPr>
+      <p:sp>
+        <p:nvSpPr>
+          <p:cNvPr id="2" name="제목 1">
+            <a:extLst>
+              <a:ext uri="{FF2B5EF4-FFF2-40B4-BE49-F238E27FC236}">
+                <a16:creationId xmlns:a16="http://schemas.microsoft.com/office/drawing/2014/main" id="{CCECD2BA-830A-6C90-C17B-E347CB48A6CB}"/>
+              </a:ext>
+            </a:extLst>
+          </p:cNvPr>
+          <p:cNvSpPr>
+            <a:spLocks noGrp="1"/>
+          </p:cNvSpPr>
+          <p:nvPr>
+            <p:ph type="title"/>
+          </p:nvPr>
+        </p:nvSpPr>
+        <p:spPr/>
+        <p:txBody>
+          <a:bodyPr/>
+          <a:lstStyle/>
+          <a:p>
+            <a:endParaRPr lang="ko-KR" altLang="en-US"/>
+          </a:p>
+        </p:txBody>
+      </p:sp>
+      <p:sp>
+        <p:nvSpPr>
+          <p:cNvPr id="3" name="내용 개체 틀 2">
+            <a:extLst>
+              <a:ext uri="{FF2B5EF4-FFF2-40B4-BE49-F238E27FC236}">
+                <a16:creationId xmlns:a16="http://schemas.microsoft.com/office/drawing/2014/main" id="{DA95D773-687F-A457-641D-06098AA7A34A}"/>
+              </a:ext>
+            </a:extLst>
+          </p:cNvPr>
+          <p:cNvSpPr>
+            <a:spLocks noGrp="1"/>
+          </p:cNvSpPr>
+          <p:nvPr>
+            <p:ph idx="1"/>
+          </p:nvPr>
+        </p:nvSpPr>
+        <p:spPr/>
+        <p:txBody>
+          <a:bodyPr/>
+          <a:lstStyle/>
+          <a:p>
+            <a:endParaRPr lang="ko-KR" altLang="en-US"/>
+          </a:p>
+        </p:txBody>
+      </p:sp>
+    </p:spTree>
+    <p:extLst>
+      <p:ext uri="{BB962C8B-B14F-4D97-AF65-F5344CB8AC3E}">
+        <p14:creationId xmlns:p14="http://schemas.microsoft.com/office/powerpoint/2010/main" val="857959110"/>
+      </p:ext>
+    </p:extLst>
+  </p:cSld>
+  <p:clrMapOvr>
+    <a:masterClrMapping/>
+  </p:clrMapOvr>
+</p:sld>
+</file>
+
+<file path=ppt/slides/slide11.xml><?xml version="1.0" encoding="utf-8"?>
+<p:sld xmlns:a="http://schemas.openxmlformats.org/drawingml/2006/main" xmlns:r="http://schemas.openxmlformats.org/officeDocument/2006/relationships" xmlns:p="http://schemas.openxmlformats.org/presentationml/2006/main">
+  <p:cSld>
+    <p:spTree>
+      <p:nvGrpSpPr>
+        <p:cNvPr id="1" name=""/>
+        <p:cNvGrpSpPr/>
+        <p:nvPr/>
+      </p:nvGrpSpPr>
+      <p:grpSpPr>
+        <a:xfrm>
+          <a:off x="0" y="0"/>
+          <a:ext cx="0" cy="0"/>
+          <a:chOff x="0" y="0"/>
+          <a:chExt cx="0" cy="0"/>
+        </a:xfrm>
+      </p:grpSpPr>
+      <p:sp>
+        <p:nvSpPr>
+          <p:cNvPr id="2" name="제목 1">
+            <a:extLst>
+              <a:ext uri="{FF2B5EF4-FFF2-40B4-BE49-F238E27FC236}">
+                <a16:creationId xmlns:a16="http://schemas.microsoft.com/office/drawing/2014/main" id="{CAFD3FCF-13B5-2893-1B7A-C0D15A4CB900}"/>
+              </a:ext>
+            </a:extLst>
+          </p:cNvPr>
+          <p:cNvSpPr>
+            <a:spLocks noGrp="1"/>
+          </p:cNvSpPr>
+          <p:nvPr>
+            <p:ph type="title"/>
+          </p:nvPr>
+        </p:nvSpPr>
+        <p:spPr/>
+        <p:txBody>
+          <a:bodyPr/>
+          <a:lstStyle/>
+          <a:p>
+            <a:endParaRPr lang="ko-KR" altLang="en-US"/>
+          </a:p>
+        </p:txBody>
+      </p:sp>
+      <p:sp>
+        <p:nvSpPr>
+          <p:cNvPr id="3" name="내용 개체 틀 2">
+            <a:extLst>
+              <a:ext uri="{FF2B5EF4-FFF2-40B4-BE49-F238E27FC236}">
+                <a16:creationId xmlns:a16="http://schemas.microsoft.com/office/drawing/2014/main" id="{464D2D25-BCB8-6A42-6384-870839513A25}"/>
+              </a:ext>
+            </a:extLst>
+          </p:cNvPr>
+          <p:cNvSpPr>
+            <a:spLocks noGrp="1"/>
+          </p:cNvSpPr>
+          <p:nvPr>
+            <p:ph idx="1"/>
+          </p:nvPr>
+        </p:nvSpPr>
+        <p:spPr/>
+        <p:txBody>
+          <a:bodyPr/>
+          <a:lstStyle/>
+          <a:p>
+            <a:endParaRPr lang="ko-KR" altLang="en-US"/>
+          </a:p>
+        </p:txBody>
+      </p:sp>
+    </p:spTree>
+    <p:extLst>
+      <p:ext uri="{BB962C8B-B14F-4D97-AF65-F5344CB8AC3E}">
+        <p14:creationId xmlns:p14="http://schemas.microsoft.com/office/powerpoint/2010/main" val="4112507996"/>
+      </p:ext>
+    </p:extLst>
+  </p:cSld>
+  <p:clrMapOvr>
+    <a:masterClrMapping/>
+  </p:clrMapOvr>
+</p:sld>
+</file>
+
+<file path=ppt/slides/slide12.xml><?xml version="1.0" encoding="utf-8"?>
+<p:sld xmlns:a="http://schemas.openxmlformats.org/drawingml/2006/main" xmlns:r="http://schemas.openxmlformats.org/officeDocument/2006/relationships" xmlns:p="http://schemas.openxmlformats.org/presentationml/2006/main">
+  <p:cSld>
+    <p:spTree>
+      <p:nvGrpSpPr>
+        <p:cNvPr id="1" name=""/>
+        <p:cNvGrpSpPr/>
+        <p:nvPr/>
+      </p:nvGrpSpPr>
+      <p:grpSpPr>
+        <a:xfrm>
+          <a:off x="0" y="0"/>
+          <a:ext cx="0" cy="0"/>
+          <a:chOff x="0" y="0"/>
+          <a:chExt cx="0" cy="0"/>
+        </a:xfrm>
+      </p:grpSpPr>
+      <p:sp>
+        <p:nvSpPr>
+          <p:cNvPr id="2" name="제목 1"/>
+          <p:cNvSpPr>
+            <a:spLocks noGrp="1"/>
+          </p:cNvSpPr>
+          <p:nvPr>
+            <p:ph type="title"/>
+          </p:nvPr>
+        </p:nvSpPr>
+        <p:spPr/>
+        <p:txBody>
+          <a:bodyPr/>
+          <a:lstStyle/>
+          <a:p>
+            <a:endParaRPr lang="ko-KR" altLang="en-US"/>
+          </a:p>
+        </p:txBody>
+      </p:sp>
+      <p:pic>
+        <p:nvPicPr>
+          <p:cNvPr id="4" name="내용 개체 틀 3"/>
+          <p:cNvPicPr>
+            <a:picLocks noGrp="1" noChangeAspect="1"/>
+          </p:cNvPicPr>
+          <p:nvPr>
+            <p:ph idx="1"/>
+          </p:nvPr>
+        </p:nvPicPr>
+        <p:blipFill>
+          <a:blip r:embed="rId2"/>
+          <a:stretch>
+            <a:fillRect/>
+          </a:stretch>
+        </p:blipFill>
+        <p:spPr>
+          <a:xfrm>
+            <a:off x="838200" y="1898393"/>
+            <a:ext cx="7516274" cy="4267796"/>
+          </a:xfrm>
+          <a:prstGeom prst="rect">
+            <a:avLst/>
+          </a:prstGeom>
+        </p:spPr>
+      </p:pic>
+    </p:spTree>
+    <p:extLst>
+      <p:ext uri="{BB962C8B-B14F-4D97-AF65-F5344CB8AC3E}">
+        <p14:creationId xmlns:p14="http://schemas.microsoft.com/office/powerpoint/2010/main" val="1129202242"/>
       </p:ext>
     </p:extLst>
   </p:cSld>
@@ -3030,13 +3289,7 @@
       </p:grpSpPr>
       <p:sp>
         <p:nvSpPr>
-          <p:cNvPr id="2" name="제목 1">
-            <a:extLst>
-              <a:ext uri="{FF2B5EF4-FFF2-40B4-BE49-F238E27FC236}">
-                <a16:creationId xmlns:a16="http://schemas.microsoft.com/office/drawing/2014/main" id="{6FFB2921-2403-DBE0-B2C4-1D7E9BE5279F}"/>
-              </a:ext>
-            </a:extLst>
-          </p:cNvPr>
+          <p:cNvPr id="2" name="제목 1"/>
           <p:cNvSpPr>
             <a:spLocks noGrp="1"/>
           </p:cNvSpPr>
@@ -3049,241 +3302,18 @@
           <a:bodyPr/>
           <a:lstStyle/>
           <a:p>
-            <a:endParaRPr lang="ko-KR" altLang="en-US"/>
-          </a:p>
-        </p:txBody>
-      </p:sp>
-      <p:sp>
-        <p:nvSpPr>
-          <p:cNvPr id="3" name="내용 개체 틀 2">
-            <a:extLst>
-              <a:ext uri="{FF2B5EF4-FFF2-40B4-BE49-F238E27FC236}">
-                <a16:creationId xmlns:a16="http://schemas.microsoft.com/office/drawing/2014/main" id="{734BA7B8-C256-657C-3A59-A19DCA1AC8A7}"/>
-              </a:ext>
-            </a:extLst>
-          </p:cNvPr>
-          <p:cNvSpPr>
-            <a:spLocks noGrp="1"/>
-          </p:cNvSpPr>
-          <p:nvPr>
-            <p:ph idx="1"/>
-          </p:nvPr>
-        </p:nvSpPr>
-        <p:spPr/>
-        <p:txBody>
-          <a:bodyPr/>
-          <a:lstStyle/>
-          <a:p>
-            <a:endParaRPr lang="ko-KR" altLang="en-US"/>
-          </a:p>
-        </p:txBody>
-      </p:sp>
-    </p:spTree>
-    <p:extLst>
-      <p:ext uri="{BB962C8B-B14F-4D97-AF65-F5344CB8AC3E}">
-        <p14:creationId xmlns:p14="http://schemas.microsoft.com/office/powerpoint/2010/main" val="2191778789"/>
-      </p:ext>
-    </p:extLst>
-  </p:cSld>
-  <p:clrMapOvr>
-    <a:masterClrMapping/>
-  </p:clrMapOvr>
-</p:sld>
-</file>
-
-<file path=ppt/slides/slide3.xml><?xml version="1.0" encoding="utf-8"?>
-<p:sld xmlns:a="http://schemas.openxmlformats.org/drawingml/2006/main" xmlns:r="http://schemas.openxmlformats.org/officeDocument/2006/relationships" xmlns:p="http://schemas.openxmlformats.org/presentationml/2006/main">
-  <p:cSld>
-    <p:spTree>
-      <p:nvGrpSpPr>
-        <p:cNvPr id="1" name=""/>
-        <p:cNvGrpSpPr/>
-        <p:nvPr/>
-      </p:nvGrpSpPr>
-      <p:grpSpPr>
-        <a:xfrm>
-          <a:off x="0" y="0"/>
-          <a:ext cx="0" cy="0"/>
-          <a:chOff x="0" y="0"/>
-          <a:chExt cx="0" cy="0"/>
-        </a:xfrm>
-      </p:grpSpPr>
-      <p:sp>
-        <p:nvSpPr>
-          <p:cNvPr id="2" name="제목 1">
-            <a:extLst>
-              <a:ext uri="{FF2B5EF4-FFF2-40B4-BE49-F238E27FC236}">
-                <a16:creationId xmlns:a16="http://schemas.microsoft.com/office/drawing/2014/main" id="{0EE89004-4F2A-B8AC-A1D3-A45A29CB7D66}"/>
-              </a:ext>
-            </a:extLst>
-          </p:cNvPr>
-          <p:cNvSpPr>
-            <a:spLocks noGrp="1"/>
-          </p:cNvSpPr>
-          <p:nvPr>
-            <p:ph type="title"/>
-          </p:nvPr>
-        </p:nvSpPr>
-        <p:spPr/>
-        <p:txBody>
-          <a:bodyPr/>
-          <a:lstStyle/>
-          <a:p>
-            <a:endParaRPr lang="ko-KR" altLang="en-US"/>
-          </a:p>
-        </p:txBody>
-      </p:sp>
-      <p:sp>
-        <p:nvSpPr>
-          <p:cNvPr id="3" name="내용 개체 틀 2">
-            <a:extLst>
-              <a:ext uri="{FF2B5EF4-FFF2-40B4-BE49-F238E27FC236}">
-                <a16:creationId xmlns:a16="http://schemas.microsoft.com/office/drawing/2014/main" id="{39F1ADE9-9E8A-4C04-9696-49C358CFDCF8}"/>
-              </a:ext>
-            </a:extLst>
-          </p:cNvPr>
-          <p:cNvSpPr>
-            <a:spLocks noGrp="1"/>
-          </p:cNvSpPr>
-          <p:nvPr>
-            <p:ph idx="1"/>
-          </p:nvPr>
-        </p:nvSpPr>
-        <p:spPr/>
-        <p:txBody>
-          <a:bodyPr/>
-          <a:lstStyle/>
-          <a:p>
-            <a:endParaRPr lang="ko-KR" altLang="en-US"/>
-          </a:p>
-        </p:txBody>
-      </p:sp>
-    </p:spTree>
-    <p:extLst>
-      <p:ext uri="{BB962C8B-B14F-4D97-AF65-F5344CB8AC3E}">
-        <p14:creationId xmlns:p14="http://schemas.microsoft.com/office/powerpoint/2010/main" val="2513305449"/>
-      </p:ext>
-    </p:extLst>
-  </p:cSld>
-  <p:clrMapOvr>
-    <a:masterClrMapping/>
-  </p:clrMapOvr>
-</p:sld>
-</file>
-
-<file path=ppt/slides/slide4.xml><?xml version="1.0" encoding="utf-8"?>
-<p:sld xmlns:a="http://schemas.openxmlformats.org/drawingml/2006/main" xmlns:r="http://schemas.openxmlformats.org/officeDocument/2006/relationships" xmlns:p="http://schemas.openxmlformats.org/presentationml/2006/main">
-  <p:cSld>
-    <p:spTree>
-      <p:nvGrpSpPr>
-        <p:cNvPr id="1" name=""/>
-        <p:cNvGrpSpPr/>
-        <p:nvPr/>
-      </p:nvGrpSpPr>
-      <p:grpSpPr>
-        <a:xfrm>
-          <a:off x="0" y="0"/>
-          <a:ext cx="0" cy="0"/>
-          <a:chOff x="0" y="0"/>
-          <a:chExt cx="0" cy="0"/>
-        </a:xfrm>
-      </p:grpSpPr>
-      <p:sp>
-        <p:nvSpPr>
-          <p:cNvPr id="2" name="제목 1">
-            <a:extLst>
-              <a:ext uri="{FF2B5EF4-FFF2-40B4-BE49-F238E27FC236}">
-                <a16:creationId xmlns:a16="http://schemas.microsoft.com/office/drawing/2014/main" id="{33CEF3DE-50AC-AF66-8256-754D24441963}"/>
-              </a:ext>
-            </a:extLst>
-          </p:cNvPr>
-          <p:cNvSpPr>
-            <a:spLocks noGrp="1"/>
-          </p:cNvSpPr>
-          <p:nvPr>
-            <p:ph type="title"/>
-          </p:nvPr>
-        </p:nvSpPr>
-        <p:spPr/>
-        <p:txBody>
-          <a:bodyPr/>
-          <a:lstStyle/>
-          <a:p>
-            <a:endParaRPr lang="ko-KR" altLang="en-US"/>
-          </a:p>
-        </p:txBody>
-      </p:sp>
-      <p:sp>
-        <p:nvSpPr>
-          <p:cNvPr id="3" name="내용 개체 틀 2">
-            <a:extLst>
-              <a:ext uri="{FF2B5EF4-FFF2-40B4-BE49-F238E27FC236}">
-                <a16:creationId xmlns:a16="http://schemas.microsoft.com/office/drawing/2014/main" id="{D40D8EA0-854A-F593-9D4B-70BED1C4BE5A}"/>
-              </a:ext>
-            </a:extLst>
-          </p:cNvPr>
-          <p:cNvSpPr>
-            <a:spLocks noGrp="1"/>
-          </p:cNvSpPr>
-          <p:nvPr>
-            <p:ph idx="1"/>
-          </p:nvPr>
-        </p:nvSpPr>
-        <p:spPr/>
-        <p:txBody>
-          <a:bodyPr/>
-          <a:lstStyle/>
-          <a:p>
-            <a:endParaRPr lang="ko-KR" altLang="en-US"/>
-          </a:p>
-        </p:txBody>
-      </p:sp>
-    </p:spTree>
-    <p:extLst>
-      <p:ext uri="{BB962C8B-B14F-4D97-AF65-F5344CB8AC3E}">
-        <p14:creationId xmlns:p14="http://schemas.microsoft.com/office/powerpoint/2010/main" val="3869624506"/>
-      </p:ext>
-    </p:extLst>
-  </p:cSld>
-  <p:clrMapOvr>
-    <a:masterClrMapping/>
-  </p:clrMapOvr>
-</p:sld>
-</file>
-
-<file path=ppt/slides/slide5.xml><?xml version="1.0" encoding="utf-8"?>
-<p:sld xmlns:a="http://schemas.openxmlformats.org/drawingml/2006/main" xmlns:r="http://schemas.openxmlformats.org/officeDocument/2006/relationships" xmlns:p="http://schemas.openxmlformats.org/presentationml/2006/main">
-  <p:cSld>
-    <p:spTree>
-      <p:nvGrpSpPr>
-        <p:cNvPr id="1" name=""/>
-        <p:cNvGrpSpPr/>
-        <p:nvPr/>
-      </p:nvGrpSpPr>
-      <p:grpSpPr>
-        <a:xfrm>
-          <a:off x="0" y="0"/>
-          <a:ext cx="0" cy="0"/>
-          <a:chOff x="0" y="0"/>
-          <a:chExt cx="0" cy="0"/>
-        </a:xfrm>
-      </p:grpSpPr>
-      <p:sp>
-        <p:nvSpPr>
-          <p:cNvPr id="2" name="제목 1"/>
-          <p:cNvSpPr>
-            <a:spLocks noGrp="1"/>
-          </p:cNvSpPr>
-          <p:nvPr>
-            <p:ph type="title"/>
-          </p:nvPr>
-        </p:nvSpPr>
-        <p:spPr/>
-        <p:txBody>
-          <a:bodyPr/>
-          <a:lstStyle/>
-          <a:p>
-            <a:endParaRPr lang="ko-KR" altLang="en-US"/>
+            <a:r>
+              <a:rPr lang="ko-KR" altLang="en-US" dirty="0"/>
+              <a:t>디지털 </a:t>
+            </a:r>
+            <a:r>
+              <a:rPr lang="ko-KR" altLang="en-US" dirty="0" err="1"/>
+              <a:t>테스트벤치</a:t>
+            </a:r>
+            <a:r>
+              <a:rPr lang="ko-KR" altLang="en-US" dirty="0"/>
+              <a:t> 구조</a:t>
+            </a:r>
           </a:p>
         </p:txBody>
       </p:sp>
@@ -3326,6 +3356,246 @@
 </p:sld>
 </file>
 
+<file path=ppt/slides/slide3.xml><?xml version="1.0" encoding="utf-8"?>
+<p:sld xmlns:a="http://schemas.openxmlformats.org/drawingml/2006/main" xmlns:r="http://schemas.openxmlformats.org/officeDocument/2006/relationships" xmlns:p="http://schemas.openxmlformats.org/presentationml/2006/main">
+  <p:cSld>
+    <p:spTree>
+      <p:nvGrpSpPr>
+        <p:cNvPr id="1" name=""/>
+        <p:cNvGrpSpPr/>
+        <p:nvPr/>
+      </p:nvGrpSpPr>
+      <p:grpSpPr>
+        <a:xfrm>
+          <a:off x="0" y="0"/>
+          <a:ext cx="0" cy="0"/>
+          <a:chOff x="0" y="0"/>
+          <a:chExt cx="0" cy="0"/>
+        </a:xfrm>
+      </p:grpSpPr>
+      <p:sp>
+        <p:nvSpPr>
+          <p:cNvPr id="2" name="제목 1">
+            <a:extLst>
+              <a:ext uri="{FF2B5EF4-FFF2-40B4-BE49-F238E27FC236}">
+                <a16:creationId xmlns:a16="http://schemas.microsoft.com/office/drawing/2014/main" id="{6FFB2921-2403-DBE0-B2C4-1D7E9BE5279F}"/>
+              </a:ext>
+            </a:extLst>
+          </p:cNvPr>
+          <p:cNvSpPr>
+            <a:spLocks noGrp="1"/>
+          </p:cNvSpPr>
+          <p:nvPr>
+            <p:ph type="title"/>
+          </p:nvPr>
+        </p:nvSpPr>
+        <p:spPr/>
+        <p:txBody>
+          <a:bodyPr/>
+          <a:lstStyle/>
+          <a:p>
+            <a:endParaRPr lang="ko-KR" altLang="en-US"/>
+          </a:p>
+        </p:txBody>
+      </p:sp>
+      <p:sp>
+        <p:nvSpPr>
+          <p:cNvPr id="3" name="내용 개체 틀 2">
+            <a:extLst>
+              <a:ext uri="{FF2B5EF4-FFF2-40B4-BE49-F238E27FC236}">
+                <a16:creationId xmlns:a16="http://schemas.microsoft.com/office/drawing/2014/main" id="{734BA7B8-C256-657C-3A59-A19DCA1AC8A7}"/>
+              </a:ext>
+            </a:extLst>
+          </p:cNvPr>
+          <p:cNvSpPr>
+            <a:spLocks noGrp="1"/>
+          </p:cNvSpPr>
+          <p:nvPr>
+            <p:ph idx="1"/>
+          </p:nvPr>
+        </p:nvSpPr>
+        <p:spPr/>
+        <p:txBody>
+          <a:bodyPr/>
+          <a:lstStyle/>
+          <a:p>
+            <a:endParaRPr lang="ko-KR" altLang="en-US"/>
+          </a:p>
+        </p:txBody>
+      </p:sp>
+    </p:spTree>
+    <p:extLst>
+      <p:ext uri="{BB962C8B-B14F-4D97-AF65-F5344CB8AC3E}">
+        <p14:creationId xmlns:p14="http://schemas.microsoft.com/office/powerpoint/2010/main" val="2191778789"/>
+      </p:ext>
+    </p:extLst>
+  </p:cSld>
+  <p:clrMapOvr>
+    <a:masterClrMapping/>
+  </p:clrMapOvr>
+</p:sld>
+</file>
+
+<file path=ppt/slides/slide4.xml><?xml version="1.0" encoding="utf-8"?>
+<p:sld xmlns:a="http://schemas.openxmlformats.org/drawingml/2006/main" xmlns:r="http://schemas.openxmlformats.org/officeDocument/2006/relationships" xmlns:p="http://schemas.openxmlformats.org/presentationml/2006/main">
+  <p:cSld>
+    <p:spTree>
+      <p:nvGrpSpPr>
+        <p:cNvPr id="1" name=""/>
+        <p:cNvGrpSpPr/>
+        <p:nvPr/>
+      </p:nvGrpSpPr>
+      <p:grpSpPr>
+        <a:xfrm>
+          <a:off x="0" y="0"/>
+          <a:ext cx="0" cy="0"/>
+          <a:chOff x="0" y="0"/>
+          <a:chExt cx="0" cy="0"/>
+        </a:xfrm>
+      </p:grpSpPr>
+      <p:sp>
+        <p:nvSpPr>
+          <p:cNvPr id="2" name="제목 1">
+            <a:extLst>
+              <a:ext uri="{FF2B5EF4-FFF2-40B4-BE49-F238E27FC236}">
+                <a16:creationId xmlns:a16="http://schemas.microsoft.com/office/drawing/2014/main" id="{0EE89004-4F2A-B8AC-A1D3-A45A29CB7D66}"/>
+              </a:ext>
+            </a:extLst>
+          </p:cNvPr>
+          <p:cNvSpPr>
+            <a:spLocks noGrp="1"/>
+          </p:cNvSpPr>
+          <p:nvPr>
+            <p:ph type="title"/>
+          </p:nvPr>
+        </p:nvSpPr>
+        <p:spPr/>
+        <p:txBody>
+          <a:bodyPr/>
+          <a:lstStyle/>
+          <a:p>
+            <a:endParaRPr lang="ko-KR" altLang="en-US"/>
+          </a:p>
+        </p:txBody>
+      </p:sp>
+      <p:sp>
+        <p:nvSpPr>
+          <p:cNvPr id="3" name="내용 개체 틀 2">
+            <a:extLst>
+              <a:ext uri="{FF2B5EF4-FFF2-40B4-BE49-F238E27FC236}">
+                <a16:creationId xmlns:a16="http://schemas.microsoft.com/office/drawing/2014/main" id="{39F1ADE9-9E8A-4C04-9696-49C358CFDCF8}"/>
+              </a:ext>
+            </a:extLst>
+          </p:cNvPr>
+          <p:cNvSpPr>
+            <a:spLocks noGrp="1"/>
+          </p:cNvSpPr>
+          <p:nvPr>
+            <p:ph idx="1"/>
+          </p:nvPr>
+        </p:nvSpPr>
+        <p:spPr/>
+        <p:txBody>
+          <a:bodyPr/>
+          <a:lstStyle/>
+          <a:p>
+            <a:endParaRPr lang="ko-KR" altLang="en-US"/>
+          </a:p>
+        </p:txBody>
+      </p:sp>
+    </p:spTree>
+    <p:extLst>
+      <p:ext uri="{BB962C8B-B14F-4D97-AF65-F5344CB8AC3E}">
+        <p14:creationId xmlns:p14="http://schemas.microsoft.com/office/powerpoint/2010/main" val="2513305449"/>
+      </p:ext>
+    </p:extLst>
+  </p:cSld>
+  <p:clrMapOvr>
+    <a:masterClrMapping/>
+  </p:clrMapOvr>
+</p:sld>
+</file>
+
+<file path=ppt/slides/slide5.xml><?xml version="1.0" encoding="utf-8"?>
+<p:sld xmlns:a="http://schemas.openxmlformats.org/drawingml/2006/main" xmlns:r="http://schemas.openxmlformats.org/officeDocument/2006/relationships" xmlns:p="http://schemas.openxmlformats.org/presentationml/2006/main">
+  <p:cSld>
+    <p:spTree>
+      <p:nvGrpSpPr>
+        <p:cNvPr id="1" name=""/>
+        <p:cNvGrpSpPr/>
+        <p:nvPr/>
+      </p:nvGrpSpPr>
+      <p:grpSpPr>
+        <a:xfrm>
+          <a:off x="0" y="0"/>
+          <a:ext cx="0" cy="0"/>
+          <a:chOff x="0" y="0"/>
+          <a:chExt cx="0" cy="0"/>
+        </a:xfrm>
+      </p:grpSpPr>
+      <p:sp>
+        <p:nvSpPr>
+          <p:cNvPr id="2" name="제목 1">
+            <a:extLst>
+              <a:ext uri="{FF2B5EF4-FFF2-40B4-BE49-F238E27FC236}">
+                <a16:creationId xmlns:a16="http://schemas.microsoft.com/office/drawing/2014/main" id="{33CEF3DE-50AC-AF66-8256-754D24441963}"/>
+              </a:ext>
+            </a:extLst>
+          </p:cNvPr>
+          <p:cNvSpPr>
+            <a:spLocks noGrp="1"/>
+          </p:cNvSpPr>
+          <p:nvPr>
+            <p:ph type="title"/>
+          </p:nvPr>
+        </p:nvSpPr>
+        <p:spPr/>
+        <p:txBody>
+          <a:bodyPr/>
+          <a:lstStyle/>
+          <a:p>
+            <a:endParaRPr lang="ko-KR" altLang="en-US"/>
+          </a:p>
+        </p:txBody>
+      </p:sp>
+      <p:sp>
+        <p:nvSpPr>
+          <p:cNvPr id="3" name="내용 개체 틀 2">
+            <a:extLst>
+              <a:ext uri="{FF2B5EF4-FFF2-40B4-BE49-F238E27FC236}">
+                <a16:creationId xmlns:a16="http://schemas.microsoft.com/office/drawing/2014/main" id="{D40D8EA0-854A-F593-9D4B-70BED1C4BE5A}"/>
+              </a:ext>
+            </a:extLst>
+          </p:cNvPr>
+          <p:cNvSpPr>
+            <a:spLocks noGrp="1"/>
+          </p:cNvSpPr>
+          <p:nvPr>
+            <p:ph idx="1"/>
+          </p:nvPr>
+        </p:nvSpPr>
+        <p:spPr/>
+        <p:txBody>
+          <a:bodyPr/>
+          <a:lstStyle/>
+          <a:p>
+            <a:endParaRPr lang="ko-KR" altLang="en-US"/>
+          </a:p>
+        </p:txBody>
+      </p:sp>
+    </p:spTree>
+    <p:extLst>
+      <p:ext uri="{BB962C8B-B14F-4D97-AF65-F5344CB8AC3E}">
+        <p14:creationId xmlns:p14="http://schemas.microsoft.com/office/powerpoint/2010/main" val="3869624506"/>
+      </p:ext>
+    </p:extLst>
+  </p:cSld>
+  <p:clrMapOvr>
+    <a:masterClrMapping/>
+  </p:clrMapOvr>
+</p:sld>
+</file>
+
 <file path=ppt/slides/slide6.xml><?xml version="1.0" encoding="utf-8"?>
 <p:sld xmlns:a="http://schemas.openxmlformats.org/drawingml/2006/main" xmlns:r="http://schemas.openxmlformats.org/officeDocument/2006/relationships" xmlns:p="http://schemas.openxmlformats.org/presentationml/2006/main">
   <p:cSld>
@@ -3358,7 +3628,14 @@
           <a:bodyPr/>
           <a:lstStyle/>
           <a:p>
-            <a:endParaRPr lang="ko-KR" altLang="en-US"/>
+            <a:r>
+              <a:rPr lang="en-US" altLang="ko-KR" dirty="0"/>
+              <a:t>6T SRAM </a:t>
+            </a:r>
+            <a:r>
+              <a:rPr lang="ko-KR" altLang="en-US" dirty="0"/>
+              <a:t>메모리 셀 레이아웃</a:t>
+            </a:r>
           </a:p>
         </p:txBody>
       </p:sp>
@@ -3380,8 +3657,8 @@
         </p:blipFill>
         <p:spPr>
           <a:xfrm>
-            <a:off x="838200" y="1954159"/>
-            <a:ext cx="6732706" cy="4351338"/>
+            <a:off x="838200" y="1967807"/>
+            <a:ext cx="10607566" cy="4351338"/>
           </a:xfrm>
           <a:prstGeom prst="rect">
             <a:avLst/>
@@ -3433,40 +3710,121 @@
           <a:bodyPr/>
           <a:lstStyle/>
           <a:p>
-            <a:endParaRPr lang="ko-KR" altLang="en-US"/>
-          </a:p>
-        </p:txBody>
-      </p:sp>
-      <p:pic>
-        <p:nvPicPr>
-          <p:cNvPr id="4" name="내용 개체 틀 3"/>
-          <p:cNvPicPr>
-            <a:picLocks noGrp="1" noChangeAspect="1"/>
-          </p:cNvPicPr>
+            <a:r>
+              <a:rPr lang="en-US" altLang="ko-KR" dirty="0"/>
+              <a:t>6T SRAM Schematic</a:t>
+            </a:r>
+            <a:r>
+              <a:rPr lang="ko-KR" altLang="en-US" dirty="0"/>
+              <a:t> 설계</a:t>
+            </a:r>
+          </a:p>
+        </p:txBody>
+      </p:sp>
+      <p:sp>
+        <p:nvSpPr>
+          <p:cNvPr id="3" name="내용 개체 틀 2"/>
+          <p:cNvSpPr>
+            <a:spLocks noGrp="1"/>
+          </p:cNvSpPr>
           <p:nvPr>
             <p:ph idx="1"/>
           </p:nvPr>
-        </p:nvPicPr>
-        <p:blipFill>
-          <a:blip r:embed="rId2"/>
-          <a:stretch>
-            <a:fillRect/>
-          </a:stretch>
-        </p:blipFill>
-        <p:spPr>
-          <a:xfrm>
-            <a:off x="838200" y="1898393"/>
-            <a:ext cx="7516274" cy="4267796"/>
-          </a:xfrm>
-          <a:prstGeom prst="rect">
-            <a:avLst/>
-          </a:prstGeom>
-        </p:spPr>
-      </p:pic>
+        </p:nvSpPr>
+        <p:spPr/>
+        <p:txBody>
+          <a:bodyPr/>
+          <a:lstStyle/>
+          <a:p>
+            <a:r>
+              <a:rPr lang="en-US" altLang="ko-KR" dirty="0" err="1"/>
+              <a:t>Analoglib</a:t>
+            </a:r>
+            <a:r>
+              <a:rPr lang="en-US" altLang="ko-KR" dirty="0"/>
+              <a:t> </a:t>
+            </a:r>
+            <a:r>
+              <a:rPr lang="ko-KR" altLang="en-US" dirty="0"/>
+              <a:t>기단에서 </a:t>
+            </a:r>
+            <a:r>
+              <a:rPr lang="en-US" altLang="ko-KR" dirty="0"/>
+              <a:t>PMOS, NMOS, </a:t>
+            </a:r>
+            <a:r>
+              <a:rPr lang="ko-KR" altLang="en-US" dirty="0"/>
+              <a:t>전원 핀</a:t>
+            </a:r>
+            <a:r>
+              <a:rPr lang="en-US" altLang="ko-KR" dirty="0"/>
+              <a:t>, word-line, bit-line </a:t>
+            </a:r>
+            <a:r>
+              <a:rPr lang="ko-KR" altLang="en-US" dirty="0"/>
+              <a:t>소자를 배치한다</a:t>
+            </a:r>
+            <a:r>
+              <a:rPr lang="en-US" altLang="ko-KR" dirty="0"/>
+              <a:t>.</a:t>
+            </a:r>
+          </a:p>
+          <a:p>
+            <a:r>
+              <a:rPr lang="en-US" altLang="ko-KR" dirty="0"/>
+              <a:t>6</a:t>
+            </a:r>
+            <a:r>
+              <a:rPr lang="ko-KR" altLang="en-US" dirty="0"/>
+              <a:t>개의 트랜지스터</a:t>
+            </a:r>
+            <a:r>
+              <a:rPr lang="en-US" altLang="ko-KR" dirty="0"/>
+              <a:t>(P1, P2, N1, N2, M5, M6)</a:t>
+            </a:r>
+            <a:r>
+              <a:rPr lang="ko-KR" altLang="en-US" dirty="0"/>
+              <a:t>를 교차 연결한다</a:t>
+            </a:r>
+            <a:r>
+              <a:rPr lang="en-US" altLang="ko-KR" dirty="0"/>
+              <a:t>.</a:t>
+            </a:r>
+          </a:p>
+          <a:p>
+            <a:r>
+              <a:rPr lang="ko-KR" altLang="en-US" dirty="0"/>
+              <a:t>초기 충전용 </a:t>
+            </a:r>
+            <a:r>
+              <a:rPr lang="en-US" altLang="ko-KR" dirty="0"/>
+              <a:t>PMOS,</a:t>
+            </a:r>
+            <a:r>
+              <a:rPr lang="ko-KR" altLang="en-US" dirty="0"/>
+              <a:t> 센스 앰프용 소자를 추가한다</a:t>
+            </a:r>
+            <a:r>
+              <a:rPr lang="en-US" altLang="ko-KR" dirty="0"/>
+              <a:t>.</a:t>
+            </a:r>
+          </a:p>
+          <a:p>
+            <a:r>
+              <a:rPr lang="ko-KR" altLang="en-US" dirty="0"/>
+              <a:t>핀을 부착하고 네트 이름을 지정한다</a:t>
+            </a:r>
+            <a:r>
+              <a:rPr lang="en-US" altLang="ko-KR" dirty="0"/>
+              <a:t>.</a:t>
+            </a:r>
+          </a:p>
+        </p:txBody>
+      </p:sp>
     </p:spTree>
     <p:extLst>
       <p:ext uri="{BB962C8B-B14F-4D97-AF65-F5344CB8AC3E}">
-        <p14:creationId xmlns:p14="http://schemas.microsoft.com/office/powerpoint/2010/main" val="1129202242"/>
+        <p14:creationId xmlns:p14="http://schemas.microsoft.com/office/powerpoint/2010/main" val="2862500190"/>
       </p:ext>
     </p:extLst>
   </p:cSld>
@@ -3508,7 +3866,10 @@
           <a:bodyPr/>
           <a:lstStyle/>
           <a:p>
-            <a:endParaRPr lang="ko-KR" altLang="en-US"/>
+            <a:r>
+              <a:rPr lang="ko-KR" altLang="en-US" dirty="0"/>
+              <a:t>레이아웃 생성과정</a:t>
+            </a:r>
           </a:p>
         </p:txBody>
       </p:sp>
@@ -3527,14 +3888,136 @@
           <a:bodyPr/>
           <a:lstStyle/>
           <a:p>
-            <a:endParaRPr lang="ko-KR" altLang="en-US"/>
+            <a:r>
+              <a:rPr lang="en-US" altLang="ko-KR" dirty="0"/>
+              <a:t>Schematic</a:t>
+            </a:r>
+            <a:r>
+              <a:rPr lang="ko-KR" altLang="en-US" dirty="0"/>
+              <a:t>에 기반한 서브블록을 생성한다</a:t>
+            </a:r>
+            <a:r>
+              <a:rPr lang="en-US" altLang="ko-KR" dirty="0"/>
+              <a:t>.</a:t>
+            </a:r>
+          </a:p>
+          <a:p>
+            <a:r>
+              <a:rPr lang="en-US" altLang="ko-KR" dirty="0"/>
+              <a:t>SRAM </a:t>
+            </a:r>
+            <a:r>
+              <a:rPr lang="ko-KR" altLang="en-US" dirty="0"/>
+              <a:t>셀을 포함한 각각의 </a:t>
+            </a:r>
+            <a:r>
+              <a:rPr lang="en-US" altLang="ko-KR" dirty="0"/>
+              <a:t>Symbol</a:t>
+            </a:r>
+            <a:r>
+              <a:rPr lang="ko-KR" altLang="en-US" dirty="0"/>
+              <a:t>을 생성한다</a:t>
+            </a:r>
+            <a:r>
+              <a:rPr lang="en-US" altLang="ko-KR" dirty="0"/>
+              <a:t>.</a:t>
+            </a:r>
+          </a:p>
+          <a:p>
+            <a:r>
+              <a:rPr lang="ko-KR" altLang="en-US" dirty="0"/>
+              <a:t>새로운 </a:t>
+            </a:r>
+            <a:r>
+              <a:rPr lang="en-US" altLang="ko-KR" dirty="0" err="1"/>
+              <a:t>cellview</a:t>
+            </a:r>
+            <a:r>
+              <a:rPr lang="ko-KR" altLang="en-US" dirty="0"/>
+              <a:t>로 </a:t>
+            </a:r>
+            <a:r>
+              <a:rPr lang="en-US" altLang="ko-KR" dirty="0"/>
+              <a:t>layout</a:t>
+            </a:r>
+            <a:r>
+              <a:rPr lang="ko-KR" altLang="en-US" dirty="0"/>
+              <a:t>을 생성한다</a:t>
+            </a:r>
+            <a:r>
+              <a:rPr lang="en-US" altLang="ko-KR" dirty="0"/>
+              <a:t>.</a:t>
+            </a:r>
+          </a:p>
+          <a:p>
+            <a:r>
+              <a:rPr lang="ko-KR" altLang="en-US" dirty="0"/>
+              <a:t>트랜지스터를 구현하는데</a:t>
+            </a:r>
+            <a:r>
+              <a:rPr lang="en-US" altLang="ko-KR" dirty="0"/>
+              <a:t>, </a:t>
+            </a:r>
+            <a:r>
+              <a:rPr lang="ko-KR" altLang="en-US" dirty="0"/>
+              <a:t>여기서 </a:t>
+            </a:r>
+            <a:r>
+              <a:rPr lang="en-US" altLang="ko-KR" dirty="0" err="1"/>
+              <a:t>pmos</a:t>
+            </a:r>
+            <a:r>
+              <a:rPr lang="en-US" altLang="ko-KR" dirty="0"/>
+              <a:t> </a:t>
+            </a:r>
+            <a:r>
+              <a:rPr lang="ko-KR" altLang="en-US" dirty="0"/>
+              <a:t>영역은 </a:t>
+            </a:r>
+            <a:r>
+              <a:rPr lang="en-US" altLang="ko-KR" dirty="0"/>
+              <a:t>n-well</a:t>
+            </a:r>
+            <a:r>
+              <a:rPr lang="ko-KR" altLang="en-US" dirty="0"/>
+              <a:t>을 포함해야 한다</a:t>
+            </a:r>
+            <a:r>
+              <a:rPr lang="en-US" altLang="ko-KR" dirty="0"/>
+              <a:t>.</a:t>
+            </a:r>
+          </a:p>
+          <a:p>
+            <a:r>
+              <a:rPr lang="ko-KR" altLang="en-US" dirty="0"/>
+              <a:t>핀 레이어를 통해 신호를 연결한다</a:t>
+            </a:r>
+            <a:r>
+              <a:rPr lang="en-US" altLang="ko-KR" dirty="0"/>
+              <a:t>.</a:t>
+            </a:r>
+          </a:p>
+          <a:p>
+            <a:r>
+              <a:rPr lang="en-US" altLang="ko-KR" dirty="0"/>
+              <a:t>DRC </a:t>
+            </a:r>
+            <a:r>
+              <a:rPr lang="ko-KR" altLang="en-US" dirty="0"/>
+              <a:t>검사 후 오류를 수정한다</a:t>
+            </a:r>
+            <a:r>
+              <a:rPr lang="en-US" altLang="ko-KR" dirty="0"/>
+              <a:t>.</a:t>
+            </a:r>
+            <a:endParaRPr lang="ko-KR" altLang="en-US" dirty="0"/>
           </a:p>
         </p:txBody>
       </p:sp>
     </p:spTree>
     <p:extLst>
       <p:ext uri="{BB962C8B-B14F-4D97-AF65-F5344CB8AC3E}">
-        <p14:creationId xmlns:p14="http://schemas.microsoft.com/office/powerpoint/2010/main" val="2862500190"/>
+        <p14:creationId xmlns:p14="http://schemas.microsoft.com/office/powerpoint/2010/main" val="1719335813"/>
       </p:ext>
     </p:extLst>
   </p:cSld>
@@ -3563,7 +4046,13 @@
       </p:grpSpPr>
       <p:sp>
         <p:nvSpPr>
-          <p:cNvPr id="2" name="제목 1"/>
+          <p:cNvPr id="2" name="제목 1">
+            <a:extLst>
+              <a:ext uri="{FF2B5EF4-FFF2-40B4-BE49-F238E27FC236}">
+                <a16:creationId xmlns:a16="http://schemas.microsoft.com/office/drawing/2014/main" id="{8FE62AE9-4285-B5CB-5B4F-DC232C063ED1}"/>
+              </a:ext>
+            </a:extLst>
+          </p:cNvPr>
           <p:cNvSpPr>
             <a:spLocks noGrp="1"/>
           </p:cNvSpPr>
@@ -3582,7 +4071,13 @@
       </p:sp>
       <p:sp>
         <p:nvSpPr>
-          <p:cNvPr id="3" name="내용 개체 틀 2"/>
+          <p:cNvPr id="3" name="내용 개체 틀 2">
+            <a:extLst>
+              <a:ext uri="{FF2B5EF4-FFF2-40B4-BE49-F238E27FC236}">
+                <a16:creationId xmlns:a16="http://schemas.microsoft.com/office/drawing/2014/main" id="{6511CAA7-6EF9-4380-8C03-C1C1132A6438}"/>
+              </a:ext>
+            </a:extLst>
+          </p:cNvPr>
           <p:cNvSpPr>
             <a:spLocks noGrp="1"/>
           </p:cNvSpPr>
@@ -3595,14 +4090,14 @@
           <a:bodyPr/>
           <a:lstStyle/>
           <a:p>
-            <a:endParaRPr lang="ko-KR" altLang="en-US" dirty="0"/>
+            <a:endParaRPr lang="ko-KR" altLang="en-US"/>
           </a:p>
         </p:txBody>
       </p:sp>
     </p:spTree>
     <p:extLst>
       <p:ext uri="{BB962C8B-B14F-4D97-AF65-F5344CB8AC3E}">
-        <p14:creationId xmlns:p14="http://schemas.microsoft.com/office/powerpoint/2010/main" val="1719335813"/>
+        <p14:creationId xmlns:p14="http://schemas.microsoft.com/office/powerpoint/2010/main" val="2034143713"/>
       </p:ext>
     </p:extLst>
   </p:cSld>

--- a/VLSI design 설계 실습/2025-06-13.pptx
+++ b/VLSI design 설계 실습/2025-06-13.pptx
@@ -7,16 +7,15 @@
   <p:sldIdLst>
     <p:sldId id="256" r:id="rId2"/>
     <p:sldId id="257" r:id="rId3"/>
-    <p:sldId id="262" r:id="rId4"/>
-    <p:sldId id="263" r:id="rId5"/>
-    <p:sldId id="264" r:id="rId6"/>
-    <p:sldId id="258" r:id="rId7"/>
-    <p:sldId id="260" r:id="rId8"/>
-    <p:sldId id="261" r:id="rId9"/>
-    <p:sldId id="265" r:id="rId10"/>
-    <p:sldId id="266" r:id="rId11"/>
-    <p:sldId id="267" r:id="rId12"/>
-    <p:sldId id="259" r:id="rId13"/>
+    <p:sldId id="263" r:id="rId4"/>
+    <p:sldId id="258" r:id="rId5"/>
+    <p:sldId id="260" r:id="rId6"/>
+    <p:sldId id="261" r:id="rId7"/>
+    <p:sldId id="264" r:id="rId8"/>
+    <p:sldId id="265" r:id="rId9"/>
+    <p:sldId id="266" r:id="rId10"/>
+    <p:sldId id="267" r:id="rId11"/>
+    <p:sldId id="259" r:id="rId12"/>
   </p:sldIdLst>
   <p:sldSz cx="12192000" cy="6858000"/>
   <p:notesSz cx="6858000" cy="9144000"/>
@@ -252,7 +251,7 @@
           <a:p>
             <a:fld id="{088498B5-61CB-4D33-9D13-11B461C68DAA}" type="datetimeFigureOut">
               <a:rPr lang="ko-KR" altLang="en-US" smtClean="0"/>
-              <a:t>2025-06-16</a:t>
+              <a:t>2025-06-17</a:t>
             </a:fld>
             <a:endParaRPr lang="ko-KR" altLang="en-US"/>
           </a:p>
@@ -420,7 +419,7 @@
           <a:p>
             <a:fld id="{088498B5-61CB-4D33-9D13-11B461C68DAA}" type="datetimeFigureOut">
               <a:rPr lang="ko-KR" altLang="en-US" smtClean="0"/>
-              <a:t>2025-06-16</a:t>
+              <a:t>2025-06-17</a:t>
             </a:fld>
             <a:endParaRPr lang="ko-KR" altLang="en-US"/>
           </a:p>
@@ -598,7 +597,7 @@
           <a:p>
             <a:fld id="{088498B5-61CB-4D33-9D13-11B461C68DAA}" type="datetimeFigureOut">
               <a:rPr lang="ko-KR" altLang="en-US" smtClean="0"/>
-              <a:t>2025-06-16</a:t>
+              <a:t>2025-06-17</a:t>
             </a:fld>
             <a:endParaRPr lang="ko-KR" altLang="en-US"/>
           </a:p>
@@ -766,7 +765,7 @@
           <a:p>
             <a:fld id="{088498B5-61CB-4D33-9D13-11B461C68DAA}" type="datetimeFigureOut">
               <a:rPr lang="ko-KR" altLang="en-US" smtClean="0"/>
-              <a:t>2025-06-16</a:t>
+              <a:t>2025-06-17</a:t>
             </a:fld>
             <a:endParaRPr lang="ko-KR" altLang="en-US"/>
           </a:p>
@@ -1011,7 +1010,7 @@
           <a:p>
             <a:fld id="{088498B5-61CB-4D33-9D13-11B461C68DAA}" type="datetimeFigureOut">
               <a:rPr lang="ko-KR" altLang="en-US" smtClean="0"/>
-              <a:t>2025-06-16</a:t>
+              <a:t>2025-06-17</a:t>
             </a:fld>
             <a:endParaRPr lang="ko-KR" altLang="en-US"/>
           </a:p>
@@ -1240,7 +1239,7 @@
           <a:p>
             <a:fld id="{088498B5-61CB-4D33-9D13-11B461C68DAA}" type="datetimeFigureOut">
               <a:rPr lang="ko-KR" altLang="en-US" smtClean="0"/>
-              <a:t>2025-06-16</a:t>
+              <a:t>2025-06-17</a:t>
             </a:fld>
             <a:endParaRPr lang="ko-KR" altLang="en-US"/>
           </a:p>
@@ -1604,7 +1603,7 @@
           <a:p>
             <a:fld id="{088498B5-61CB-4D33-9D13-11B461C68DAA}" type="datetimeFigureOut">
               <a:rPr lang="ko-KR" altLang="en-US" smtClean="0"/>
-              <a:t>2025-06-16</a:t>
+              <a:t>2025-06-17</a:t>
             </a:fld>
             <a:endParaRPr lang="ko-KR" altLang="en-US"/>
           </a:p>
@@ -1721,7 +1720,7 @@
           <a:p>
             <a:fld id="{088498B5-61CB-4D33-9D13-11B461C68DAA}" type="datetimeFigureOut">
               <a:rPr lang="ko-KR" altLang="en-US" smtClean="0"/>
-              <a:t>2025-06-16</a:t>
+              <a:t>2025-06-17</a:t>
             </a:fld>
             <a:endParaRPr lang="ko-KR" altLang="en-US"/>
           </a:p>
@@ -1816,7 +1815,7 @@
           <a:p>
             <a:fld id="{088498B5-61CB-4D33-9D13-11B461C68DAA}" type="datetimeFigureOut">
               <a:rPr lang="ko-KR" altLang="en-US" smtClean="0"/>
-              <a:t>2025-06-16</a:t>
+              <a:t>2025-06-17</a:t>
             </a:fld>
             <a:endParaRPr lang="ko-KR" altLang="en-US"/>
           </a:p>
@@ -2091,7 +2090,7 @@
           <a:p>
             <a:fld id="{088498B5-61CB-4D33-9D13-11B461C68DAA}" type="datetimeFigureOut">
               <a:rPr lang="ko-KR" altLang="en-US" smtClean="0"/>
-              <a:t>2025-06-16</a:t>
+              <a:t>2025-06-17</a:t>
             </a:fld>
             <a:endParaRPr lang="ko-KR" altLang="en-US"/>
           </a:p>
@@ -2343,7 +2342,7 @@
           <a:p>
             <a:fld id="{088498B5-61CB-4D33-9D13-11B461C68DAA}" type="datetimeFigureOut">
               <a:rPr lang="ko-KR" altLang="en-US" smtClean="0"/>
-              <a:t>2025-06-16</a:t>
+              <a:t>2025-06-17</a:t>
             </a:fld>
             <a:endParaRPr lang="ko-KR" altLang="en-US"/>
           </a:p>
@@ -2572,7 +2571,7 @@
           <a:p>
             <a:fld id="{088498B5-61CB-4D33-9D13-11B461C68DAA}" type="datetimeFigureOut">
               <a:rPr lang="ko-KR" altLang="en-US" smtClean="0"/>
-              <a:t>2025-06-16</a:t>
+              <a:t>2025-06-17</a:t>
             </a:fld>
             <a:endParaRPr lang="ko-KR" altLang="en-US"/>
           </a:p>
@@ -3057,86 +3056,6 @@
           <p:cNvPr id="2" name="제목 1">
             <a:extLst>
               <a:ext uri="{FF2B5EF4-FFF2-40B4-BE49-F238E27FC236}">
-                <a16:creationId xmlns:a16="http://schemas.microsoft.com/office/drawing/2014/main" id="{CCECD2BA-830A-6C90-C17B-E347CB48A6CB}"/>
-              </a:ext>
-            </a:extLst>
-          </p:cNvPr>
-          <p:cNvSpPr>
-            <a:spLocks noGrp="1"/>
-          </p:cNvSpPr>
-          <p:nvPr>
-            <p:ph type="title"/>
-          </p:nvPr>
-        </p:nvSpPr>
-        <p:spPr/>
-        <p:txBody>
-          <a:bodyPr/>
-          <a:lstStyle/>
-          <a:p>
-            <a:endParaRPr lang="ko-KR" altLang="en-US"/>
-          </a:p>
-        </p:txBody>
-      </p:sp>
-      <p:sp>
-        <p:nvSpPr>
-          <p:cNvPr id="3" name="내용 개체 틀 2">
-            <a:extLst>
-              <a:ext uri="{FF2B5EF4-FFF2-40B4-BE49-F238E27FC236}">
-                <a16:creationId xmlns:a16="http://schemas.microsoft.com/office/drawing/2014/main" id="{DA95D773-687F-A457-641D-06098AA7A34A}"/>
-              </a:ext>
-            </a:extLst>
-          </p:cNvPr>
-          <p:cNvSpPr>
-            <a:spLocks noGrp="1"/>
-          </p:cNvSpPr>
-          <p:nvPr>
-            <p:ph idx="1"/>
-          </p:nvPr>
-        </p:nvSpPr>
-        <p:spPr/>
-        <p:txBody>
-          <a:bodyPr/>
-          <a:lstStyle/>
-          <a:p>
-            <a:endParaRPr lang="ko-KR" altLang="en-US"/>
-          </a:p>
-        </p:txBody>
-      </p:sp>
-    </p:spTree>
-    <p:extLst>
-      <p:ext uri="{BB962C8B-B14F-4D97-AF65-F5344CB8AC3E}">
-        <p14:creationId xmlns:p14="http://schemas.microsoft.com/office/powerpoint/2010/main" val="857959110"/>
-      </p:ext>
-    </p:extLst>
-  </p:cSld>
-  <p:clrMapOvr>
-    <a:masterClrMapping/>
-  </p:clrMapOvr>
-</p:sld>
-</file>
-
-<file path=ppt/slides/slide11.xml><?xml version="1.0" encoding="utf-8"?>
-<p:sld xmlns:a="http://schemas.openxmlformats.org/drawingml/2006/main" xmlns:r="http://schemas.openxmlformats.org/officeDocument/2006/relationships" xmlns:p="http://schemas.openxmlformats.org/presentationml/2006/main">
-  <p:cSld>
-    <p:spTree>
-      <p:nvGrpSpPr>
-        <p:cNvPr id="1" name=""/>
-        <p:cNvGrpSpPr/>
-        <p:nvPr/>
-      </p:nvGrpSpPr>
-      <p:grpSpPr>
-        <a:xfrm>
-          <a:off x="0" y="0"/>
-          <a:ext cx="0" cy="0"/>
-          <a:chOff x="0" y="0"/>
-          <a:chExt cx="0" cy="0"/>
-        </a:xfrm>
-      </p:grpSpPr>
-      <p:sp>
-        <p:nvSpPr>
-          <p:cNvPr id="2" name="제목 1">
-            <a:extLst>
-              <a:ext uri="{FF2B5EF4-FFF2-40B4-BE49-F238E27FC236}">
                 <a16:creationId xmlns:a16="http://schemas.microsoft.com/office/drawing/2014/main" id="{CAFD3FCF-13B5-2893-1B7A-C0D15A4CB900}"/>
               </a:ext>
             </a:extLst>
@@ -3195,7 +3114,7 @@
 </p:sld>
 </file>
 
-<file path=ppt/slides/slide12.xml><?xml version="1.0" encoding="utf-8"?>
+<file path=ppt/slides/slide11.xml><?xml version="1.0" encoding="utf-8"?>
 <p:sld xmlns:a="http://schemas.openxmlformats.org/drawingml/2006/main" xmlns:r="http://schemas.openxmlformats.org/officeDocument/2006/relationships" xmlns:p="http://schemas.openxmlformats.org/presentationml/2006/main">
   <p:cSld>
     <p:spTree>
@@ -3335,8 +3254,8 @@
         </p:blipFill>
         <p:spPr>
           <a:xfrm>
-            <a:off x="838200" y="1872120"/>
-            <a:ext cx="7050437" cy="4351338"/>
+            <a:off x="838201" y="1872120"/>
+            <a:ext cx="10515600" cy="4351338"/>
           </a:xfrm>
           <a:prstGeom prst="rect">
             <a:avLst/>
@@ -3378,86 +3297,6 @@
           <p:cNvPr id="2" name="제목 1">
             <a:extLst>
               <a:ext uri="{FF2B5EF4-FFF2-40B4-BE49-F238E27FC236}">
-                <a16:creationId xmlns:a16="http://schemas.microsoft.com/office/drawing/2014/main" id="{6FFB2921-2403-DBE0-B2C4-1D7E9BE5279F}"/>
-              </a:ext>
-            </a:extLst>
-          </p:cNvPr>
-          <p:cNvSpPr>
-            <a:spLocks noGrp="1"/>
-          </p:cNvSpPr>
-          <p:nvPr>
-            <p:ph type="title"/>
-          </p:nvPr>
-        </p:nvSpPr>
-        <p:spPr/>
-        <p:txBody>
-          <a:bodyPr/>
-          <a:lstStyle/>
-          <a:p>
-            <a:endParaRPr lang="ko-KR" altLang="en-US"/>
-          </a:p>
-        </p:txBody>
-      </p:sp>
-      <p:sp>
-        <p:nvSpPr>
-          <p:cNvPr id="3" name="내용 개체 틀 2">
-            <a:extLst>
-              <a:ext uri="{FF2B5EF4-FFF2-40B4-BE49-F238E27FC236}">
-                <a16:creationId xmlns:a16="http://schemas.microsoft.com/office/drawing/2014/main" id="{734BA7B8-C256-657C-3A59-A19DCA1AC8A7}"/>
-              </a:ext>
-            </a:extLst>
-          </p:cNvPr>
-          <p:cNvSpPr>
-            <a:spLocks noGrp="1"/>
-          </p:cNvSpPr>
-          <p:nvPr>
-            <p:ph idx="1"/>
-          </p:nvPr>
-        </p:nvSpPr>
-        <p:spPr/>
-        <p:txBody>
-          <a:bodyPr/>
-          <a:lstStyle/>
-          <a:p>
-            <a:endParaRPr lang="ko-KR" altLang="en-US"/>
-          </a:p>
-        </p:txBody>
-      </p:sp>
-    </p:spTree>
-    <p:extLst>
-      <p:ext uri="{BB962C8B-B14F-4D97-AF65-F5344CB8AC3E}">
-        <p14:creationId xmlns:p14="http://schemas.microsoft.com/office/powerpoint/2010/main" val="2191778789"/>
-      </p:ext>
-    </p:extLst>
-  </p:cSld>
-  <p:clrMapOvr>
-    <a:masterClrMapping/>
-  </p:clrMapOvr>
-</p:sld>
-</file>
-
-<file path=ppt/slides/slide4.xml><?xml version="1.0" encoding="utf-8"?>
-<p:sld xmlns:a="http://schemas.openxmlformats.org/drawingml/2006/main" xmlns:r="http://schemas.openxmlformats.org/officeDocument/2006/relationships" xmlns:p="http://schemas.openxmlformats.org/presentationml/2006/main">
-  <p:cSld>
-    <p:spTree>
-      <p:nvGrpSpPr>
-        <p:cNvPr id="1" name=""/>
-        <p:cNvGrpSpPr/>
-        <p:nvPr/>
-      </p:nvGrpSpPr>
-      <p:grpSpPr>
-        <a:xfrm>
-          <a:off x="0" y="0"/>
-          <a:ext cx="0" cy="0"/>
-          <a:chOff x="0" y="0"/>
-          <a:chExt cx="0" cy="0"/>
-        </a:xfrm>
-      </p:grpSpPr>
-      <p:sp>
-        <p:nvSpPr>
-          <p:cNvPr id="2" name="제목 1">
-            <a:extLst>
-              <a:ext uri="{FF2B5EF4-FFF2-40B4-BE49-F238E27FC236}">
                 <a16:creationId xmlns:a16="http://schemas.microsoft.com/office/drawing/2014/main" id="{0EE89004-4F2A-B8AC-A1D3-A45A29CB7D66}"/>
               </a:ext>
             </a:extLst>
@@ -3474,7 +3313,19 @@
           <a:bodyPr/>
           <a:lstStyle/>
           <a:p>
-            <a:endParaRPr lang="ko-KR" altLang="en-US"/>
+            <a:r>
+              <a:rPr lang="ko-KR" altLang="en-US" dirty="0" smtClean="0"/>
+              <a:t>디지털 </a:t>
+            </a:r>
+            <a:r>
+              <a:rPr lang="ko-KR" altLang="en-US" dirty="0" err="1" smtClean="0"/>
+              <a:t>테스트벤치</a:t>
+            </a:r>
+            <a:r>
+              <a:rPr lang="ko-KR" altLang="en-US" dirty="0" smtClean="0"/>
+              <a:t> 구조</a:t>
+            </a:r>
+            <a:endParaRPr lang="ko-KR" altLang="en-US" dirty="0"/>
           </a:p>
         </p:txBody>
       </p:sp>
@@ -3496,10 +3347,214 @@
         </p:nvSpPr>
         <p:spPr/>
         <p:txBody>
-          <a:bodyPr/>
-          <a:lstStyle/>
-          <a:p>
-            <a:endParaRPr lang="ko-KR" altLang="en-US"/>
+          <a:bodyPr>
+            <a:normAutofit/>
+          </a:bodyPr>
+          <a:lstStyle/>
+          <a:p>
+            <a:r>
+              <a:rPr lang="ko-KR" altLang="en-US" sz="2200" dirty="0"/>
+              <a:t>링 </a:t>
+            </a:r>
+            <a:r>
+              <a:rPr lang="ko-KR" altLang="en-US" sz="2200" dirty="0" err="1"/>
+              <a:t>오실레이터</a:t>
+            </a:r>
+            <a:r>
+              <a:rPr lang="en-US" altLang="ko-KR" sz="2200" dirty="0"/>
+              <a:t>: </a:t>
+            </a:r>
+            <a:r>
+              <a:rPr lang="ko-KR" altLang="en-US" sz="2200" dirty="0"/>
+              <a:t>ＣＭＯＳ 버퍼나 인버터로 구성되며， 테스트 또는 지연 소스로 사용된다</a:t>
+            </a:r>
+            <a:r>
+              <a:rPr lang="ko-KR" altLang="en-US" sz="2200" dirty="0" smtClean="0"/>
+              <a:t>．</a:t>
+            </a:r>
+            <a:endParaRPr lang="en-US" altLang="ko-KR" sz="2200" dirty="0" smtClean="0"/>
+          </a:p>
+          <a:p>
+            <a:r>
+              <a:rPr lang="en-US" altLang="ko-KR" sz="2200" dirty="0" smtClean="0"/>
+              <a:t>6_cnt_6</a:t>
+            </a:r>
+            <a:r>
+              <a:rPr lang="ko-KR" altLang="en-US" sz="2200" dirty="0" smtClean="0"/>
+              <a:t>：</a:t>
+            </a:r>
+            <a:r>
+              <a:rPr lang="en-US" altLang="ko-KR" sz="2200" dirty="0"/>
+              <a:t>PLL </a:t>
+            </a:r>
+            <a:r>
+              <a:rPr lang="ko-KR" altLang="en-US" sz="2200" dirty="0"/>
+              <a:t>테스트</a:t>
+            </a:r>
+            <a:r>
+              <a:rPr lang="en-US" altLang="ko-KR" sz="2200" dirty="0"/>
+              <a:t>, </a:t>
+            </a:r>
+            <a:r>
+              <a:rPr lang="ko-KR" altLang="en-US" sz="2200" dirty="0"/>
+              <a:t>타이밍 분석</a:t>
+            </a:r>
+            <a:r>
+              <a:rPr lang="en-US" altLang="ko-KR" sz="2200" dirty="0"/>
+              <a:t>, </a:t>
+            </a:r>
+            <a:r>
+              <a:rPr lang="ko-KR" altLang="en-US" sz="2200" dirty="0"/>
+              <a:t>주파수 분할</a:t>
+            </a:r>
+            <a:r>
+              <a:rPr lang="en-US" altLang="ko-KR" sz="2200" dirty="0"/>
+              <a:t>, </a:t>
+            </a:r>
+            <a:r>
+              <a:rPr lang="ko-KR" altLang="en-US" sz="2200" dirty="0"/>
+              <a:t>고속 </a:t>
+            </a:r>
+            <a:r>
+              <a:rPr lang="ko-KR" altLang="en-US" sz="2200" dirty="0" err="1"/>
+              <a:t>카운팅</a:t>
+            </a:r>
+            <a:r>
+              <a:rPr lang="ko-KR" altLang="en-US" sz="2200" dirty="0"/>
+              <a:t> 등에 활용된다</a:t>
+            </a:r>
+            <a:r>
+              <a:rPr lang="en-US" altLang="ko-KR" sz="2200" dirty="0" smtClean="0"/>
+              <a:t>.</a:t>
+            </a:r>
+          </a:p>
+          <a:p>
+            <a:r>
+              <a:rPr lang="en-US" altLang="ko-KR" sz="2200" dirty="0"/>
+              <a:t>2:1 </a:t>
+            </a:r>
+            <a:r>
+              <a:rPr lang="ko-KR" altLang="en-US" sz="2200" dirty="0" err="1"/>
+              <a:t>멀티플렉서</a:t>
+            </a:r>
+            <a:r>
+              <a:rPr lang="ko-KR" altLang="en-US" sz="2200" dirty="0" smtClean="0"/>
+              <a:t>： 두 </a:t>
+            </a:r>
+            <a:r>
+              <a:rPr lang="ko-KR" altLang="en-US" sz="2200" dirty="0"/>
+              <a:t>개의 입력 신호 중 하나를 선택하여 하나의 출력으로 보내는 디지털 스위치 역할을 </a:t>
+            </a:r>
+            <a:r>
+              <a:rPr lang="ko-KR" altLang="en-US" sz="2200" dirty="0" smtClean="0"/>
+              <a:t>한다</a:t>
+            </a:r>
+            <a:r>
+              <a:rPr lang="en-US" altLang="ko-KR" sz="2200" dirty="0" smtClean="0"/>
+              <a:t>.</a:t>
+            </a:r>
+            <a:endParaRPr lang="ko-KR" altLang="en-US" sz="2200" dirty="0"/>
+          </a:p>
+          <a:p>
+            <a:r>
+              <a:rPr lang="en-US" altLang="ko-KR" sz="2200" dirty="0"/>
+              <a:t>ALU </a:t>
+            </a:r>
+            <a:r>
+              <a:rPr lang="ko-KR" altLang="en-US" sz="2200" dirty="0"/>
+              <a:t>블록</a:t>
+            </a:r>
+            <a:r>
+              <a:rPr lang="en-US" altLang="ko-KR" sz="2200" dirty="0"/>
+              <a:t>: </a:t>
+            </a:r>
+            <a:r>
+              <a:rPr lang="ko-KR" altLang="en-US" sz="2200" dirty="0" err="1"/>
+              <a:t>산술연산</a:t>
+            </a:r>
+            <a:r>
+              <a:rPr lang="en-US" altLang="ko-KR" sz="2200" dirty="0"/>
+              <a:t>, </a:t>
+            </a:r>
+            <a:r>
+              <a:rPr lang="ko-KR" altLang="en-US" sz="2200" dirty="0"/>
+              <a:t>논리연산을 </a:t>
+            </a:r>
+            <a:r>
+              <a:rPr lang="ko-KR" altLang="en-US" sz="2200" dirty="0" smtClean="0"/>
+              <a:t>수행한다． 상태 </a:t>
+            </a:r>
+            <a:r>
+              <a:rPr lang="ko-KR" altLang="en-US" sz="2200" dirty="0"/>
+              <a:t>플래그를 </a:t>
+            </a:r>
+            <a:r>
+              <a:rPr lang="ko-KR" altLang="en-US" sz="2200" dirty="0" smtClean="0"/>
+              <a:t>출력하고</a:t>
+            </a:r>
+            <a:r>
+              <a:rPr lang="en-US" altLang="ko-KR" sz="2200" dirty="0" smtClean="0"/>
+              <a:t>, CPU</a:t>
+            </a:r>
+            <a:r>
+              <a:rPr lang="ko-KR" altLang="en-US" sz="2200" dirty="0"/>
+              <a:t>의 핵심 구성 블록을 담당한다</a:t>
+            </a:r>
+            <a:r>
+              <a:rPr lang="en-US" altLang="ko-KR" sz="2200" dirty="0" smtClean="0"/>
+              <a:t>.</a:t>
+            </a:r>
+          </a:p>
+          <a:p>
+            <a:r>
+              <a:rPr lang="ko-KR" altLang="en-US" sz="2200" dirty="0" smtClean="0"/>
+              <a:t>측정용 더미 블록</a:t>
+            </a:r>
+            <a:r>
+              <a:rPr lang="en-US" altLang="ko-KR" sz="2200" dirty="0" smtClean="0"/>
+              <a:t>: </a:t>
+            </a:r>
+            <a:r>
+              <a:rPr lang="ko-KR" altLang="en-US" sz="2200" dirty="0" smtClean="0"/>
+              <a:t>공정 중 레이아웃 밀도 균일화</a:t>
+            </a:r>
+            <a:r>
+              <a:rPr lang="en-US" altLang="ko-KR" sz="2200" dirty="0" smtClean="0"/>
+              <a:t>, </a:t>
+            </a:r>
+            <a:r>
+              <a:rPr lang="ko-KR" altLang="en-US" sz="2200" dirty="0" smtClean="0"/>
+              <a:t>메모리의 </a:t>
+            </a:r>
+            <a:r>
+              <a:rPr lang="ko-KR" altLang="en-US" sz="2200" dirty="0" err="1" smtClean="0"/>
+              <a:t>기준값</a:t>
+            </a:r>
+            <a:r>
+              <a:rPr lang="ko-KR" altLang="en-US" sz="2200" dirty="0" smtClean="0"/>
+              <a:t> 제공</a:t>
+            </a:r>
+            <a:r>
+              <a:rPr lang="en-US" altLang="ko-KR" sz="2200" dirty="0" smtClean="0"/>
+              <a:t>, </a:t>
+            </a:r>
+            <a:r>
+              <a:rPr lang="ko-KR" altLang="en-US" sz="2200" dirty="0" smtClean="0"/>
+              <a:t>전기적 안정화를 통한 기생 용량 변화 최소화</a:t>
+            </a:r>
+            <a:r>
+              <a:rPr lang="en-US" altLang="ko-KR" sz="2200" dirty="0" smtClean="0"/>
+              <a:t>, </a:t>
+            </a:r>
+            <a:r>
+              <a:rPr lang="ko-KR" altLang="en-US" sz="2200" dirty="0" smtClean="0"/>
+              <a:t>회로 특성 예측 정확도 향상의 역할을 담당한다</a:t>
+            </a:r>
+            <a:r>
+              <a:rPr lang="en-US" altLang="ko-KR" sz="2200" dirty="0" smtClean="0"/>
+              <a:t>.</a:t>
+            </a:r>
+            <a:endParaRPr lang="ko-KR" altLang="en-US" sz="2200" dirty="0"/>
           </a:p>
         </p:txBody>
       </p:sp>
@@ -3516,87 +3571,7 @@
 </p:sld>
 </file>
 
-<file path=ppt/slides/slide5.xml><?xml version="1.0" encoding="utf-8"?>
-<p:sld xmlns:a="http://schemas.openxmlformats.org/drawingml/2006/main" xmlns:r="http://schemas.openxmlformats.org/officeDocument/2006/relationships" xmlns:p="http://schemas.openxmlformats.org/presentationml/2006/main">
-  <p:cSld>
-    <p:spTree>
-      <p:nvGrpSpPr>
-        <p:cNvPr id="1" name=""/>
-        <p:cNvGrpSpPr/>
-        <p:nvPr/>
-      </p:nvGrpSpPr>
-      <p:grpSpPr>
-        <a:xfrm>
-          <a:off x="0" y="0"/>
-          <a:ext cx="0" cy="0"/>
-          <a:chOff x="0" y="0"/>
-          <a:chExt cx="0" cy="0"/>
-        </a:xfrm>
-      </p:grpSpPr>
-      <p:sp>
-        <p:nvSpPr>
-          <p:cNvPr id="2" name="제목 1">
-            <a:extLst>
-              <a:ext uri="{FF2B5EF4-FFF2-40B4-BE49-F238E27FC236}">
-                <a16:creationId xmlns:a16="http://schemas.microsoft.com/office/drawing/2014/main" id="{33CEF3DE-50AC-AF66-8256-754D24441963}"/>
-              </a:ext>
-            </a:extLst>
-          </p:cNvPr>
-          <p:cNvSpPr>
-            <a:spLocks noGrp="1"/>
-          </p:cNvSpPr>
-          <p:nvPr>
-            <p:ph type="title"/>
-          </p:nvPr>
-        </p:nvSpPr>
-        <p:spPr/>
-        <p:txBody>
-          <a:bodyPr/>
-          <a:lstStyle/>
-          <a:p>
-            <a:endParaRPr lang="ko-KR" altLang="en-US"/>
-          </a:p>
-        </p:txBody>
-      </p:sp>
-      <p:sp>
-        <p:nvSpPr>
-          <p:cNvPr id="3" name="내용 개체 틀 2">
-            <a:extLst>
-              <a:ext uri="{FF2B5EF4-FFF2-40B4-BE49-F238E27FC236}">
-                <a16:creationId xmlns:a16="http://schemas.microsoft.com/office/drawing/2014/main" id="{D40D8EA0-854A-F593-9D4B-70BED1C4BE5A}"/>
-              </a:ext>
-            </a:extLst>
-          </p:cNvPr>
-          <p:cNvSpPr>
-            <a:spLocks noGrp="1"/>
-          </p:cNvSpPr>
-          <p:nvPr>
-            <p:ph idx="1"/>
-          </p:nvPr>
-        </p:nvSpPr>
-        <p:spPr/>
-        <p:txBody>
-          <a:bodyPr/>
-          <a:lstStyle/>
-          <a:p>
-            <a:endParaRPr lang="ko-KR" altLang="en-US"/>
-          </a:p>
-        </p:txBody>
-      </p:sp>
-    </p:spTree>
-    <p:extLst>
-      <p:ext uri="{BB962C8B-B14F-4D97-AF65-F5344CB8AC3E}">
-        <p14:creationId xmlns:p14="http://schemas.microsoft.com/office/powerpoint/2010/main" val="3869624506"/>
-      </p:ext>
-    </p:extLst>
-  </p:cSld>
-  <p:clrMapOvr>
-    <a:masterClrMapping/>
-  </p:clrMapOvr>
-</p:sld>
-</file>
-
-<file path=ppt/slides/slide6.xml><?xml version="1.0" encoding="utf-8"?>
+<file path=ppt/slides/slide4.xml><?xml version="1.0" encoding="utf-8"?>
 <p:sld xmlns:a="http://schemas.openxmlformats.org/drawingml/2006/main" xmlns:r="http://schemas.openxmlformats.org/officeDocument/2006/relationships" xmlns:p="http://schemas.openxmlformats.org/presentationml/2006/main">
   <p:cSld>
     <p:spTree>
@@ -3678,6 +3653,363 @@
 </p:sld>
 </file>
 
+<file path=ppt/slides/slide5.xml><?xml version="1.0" encoding="utf-8"?>
+<p:sld xmlns:a="http://schemas.openxmlformats.org/drawingml/2006/main" xmlns:r="http://schemas.openxmlformats.org/officeDocument/2006/relationships" xmlns:p="http://schemas.openxmlformats.org/presentationml/2006/main">
+  <p:cSld>
+    <p:spTree>
+      <p:nvGrpSpPr>
+        <p:cNvPr id="1" name=""/>
+        <p:cNvGrpSpPr/>
+        <p:nvPr/>
+      </p:nvGrpSpPr>
+      <p:grpSpPr>
+        <a:xfrm>
+          <a:off x="0" y="0"/>
+          <a:ext cx="0" cy="0"/>
+          <a:chOff x="0" y="0"/>
+          <a:chExt cx="0" cy="0"/>
+        </a:xfrm>
+      </p:grpSpPr>
+      <p:sp>
+        <p:nvSpPr>
+          <p:cNvPr id="2" name="제목 1"/>
+          <p:cNvSpPr>
+            <a:spLocks noGrp="1"/>
+          </p:cNvSpPr>
+          <p:nvPr>
+            <p:ph type="title"/>
+          </p:nvPr>
+        </p:nvSpPr>
+        <p:spPr/>
+        <p:txBody>
+          <a:bodyPr/>
+          <a:lstStyle/>
+          <a:p>
+            <a:r>
+              <a:rPr lang="en-US" altLang="ko-KR" dirty="0"/>
+              <a:t>6T SRAM Schematic</a:t>
+            </a:r>
+            <a:r>
+              <a:rPr lang="ko-KR" altLang="en-US" dirty="0"/>
+              <a:t> 설계</a:t>
+            </a:r>
+          </a:p>
+        </p:txBody>
+      </p:sp>
+      <p:sp>
+        <p:nvSpPr>
+          <p:cNvPr id="3" name="내용 개체 틀 2"/>
+          <p:cNvSpPr>
+            <a:spLocks noGrp="1"/>
+          </p:cNvSpPr>
+          <p:nvPr>
+            <p:ph idx="1"/>
+          </p:nvPr>
+        </p:nvSpPr>
+        <p:spPr/>
+        <p:txBody>
+          <a:bodyPr/>
+          <a:lstStyle/>
+          <a:p>
+            <a:r>
+              <a:rPr lang="en-US" altLang="ko-KR" dirty="0" err="1"/>
+              <a:t>Analoglib</a:t>
+            </a:r>
+            <a:r>
+              <a:rPr lang="en-US" altLang="ko-KR" dirty="0"/>
+              <a:t> </a:t>
+            </a:r>
+            <a:r>
+              <a:rPr lang="ko-KR" altLang="en-US" dirty="0"/>
+              <a:t>기단에서 </a:t>
+            </a:r>
+            <a:r>
+              <a:rPr lang="en-US" altLang="ko-KR" dirty="0"/>
+              <a:t>PMOS, NMOS, </a:t>
+            </a:r>
+            <a:r>
+              <a:rPr lang="ko-KR" altLang="en-US" dirty="0"/>
+              <a:t>전원 핀</a:t>
+            </a:r>
+            <a:r>
+              <a:rPr lang="en-US" altLang="ko-KR" dirty="0"/>
+              <a:t>, word-line, bit-line </a:t>
+            </a:r>
+            <a:r>
+              <a:rPr lang="ko-KR" altLang="en-US" dirty="0"/>
+              <a:t>소자를 배치한다</a:t>
+            </a:r>
+            <a:r>
+              <a:rPr lang="en-US" altLang="ko-KR" dirty="0"/>
+              <a:t>.</a:t>
+            </a:r>
+          </a:p>
+          <a:p>
+            <a:r>
+              <a:rPr lang="en-US" altLang="ko-KR" dirty="0"/>
+              <a:t>6</a:t>
+            </a:r>
+            <a:r>
+              <a:rPr lang="ko-KR" altLang="en-US" dirty="0"/>
+              <a:t>개의 트랜지스터</a:t>
+            </a:r>
+            <a:r>
+              <a:rPr lang="en-US" altLang="ko-KR" dirty="0"/>
+              <a:t>(P1, P2, N1, N2, M5, M6)</a:t>
+            </a:r>
+            <a:r>
+              <a:rPr lang="ko-KR" altLang="en-US" dirty="0"/>
+              <a:t>를 교차 연결한다</a:t>
+            </a:r>
+            <a:r>
+              <a:rPr lang="en-US" altLang="ko-KR" dirty="0"/>
+              <a:t>.</a:t>
+            </a:r>
+          </a:p>
+          <a:p>
+            <a:r>
+              <a:rPr lang="ko-KR" altLang="en-US" dirty="0"/>
+              <a:t>초기 충전용 </a:t>
+            </a:r>
+            <a:r>
+              <a:rPr lang="en-US" altLang="ko-KR" dirty="0"/>
+              <a:t>PMOS,</a:t>
+            </a:r>
+            <a:r>
+              <a:rPr lang="ko-KR" altLang="en-US" dirty="0"/>
+              <a:t> 센스 앰프용 소자를 추가한다</a:t>
+            </a:r>
+            <a:r>
+              <a:rPr lang="en-US" altLang="ko-KR" dirty="0"/>
+              <a:t>.</a:t>
+            </a:r>
+          </a:p>
+          <a:p>
+            <a:r>
+              <a:rPr lang="ko-KR" altLang="en-US" dirty="0"/>
+              <a:t>핀을 부착하고 네트 이름을 지정한다</a:t>
+            </a:r>
+            <a:r>
+              <a:rPr lang="en-US" altLang="ko-KR" dirty="0"/>
+              <a:t>.</a:t>
+            </a:r>
+          </a:p>
+        </p:txBody>
+      </p:sp>
+    </p:spTree>
+    <p:extLst>
+      <p:ext uri="{BB962C8B-B14F-4D97-AF65-F5344CB8AC3E}">
+        <p14:creationId xmlns:p14="http://schemas.microsoft.com/office/powerpoint/2010/main" val="2862500190"/>
+      </p:ext>
+    </p:extLst>
+  </p:cSld>
+  <p:clrMapOvr>
+    <a:masterClrMapping/>
+  </p:clrMapOvr>
+</p:sld>
+</file>
+
+<file path=ppt/slides/slide6.xml><?xml version="1.0" encoding="utf-8"?>
+<p:sld xmlns:a="http://schemas.openxmlformats.org/drawingml/2006/main" xmlns:r="http://schemas.openxmlformats.org/officeDocument/2006/relationships" xmlns:p="http://schemas.openxmlformats.org/presentationml/2006/main">
+  <p:cSld>
+    <p:spTree>
+      <p:nvGrpSpPr>
+        <p:cNvPr id="1" name=""/>
+        <p:cNvGrpSpPr/>
+        <p:nvPr/>
+      </p:nvGrpSpPr>
+      <p:grpSpPr>
+        <a:xfrm>
+          <a:off x="0" y="0"/>
+          <a:ext cx="0" cy="0"/>
+          <a:chOff x="0" y="0"/>
+          <a:chExt cx="0" cy="0"/>
+        </a:xfrm>
+      </p:grpSpPr>
+      <p:sp>
+        <p:nvSpPr>
+          <p:cNvPr id="2" name="제목 1"/>
+          <p:cNvSpPr>
+            <a:spLocks noGrp="1"/>
+          </p:cNvSpPr>
+          <p:nvPr>
+            <p:ph type="title"/>
+          </p:nvPr>
+        </p:nvSpPr>
+        <p:spPr/>
+        <p:txBody>
+          <a:bodyPr/>
+          <a:lstStyle/>
+          <a:p>
+            <a:r>
+              <a:rPr lang="en-US" altLang="ko-KR" dirty="0"/>
+              <a:t>6T SRAM </a:t>
+            </a:r>
+            <a:r>
+              <a:rPr lang="ko-KR" altLang="en-US" dirty="0" smtClean="0"/>
+              <a:t>레이아웃 </a:t>
+            </a:r>
+            <a:r>
+              <a:rPr lang="ko-KR" altLang="en-US" dirty="0"/>
+              <a:t>생성과정</a:t>
+            </a:r>
+          </a:p>
+        </p:txBody>
+      </p:sp>
+      <p:sp>
+        <p:nvSpPr>
+          <p:cNvPr id="3" name="내용 개체 틀 2"/>
+          <p:cNvSpPr>
+            <a:spLocks noGrp="1"/>
+          </p:cNvSpPr>
+          <p:nvPr>
+            <p:ph idx="1"/>
+          </p:nvPr>
+        </p:nvSpPr>
+        <p:spPr/>
+        <p:txBody>
+          <a:bodyPr/>
+          <a:lstStyle/>
+          <a:p>
+            <a:r>
+              <a:rPr lang="en-US" altLang="ko-KR" dirty="0"/>
+              <a:t>Schematic</a:t>
+            </a:r>
+            <a:r>
+              <a:rPr lang="ko-KR" altLang="en-US" dirty="0"/>
+              <a:t>에 기반한 서브블록을 생성한다</a:t>
+            </a:r>
+            <a:r>
+              <a:rPr lang="en-US" altLang="ko-KR" dirty="0"/>
+              <a:t>.</a:t>
+            </a:r>
+          </a:p>
+          <a:p>
+            <a:r>
+              <a:rPr lang="en-US" altLang="ko-KR" dirty="0"/>
+              <a:t>SRAM </a:t>
+            </a:r>
+            <a:r>
+              <a:rPr lang="ko-KR" altLang="en-US" dirty="0"/>
+              <a:t>셀을 포함한 각각의 </a:t>
+            </a:r>
+            <a:r>
+              <a:rPr lang="en-US" altLang="ko-KR" dirty="0"/>
+              <a:t>Symbol</a:t>
+            </a:r>
+            <a:r>
+              <a:rPr lang="ko-KR" altLang="en-US" dirty="0"/>
+              <a:t>을 생성한다</a:t>
+            </a:r>
+            <a:r>
+              <a:rPr lang="en-US" altLang="ko-KR" dirty="0"/>
+              <a:t>.</a:t>
+            </a:r>
+          </a:p>
+          <a:p>
+            <a:r>
+              <a:rPr lang="ko-KR" altLang="en-US" dirty="0"/>
+              <a:t>새로운 </a:t>
+            </a:r>
+            <a:r>
+              <a:rPr lang="en-US" altLang="ko-KR" dirty="0" err="1"/>
+              <a:t>cellview</a:t>
+            </a:r>
+            <a:r>
+              <a:rPr lang="ko-KR" altLang="en-US" dirty="0"/>
+              <a:t>로 </a:t>
+            </a:r>
+            <a:r>
+              <a:rPr lang="en-US" altLang="ko-KR" dirty="0"/>
+              <a:t>layout</a:t>
+            </a:r>
+            <a:r>
+              <a:rPr lang="ko-KR" altLang="en-US" dirty="0"/>
+              <a:t>을 생성한다</a:t>
+            </a:r>
+            <a:r>
+              <a:rPr lang="en-US" altLang="ko-KR" dirty="0"/>
+              <a:t>.</a:t>
+            </a:r>
+          </a:p>
+          <a:p>
+            <a:r>
+              <a:rPr lang="ko-KR" altLang="en-US" dirty="0"/>
+              <a:t>트랜지스터를 구현하는데</a:t>
+            </a:r>
+            <a:r>
+              <a:rPr lang="en-US" altLang="ko-KR" dirty="0"/>
+              <a:t>, </a:t>
+            </a:r>
+            <a:r>
+              <a:rPr lang="ko-KR" altLang="en-US" dirty="0"/>
+              <a:t>여기서 </a:t>
+            </a:r>
+            <a:r>
+              <a:rPr lang="en-US" altLang="ko-KR" dirty="0" err="1"/>
+              <a:t>pmos</a:t>
+            </a:r>
+            <a:r>
+              <a:rPr lang="en-US" altLang="ko-KR" dirty="0"/>
+              <a:t> </a:t>
+            </a:r>
+            <a:r>
+              <a:rPr lang="ko-KR" altLang="en-US" dirty="0"/>
+              <a:t>영역은 </a:t>
+            </a:r>
+            <a:r>
+              <a:rPr lang="en-US" altLang="ko-KR" dirty="0"/>
+              <a:t>n-well</a:t>
+            </a:r>
+            <a:r>
+              <a:rPr lang="ko-KR" altLang="en-US" dirty="0"/>
+              <a:t>을 포함해야 한다</a:t>
+            </a:r>
+            <a:r>
+              <a:rPr lang="en-US" altLang="ko-KR" dirty="0"/>
+              <a:t>.</a:t>
+            </a:r>
+          </a:p>
+          <a:p>
+            <a:r>
+              <a:rPr lang="ko-KR" altLang="en-US" dirty="0"/>
+              <a:t>핀 레이어를 통해 신호를 연결한다</a:t>
+            </a:r>
+            <a:r>
+              <a:rPr lang="en-US" altLang="ko-KR" dirty="0"/>
+              <a:t>.</a:t>
+            </a:r>
+          </a:p>
+          <a:p>
+            <a:r>
+              <a:rPr lang="en-US" altLang="ko-KR" dirty="0"/>
+              <a:t>DRC </a:t>
+            </a:r>
+            <a:r>
+              <a:rPr lang="ko-KR" altLang="en-US" dirty="0"/>
+              <a:t>검사 후 오류를 수정한다</a:t>
+            </a:r>
+            <a:r>
+              <a:rPr lang="en-US" altLang="ko-KR" dirty="0"/>
+              <a:t>.</a:t>
+            </a:r>
+            <a:endParaRPr lang="ko-KR" altLang="en-US" dirty="0"/>
+          </a:p>
+        </p:txBody>
+      </p:sp>
+    </p:spTree>
+    <p:extLst>
+      <p:ext uri="{BB962C8B-B14F-4D97-AF65-F5344CB8AC3E}">
+        <p14:creationId xmlns:p14="http://schemas.microsoft.com/office/powerpoint/2010/main" val="1719335813"/>
+      </p:ext>
+    </p:extLst>
+  </p:cSld>
+  <p:clrMapOvr>
+    <a:masterClrMapping/>
+  </p:clrMapOvr>
+</p:sld>
+</file>
+
 <file path=ppt/slides/slide7.xml><?xml version="1.0" encoding="utf-8"?>
 <p:sld xmlns:a="http://schemas.openxmlformats.org/drawingml/2006/main" xmlns:r="http://schemas.openxmlformats.org/officeDocument/2006/relationships" xmlns:p="http://schemas.openxmlformats.org/presentationml/2006/main">
   <p:cSld>
@@ -3697,7 +4029,13 @@
       </p:grpSpPr>
       <p:sp>
         <p:nvSpPr>
-          <p:cNvPr id="2" name="제목 1"/>
+          <p:cNvPr id="2" name="제목 1">
+            <a:extLst>
+              <a:ext uri="{FF2B5EF4-FFF2-40B4-BE49-F238E27FC236}">
+                <a16:creationId xmlns:a16="http://schemas.microsoft.com/office/drawing/2014/main" id="{33CEF3DE-50AC-AF66-8256-754D24441963}"/>
+              </a:ext>
+            </a:extLst>
+          </p:cNvPr>
           <p:cNvSpPr>
             <a:spLocks noGrp="1"/>
           </p:cNvSpPr>
@@ -3712,18 +4050,29 @@
           <a:p>
             <a:r>
               <a:rPr lang="en-US" altLang="ko-KR" dirty="0"/>
-              <a:t>6T SRAM Schematic</a:t>
-            </a:r>
-            <a:r>
-              <a:rPr lang="ko-KR" altLang="en-US" dirty="0"/>
-              <a:t> 설계</a:t>
-            </a:r>
-          </a:p>
-        </p:txBody>
-      </p:sp>
-      <p:sp>
-        <p:nvSpPr>
-          <p:cNvPr id="3" name="내용 개체 틀 2"/>
+              <a:t>6T </a:t>
+            </a:r>
+            <a:r>
+              <a:rPr lang="en-US" altLang="ko-KR" dirty="0" smtClean="0"/>
+              <a:t>SRAM </a:t>
+            </a:r>
+            <a:r>
+              <a:rPr lang="ko-KR" altLang="en-US" dirty="0" smtClean="0"/>
+              <a:t>추출 및 시뮬레이션</a:t>
+            </a:r>
+            <a:endParaRPr lang="ko-KR" altLang="en-US" dirty="0"/>
+          </a:p>
+        </p:txBody>
+      </p:sp>
+      <p:sp>
+        <p:nvSpPr>
+          <p:cNvPr id="3" name="내용 개체 틀 2">
+            <a:extLst>
+              <a:ext uri="{FF2B5EF4-FFF2-40B4-BE49-F238E27FC236}">
+                <a16:creationId xmlns:a16="http://schemas.microsoft.com/office/drawing/2014/main" id="{D40D8EA0-854A-F593-9D4B-70BED1C4BE5A}"/>
+              </a:ext>
+            </a:extLst>
+          </p:cNvPr>
           <p:cNvSpPr>
             <a:spLocks noGrp="1"/>
           </p:cNvSpPr>
@@ -3737,94 +4086,122 @@
           <a:lstStyle/>
           <a:p>
             <a:r>
-              <a:rPr lang="en-US" altLang="ko-KR" dirty="0" err="1"/>
-              <a:t>Analoglib</a:t>
-            </a:r>
-            <a:r>
-              <a:rPr lang="en-US" altLang="ko-KR" dirty="0"/>
+              <a:rPr lang="ko-KR" altLang="en-US" dirty="0" smtClean="0"/>
+              <a:t>추출된 회로로 </a:t>
+            </a:r>
+            <a:r>
+              <a:rPr lang="en-US" altLang="ko-KR" dirty="0" err="1" smtClean="0"/>
+              <a:t>Spectre</a:t>
+            </a:r>
+            <a:r>
+              <a:rPr lang="en-US" altLang="ko-KR" dirty="0" smtClean="0"/>
               <a:t> </a:t>
             </a:r>
             <a:r>
-              <a:rPr lang="ko-KR" altLang="en-US" dirty="0"/>
-              <a:t>기단에서 </a:t>
-            </a:r>
-            <a:r>
-              <a:rPr lang="en-US" altLang="ko-KR" dirty="0"/>
-              <a:t>PMOS, NMOS, </a:t>
-            </a:r>
-            <a:r>
-              <a:rPr lang="ko-KR" altLang="en-US" dirty="0"/>
-              <a:t>전원 핀</a:t>
-            </a:r>
-            <a:r>
-              <a:rPr lang="en-US" altLang="ko-KR" dirty="0"/>
-              <a:t>, word-line, bit-line </a:t>
-            </a:r>
-            <a:r>
-              <a:rPr lang="ko-KR" altLang="en-US" dirty="0"/>
-              <a:t>소자를 배치한다</a:t>
-            </a:r>
-            <a:r>
-              <a:rPr lang="en-US" altLang="ko-KR" dirty="0"/>
-              <a:t>.</a:t>
-            </a:r>
-          </a:p>
-          <a:p>
-            <a:r>
-              <a:rPr lang="en-US" altLang="ko-KR" dirty="0"/>
-              <a:t>6</a:t>
-            </a:r>
-            <a:r>
-              <a:rPr lang="ko-KR" altLang="en-US" dirty="0"/>
-              <a:t>개의 트랜지스터</a:t>
-            </a:r>
-            <a:r>
-              <a:rPr lang="en-US" altLang="ko-KR" dirty="0"/>
-              <a:t>(P1, P2, N1, N2, M5, M6)</a:t>
-            </a:r>
-            <a:r>
-              <a:rPr lang="ko-KR" altLang="en-US" dirty="0"/>
-              <a:t>를 교차 연결한다</a:t>
-            </a:r>
-            <a:r>
-              <a:rPr lang="en-US" altLang="ko-KR" dirty="0"/>
-              <a:t>.</a:t>
-            </a:r>
-          </a:p>
-          <a:p>
-            <a:r>
-              <a:rPr lang="ko-KR" altLang="en-US" dirty="0"/>
-              <a:t>초기 충전용 </a:t>
-            </a:r>
-            <a:r>
-              <a:rPr lang="en-US" altLang="ko-KR" dirty="0"/>
-              <a:t>PMOS,</a:t>
-            </a:r>
-            <a:r>
-              <a:rPr lang="ko-KR" altLang="en-US" dirty="0"/>
-              <a:t> 센스 앰프용 소자를 추가한다</a:t>
-            </a:r>
-            <a:r>
-              <a:rPr lang="en-US" altLang="ko-KR" dirty="0"/>
-              <a:t>.</a:t>
-            </a:r>
-          </a:p>
-          <a:p>
-            <a:r>
-              <a:rPr lang="ko-KR" altLang="en-US" dirty="0"/>
-              <a:t>핀을 부착하고 네트 이름을 지정한다</a:t>
-            </a:r>
-            <a:r>
-              <a:rPr lang="en-US" altLang="ko-KR" dirty="0"/>
-              <a:t>.</a:t>
-            </a:r>
+              <a:rPr lang="ko-KR" altLang="en-US" dirty="0" smtClean="0"/>
+              <a:t>시뮬레이션 분석</a:t>
+            </a:r>
+            <a:endParaRPr lang="en-US" altLang="ko-KR" dirty="0" smtClean="0"/>
+          </a:p>
+          <a:p>
+            <a:r>
+              <a:rPr lang="en-US" altLang="ko-KR" dirty="0" err="1" smtClean="0"/>
+              <a:t>Wordline</a:t>
+            </a:r>
+            <a:r>
+              <a:rPr lang="en-US" altLang="ko-KR" dirty="0" smtClean="0"/>
+              <a:t> </a:t>
+            </a:r>
+            <a:r>
+              <a:rPr lang="ko-KR" altLang="en-US" dirty="0" smtClean="0"/>
+              <a:t>활성 → </a:t>
+            </a:r>
+            <a:r>
+              <a:rPr lang="en-US" altLang="ko-KR" dirty="0" smtClean="0"/>
+              <a:t>1</a:t>
+            </a:r>
+            <a:r>
+              <a:rPr lang="ko-KR" altLang="en-US" dirty="0" smtClean="0"/>
+              <a:t>개의 </a:t>
+            </a:r>
+            <a:r>
+              <a:rPr lang="ko-KR" altLang="en-US" dirty="0" err="1" smtClean="0"/>
+              <a:t>비트라인</a:t>
+            </a:r>
+            <a:r>
+              <a:rPr lang="ko-KR" altLang="en-US" dirty="0" smtClean="0"/>
+              <a:t> 방전 → </a:t>
+            </a:r>
+            <a:r>
+              <a:rPr lang="ko-KR" altLang="en-US" dirty="0" err="1" smtClean="0"/>
+              <a:t>센스엠프</a:t>
+            </a:r>
+            <a:r>
+              <a:rPr lang="ko-KR" altLang="en-US" dirty="0" smtClean="0"/>
+              <a:t> 증폭</a:t>
+            </a:r>
+            <a:endParaRPr lang="en-US" altLang="ko-KR" dirty="0" smtClean="0"/>
+          </a:p>
+          <a:p>
+            <a:r>
+              <a:rPr lang="ko-KR" altLang="en-US" dirty="0" smtClean="0"/>
+              <a:t>양 </a:t>
+            </a:r>
+            <a:r>
+              <a:rPr lang="ko-KR" altLang="en-US" dirty="0" err="1" smtClean="0"/>
+              <a:t>비트라인에</a:t>
+            </a:r>
+            <a:r>
+              <a:rPr lang="ko-KR" altLang="en-US" dirty="0" smtClean="0"/>
+              <a:t> </a:t>
+            </a:r>
+            <a:r>
+              <a:rPr lang="en-US" altLang="ko-KR" dirty="0" err="1" smtClean="0"/>
+              <a:t>Vdd</a:t>
+            </a:r>
+            <a:r>
+              <a:rPr lang="en-US" altLang="ko-KR" dirty="0" smtClean="0"/>
+              <a:t>/</a:t>
+            </a:r>
+            <a:r>
+              <a:rPr lang="en-US" altLang="ko-KR" dirty="0" err="1" smtClean="0"/>
+              <a:t>Gnd</a:t>
+            </a:r>
+            <a:r>
+              <a:rPr lang="en-US" altLang="ko-KR" dirty="0" smtClean="0"/>
+              <a:t> </a:t>
+            </a:r>
+            <a:r>
+              <a:rPr lang="ko-KR" altLang="en-US" dirty="0" smtClean="0"/>
+              <a:t>제공 → </a:t>
+            </a:r>
+            <a:r>
+              <a:rPr lang="en-US" altLang="ko-KR" dirty="0" smtClean="0"/>
+              <a:t>SRAM </a:t>
+            </a:r>
+            <a:r>
+              <a:rPr lang="ko-KR" altLang="en-US" dirty="0" smtClean="0"/>
+              <a:t>셀 상태 쓰기</a:t>
+            </a:r>
+            <a:endParaRPr lang="en-US" altLang="ko-KR" dirty="0" smtClean="0"/>
+          </a:p>
+          <a:p>
+            <a:r>
+              <a:rPr lang="en-US" altLang="ko-KR" smtClean="0"/>
+              <a:t>SNM </a:t>
+            </a:r>
+            <a:r>
+              <a:rPr lang="ko-KR" altLang="en-US" smtClean="0"/>
+              <a:t>분석 가능</a:t>
+            </a:r>
+            <a:endParaRPr lang="ko-KR" altLang="en-US" dirty="0"/>
           </a:p>
         </p:txBody>
       </p:sp>
     </p:spTree>
     <p:extLst>
       <p:ext uri="{BB962C8B-B14F-4D97-AF65-F5344CB8AC3E}">
-        <p14:creationId xmlns:p14="http://schemas.microsoft.com/office/powerpoint/2010/main" val="2862500190"/>
+        <p14:creationId xmlns:p14="http://schemas.microsoft.com/office/powerpoint/2010/main" val="3869624506"/>
       </p:ext>
     </p:extLst>
   </p:cSld>
@@ -3853,7 +4230,13 @@
       </p:grpSpPr>
       <p:sp>
         <p:nvSpPr>
-          <p:cNvPr id="2" name="제목 1"/>
+          <p:cNvPr id="2" name="제목 1">
+            <a:extLst>
+              <a:ext uri="{FF2B5EF4-FFF2-40B4-BE49-F238E27FC236}">
+                <a16:creationId xmlns:a16="http://schemas.microsoft.com/office/drawing/2014/main" id="{8FE62AE9-4285-B5CB-5B4F-DC232C063ED1}"/>
+              </a:ext>
+            </a:extLst>
+          </p:cNvPr>
           <p:cNvSpPr>
             <a:spLocks noGrp="1"/>
           </p:cNvSpPr>
@@ -3866,16 +4249,19 @@
           <a:bodyPr/>
           <a:lstStyle/>
           <a:p>
-            <a:r>
-              <a:rPr lang="ko-KR" altLang="en-US" dirty="0"/>
-              <a:t>레이아웃 생성과정</a:t>
-            </a:r>
-          </a:p>
-        </p:txBody>
-      </p:sp>
-      <p:sp>
-        <p:nvSpPr>
-          <p:cNvPr id="3" name="내용 개체 틀 2"/>
+            <a:endParaRPr lang="ko-KR" altLang="en-US"/>
+          </a:p>
+        </p:txBody>
+      </p:sp>
+      <p:sp>
+        <p:nvSpPr>
+          <p:cNvPr id="3" name="내용 개체 틀 2">
+            <a:extLst>
+              <a:ext uri="{FF2B5EF4-FFF2-40B4-BE49-F238E27FC236}">
+                <a16:creationId xmlns:a16="http://schemas.microsoft.com/office/drawing/2014/main" id="{6511CAA7-6EF9-4380-8C03-C1C1132A6438}"/>
+              </a:ext>
+            </a:extLst>
+          </p:cNvPr>
           <p:cNvSpPr>
             <a:spLocks noGrp="1"/>
           </p:cNvSpPr>
@@ -3888,136 +4274,14 @@
           <a:bodyPr/>
           <a:lstStyle/>
           <a:p>
-            <a:r>
-              <a:rPr lang="en-US" altLang="ko-KR" dirty="0"/>
-              <a:t>Schematic</a:t>
-            </a:r>
-            <a:r>
-              <a:rPr lang="ko-KR" altLang="en-US" dirty="0"/>
-              <a:t>에 기반한 서브블록을 생성한다</a:t>
-            </a:r>
-            <a:r>
-              <a:rPr lang="en-US" altLang="ko-KR" dirty="0"/>
-              <a:t>.</a:t>
-            </a:r>
-          </a:p>
-          <a:p>
-            <a:r>
-              <a:rPr lang="en-US" altLang="ko-KR" dirty="0"/>
-              <a:t>SRAM </a:t>
-            </a:r>
-            <a:r>
-              <a:rPr lang="ko-KR" altLang="en-US" dirty="0"/>
-              <a:t>셀을 포함한 각각의 </a:t>
-            </a:r>
-            <a:r>
-              <a:rPr lang="en-US" altLang="ko-KR" dirty="0"/>
-              <a:t>Symbol</a:t>
-            </a:r>
-            <a:r>
-              <a:rPr lang="ko-KR" altLang="en-US" dirty="0"/>
-              <a:t>을 생성한다</a:t>
-            </a:r>
-            <a:r>
-              <a:rPr lang="en-US" altLang="ko-KR" dirty="0"/>
-              <a:t>.</a:t>
-            </a:r>
-          </a:p>
-          <a:p>
-            <a:r>
-              <a:rPr lang="ko-KR" altLang="en-US" dirty="0"/>
-              <a:t>새로운 </a:t>
-            </a:r>
-            <a:r>
-              <a:rPr lang="en-US" altLang="ko-KR" dirty="0" err="1"/>
-              <a:t>cellview</a:t>
-            </a:r>
-            <a:r>
-              <a:rPr lang="ko-KR" altLang="en-US" dirty="0"/>
-              <a:t>로 </a:t>
-            </a:r>
-            <a:r>
-              <a:rPr lang="en-US" altLang="ko-KR" dirty="0"/>
-              <a:t>layout</a:t>
-            </a:r>
-            <a:r>
-              <a:rPr lang="ko-KR" altLang="en-US" dirty="0"/>
-              <a:t>을 생성한다</a:t>
-            </a:r>
-            <a:r>
-              <a:rPr lang="en-US" altLang="ko-KR" dirty="0"/>
-              <a:t>.</a:t>
-            </a:r>
-          </a:p>
-          <a:p>
-            <a:r>
-              <a:rPr lang="ko-KR" altLang="en-US" dirty="0"/>
-              <a:t>트랜지스터를 구현하는데</a:t>
-            </a:r>
-            <a:r>
-              <a:rPr lang="en-US" altLang="ko-KR" dirty="0"/>
-              <a:t>, </a:t>
-            </a:r>
-            <a:r>
-              <a:rPr lang="ko-KR" altLang="en-US" dirty="0"/>
-              <a:t>여기서 </a:t>
-            </a:r>
-            <a:r>
-              <a:rPr lang="en-US" altLang="ko-KR" dirty="0" err="1"/>
-              <a:t>pmos</a:t>
-            </a:r>
-            <a:r>
-              <a:rPr lang="en-US" altLang="ko-KR" dirty="0"/>
-              <a:t> </a:t>
-            </a:r>
-            <a:r>
-              <a:rPr lang="ko-KR" altLang="en-US" dirty="0"/>
-              <a:t>영역은 </a:t>
-            </a:r>
-            <a:r>
-              <a:rPr lang="en-US" altLang="ko-KR" dirty="0"/>
-              <a:t>n-well</a:t>
-            </a:r>
-            <a:r>
-              <a:rPr lang="ko-KR" altLang="en-US" dirty="0"/>
-              <a:t>을 포함해야 한다</a:t>
-            </a:r>
-            <a:r>
-              <a:rPr lang="en-US" altLang="ko-KR" dirty="0"/>
-              <a:t>.</a:t>
-            </a:r>
-          </a:p>
-          <a:p>
-            <a:r>
-              <a:rPr lang="ko-KR" altLang="en-US" dirty="0"/>
-              <a:t>핀 레이어를 통해 신호를 연결한다</a:t>
-            </a:r>
-            <a:r>
-              <a:rPr lang="en-US" altLang="ko-KR" dirty="0"/>
-              <a:t>.</a:t>
-            </a:r>
-          </a:p>
-          <a:p>
-            <a:r>
-              <a:rPr lang="en-US" altLang="ko-KR" dirty="0"/>
-              <a:t>DRC </a:t>
-            </a:r>
-            <a:r>
-              <a:rPr lang="ko-KR" altLang="en-US" dirty="0"/>
-              <a:t>검사 후 오류를 수정한다</a:t>
-            </a:r>
-            <a:r>
-              <a:rPr lang="en-US" altLang="ko-KR" dirty="0"/>
-              <a:t>.</a:t>
-            </a:r>
-            <a:endParaRPr lang="ko-KR" altLang="en-US" dirty="0"/>
+            <a:endParaRPr lang="ko-KR" altLang="en-US"/>
           </a:p>
         </p:txBody>
       </p:sp>
     </p:spTree>
     <p:extLst>
       <p:ext uri="{BB962C8B-B14F-4D97-AF65-F5344CB8AC3E}">
-        <p14:creationId xmlns:p14="http://schemas.microsoft.com/office/powerpoint/2010/main" val="1719335813"/>
+        <p14:creationId xmlns:p14="http://schemas.microsoft.com/office/powerpoint/2010/main" val="2034143713"/>
       </p:ext>
     </p:extLst>
   </p:cSld>
@@ -4049,7 +4313,7 @@
           <p:cNvPr id="2" name="제목 1">
             <a:extLst>
               <a:ext uri="{FF2B5EF4-FFF2-40B4-BE49-F238E27FC236}">
-                <a16:creationId xmlns:a16="http://schemas.microsoft.com/office/drawing/2014/main" id="{8FE62AE9-4285-B5CB-5B4F-DC232C063ED1}"/>
+                <a16:creationId xmlns:a16="http://schemas.microsoft.com/office/drawing/2014/main" id="{CCECD2BA-830A-6C90-C17B-E347CB48A6CB}"/>
               </a:ext>
             </a:extLst>
           </p:cNvPr>
@@ -4074,7 +4338,7 @@
           <p:cNvPr id="3" name="내용 개체 틀 2">
             <a:extLst>
               <a:ext uri="{FF2B5EF4-FFF2-40B4-BE49-F238E27FC236}">
-                <a16:creationId xmlns:a16="http://schemas.microsoft.com/office/drawing/2014/main" id="{6511CAA7-6EF9-4380-8C03-C1C1132A6438}"/>
+                <a16:creationId xmlns:a16="http://schemas.microsoft.com/office/drawing/2014/main" id="{DA95D773-687F-A457-641D-06098AA7A34A}"/>
               </a:ext>
             </a:extLst>
           </p:cNvPr>
@@ -4097,7 +4361,7 @@
     </p:spTree>
     <p:extLst>
       <p:ext uri="{BB962C8B-B14F-4D97-AF65-F5344CB8AC3E}">
-        <p14:creationId xmlns:p14="http://schemas.microsoft.com/office/powerpoint/2010/main" val="2034143713"/>
+        <p14:creationId xmlns:p14="http://schemas.microsoft.com/office/powerpoint/2010/main" val="857959110"/>
       </p:ext>
     </p:extLst>
   </p:cSld>

--- a/VLSI design 설계 실습/2025-06-13.pptx
+++ b/VLSI design 설계 실습/2025-06-13.pptx
@@ -8,13 +8,13 @@
     <p:sldId id="256" r:id="rId2"/>
     <p:sldId id="257" r:id="rId3"/>
     <p:sldId id="263" r:id="rId4"/>
-    <p:sldId id="258" r:id="rId5"/>
-    <p:sldId id="260" r:id="rId6"/>
-    <p:sldId id="261" r:id="rId7"/>
-    <p:sldId id="264" r:id="rId8"/>
-    <p:sldId id="265" r:id="rId9"/>
-    <p:sldId id="266" r:id="rId10"/>
-    <p:sldId id="267" r:id="rId11"/>
+    <p:sldId id="267" r:id="rId5"/>
+    <p:sldId id="266" r:id="rId6"/>
+    <p:sldId id="265" r:id="rId7"/>
+    <p:sldId id="258" r:id="rId8"/>
+    <p:sldId id="260" r:id="rId9"/>
+    <p:sldId id="261" r:id="rId10"/>
+    <p:sldId id="264" r:id="rId11"/>
     <p:sldId id="259" r:id="rId12"/>
   </p:sldIdLst>
   <p:sldSz cx="12192000" cy="6858000"/>
@@ -3056,7 +3056,7 @@
           <p:cNvPr id="2" name="제목 1">
             <a:extLst>
               <a:ext uri="{FF2B5EF4-FFF2-40B4-BE49-F238E27FC236}">
-                <a16:creationId xmlns:a16="http://schemas.microsoft.com/office/drawing/2014/main" id="{CAFD3FCF-13B5-2893-1B7A-C0D15A4CB900}"/>
+                <a16:creationId xmlns:a16="http://schemas.microsoft.com/office/drawing/2014/main" id="{33CEF3DE-50AC-AF66-8256-754D24441963}"/>
               </a:ext>
             </a:extLst>
           </p:cNvPr>
@@ -3072,7 +3072,14 @@
           <a:bodyPr/>
           <a:lstStyle/>
           <a:p>
-            <a:endParaRPr lang="ko-KR" altLang="en-US"/>
+            <a:r>
+              <a:rPr lang="en-US" altLang="ko-KR" dirty="0"/>
+              <a:t>6T SRAM </a:t>
+            </a:r>
+            <a:r>
+              <a:rPr lang="ko-KR" altLang="en-US" dirty="0"/>
+              <a:t>추출 및 시뮬레이션</a:t>
+            </a:r>
           </a:p>
         </p:txBody>
       </p:sp>
@@ -3081,7 +3088,7 @@
           <p:cNvPr id="3" name="내용 개체 틀 2">
             <a:extLst>
               <a:ext uri="{FF2B5EF4-FFF2-40B4-BE49-F238E27FC236}">
-                <a16:creationId xmlns:a16="http://schemas.microsoft.com/office/drawing/2014/main" id="{464D2D25-BCB8-6A42-6384-870839513A25}"/>
+                <a16:creationId xmlns:a16="http://schemas.microsoft.com/office/drawing/2014/main" id="{D40D8EA0-854A-F593-9D4B-70BED1C4BE5A}"/>
               </a:ext>
             </a:extLst>
           </p:cNvPr>
@@ -3097,14 +3104,123 @@
           <a:bodyPr/>
           <a:lstStyle/>
           <a:p>
-            <a:endParaRPr lang="ko-KR" altLang="en-US"/>
+            <a:r>
+              <a:rPr lang="ko-KR" altLang="en-US" dirty="0"/>
+              <a:t>추출된 회로로 </a:t>
+            </a:r>
+            <a:r>
+              <a:rPr lang="en-US" altLang="ko-KR" dirty="0" err="1"/>
+              <a:t>Spectre</a:t>
+            </a:r>
+            <a:r>
+              <a:rPr lang="en-US" altLang="ko-KR" dirty="0"/>
+              <a:t> </a:t>
+            </a:r>
+            <a:r>
+              <a:rPr lang="ko-KR" altLang="en-US" dirty="0"/>
+              <a:t>시뮬레이션 분석</a:t>
+            </a:r>
+            <a:endParaRPr lang="en-US" altLang="ko-KR" dirty="0"/>
+          </a:p>
+          <a:p>
+            <a:r>
+              <a:rPr lang="en-US" altLang="ko-KR" dirty="0" err="1"/>
+              <a:t>Wordline</a:t>
+            </a:r>
+            <a:r>
+              <a:rPr lang="en-US" altLang="ko-KR" dirty="0"/>
+              <a:t> </a:t>
+            </a:r>
+            <a:r>
+              <a:rPr lang="ko-KR" altLang="en-US" dirty="0"/>
+              <a:t>활성 → </a:t>
+            </a:r>
+            <a:r>
+              <a:rPr lang="en-US" altLang="ko-KR" dirty="0"/>
+              <a:t>1</a:t>
+            </a:r>
+            <a:r>
+              <a:rPr lang="ko-KR" altLang="en-US" dirty="0"/>
+              <a:t>개의 </a:t>
+            </a:r>
+            <a:r>
+              <a:rPr lang="ko-KR" altLang="en-US" dirty="0" err="1"/>
+              <a:t>비트라인</a:t>
+            </a:r>
+            <a:r>
+              <a:rPr lang="ko-KR" altLang="en-US" dirty="0"/>
+              <a:t> 방전 → </a:t>
+            </a:r>
+            <a:r>
+              <a:rPr lang="ko-KR" altLang="en-US" dirty="0" err="1"/>
+              <a:t>센스엠프</a:t>
+            </a:r>
+            <a:r>
+              <a:rPr lang="ko-KR" altLang="en-US" dirty="0"/>
+              <a:t> 증폭</a:t>
+            </a:r>
+            <a:endParaRPr lang="en-US" altLang="ko-KR" dirty="0"/>
+          </a:p>
+          <a:p>
+            <a:r>
+              <a:rPr lang="ko-KR" altLang="en-US" dirty="0"/>
+              <a:t>양 </a:t>
+            </a:r>
+            <a:r>
+              <a:rPr lang="ko-KR" altLang="en-US" dirty="0" err="1"/>
+              <a:t>비트라인에</a:t>
+            </a:r>
+            <a:r>
+              <a:rPr lang="ko-KR" altLang="en-US" dirty="0"/>
+              <a:t> </a:t>
+            </a:r>
+            <a:r>
+              <a:rPr lang="en-US" altLang="ko-KR" dirty="0" err="1"/>
+              <a:t>Vdd</a:t>
+            </a:r>
+            <a:r>
+              <a:rPr lang="en-US" altLang="ko-KR" dirty="0"/>
+              <a:t>/</a:t>
+            </a:r>
+            <a:r>
+              <a:rPr lang="en-US" altLang="ko-KR" dirty="0" err="1"/>
+              <a:t>Gnd</a:t>
+            </a:r>
+            <a:r>
+              <a:rPr lang="en-US" altLang="ko-KR" dirty="0"/>
+              <a:t> </a:t>
+            </a:r>
+            <a:r>
+              <a:rPr lang="ko-KR" altLang="en-US" dirty="0"/>
+              <a:t>제공 → </a:t>
+            </a:r>
+            <a:r>
+              <a:rPr lang="en-US" altLang="ko-KR" dirty="0"/>
+              <a:t>SRAM </a:t>
+            </a:r>
+            <a:r>
+              <a:rPr lang="ko-KR" altLang="en-US" dirty="0"/>
+              <a:t>셀 상태 쓰기</a:t>
+            </a:r>
+            <a:endParaRPr lang="en-US" altLang="ko-KR" dirty="0"/>
+          </a:p>
+          <a:p>
+            <a:r>
+              <a:rPr lang="en-US" altLang="ko-KR"/>
+              <a:t>SNM </a:t>
+            </a:r>
+            <a:r>
+              <a:rPr lang="ko-KR" altLang="en-US"/>
+              <a:t>분석 가능</a:t>
+            </a:r>
+            <a:endParaRPr lang="ko-KR" altLang="en-US" dirty="0"/>
           </a:p>
         </p:txBody>
       </p:sp>
     </p:spTree>
     <p:extLst>
       <p:ext uri="{BB962C8B-B14F-4D97-AF65-F5344CB8AC3E}">
-        <p14:creationId xmlns:p14="http://schemas.microsoft.com/office/powerpoint/2010/main" val="4112507996"/>
+        <p14:creationId xmlns:p14="http://schemas.microsoft.com/office/powerpoint/2010/main" val="3869624506"/>
       </p:ext>
     </p:extLst>
   </p:cSld>
@@ -3314,18 +3430,17 @@
           <a:lstStyle/>
           <a:p>
             <a:r>
-              <a:rPr lang="ko-KR" altLang="en-US" dirty="0" smtClean="0"/>
+              <a:rPr lang="ko-KR" altLang="en-US" dirty="0"/>
               <a:t>디지털 </a:t>
             </a:r>
             <a:r>
-              <a:rPr lang="ko-KR" altLang="en-US" dirty="0" err="1" smtClean="0"/>
+              <a:rPr lang="ko-KR" altLang="en-US" dirty="0" err="1"/>
               <a:t>테스트벤치</a:t>
             </a:r>
             <a:r>
-              <a:rPr lang="ko-KR" altLang="en-US" dirty="0" smtClean="0"/>
+              <a:rPr lang="ko-KR" altLang="en-US" dirty="0"/>
               <a:t> 구조</a:t>
             </a:r>
-            <a:endParaRPr lang="ko-KR" altLang="en-US" dirty="0"/>
           </a:p>
         </p:txBody>
       </p:sp>
@@ -3366,21 +3481,17 @@
             </a:r>
             <a:r>
               <a:rPr lang="ko-KR" altLang="en-US" sz="2200" dirty="0"/>
-              <a:t>ＣＭＯＳ 버퍼나 인버터로 구성되며， 테스트 또는 지연 소스로 사용된다</a:t>
-            </a:r>
-            <a:r>
-              <a:rPr lang="ko-KR" altLang="en-US" sz="2200" dirty="0" smtClean="0"/>
-              <a:t>．</a:t>
-            </a:r>
-            <a:endParaRPr lang="en-US" altLang="ko-KR" sz="2200" dirty="0" smtClean="0"/>
-          </a:p>
-          <a:p>
-            <a:r>
-              <a:rPr lang="en-US" altLang="ko-KR" sz="2200" dirty="0" smtClean="0"/>
+              <a:t>ＣＭＯＳ 버퍼나 인버터로 구성되며， 테스트 또는 지연 소스로 사용된다．</a:t>
+            </a:r>
+            <a:endParaRPr lang="en-US" altLang="ko-KR" sz="2200" dirty="0"/>
+          </a:p>
+          <a:p>
+            <a:r>
+              <a:rPr lang="en-US" altLang="ko-KR" sz="2200" dirty="0"/>
               <a:t>6_cnt_6</a:t>
             </a:r>
             <a:r>
-              <a:rPr lang="ko-KR" altLang="en-US" sz="2200" dirty="0" smtClean="0"/>
+              <a:rPr lang="ko-KR" altLang="en-US" sz="2200" dirty="0"/>
               <a:t>：</a:t>
             </a:r>
             <a:r>
@@ -3424,7 +3535,7 @@
               <a:t> 등에 활용된다</a:t>
             </a:r>
             <a:r>
-              <a:rPr lang="en-US" altLang="ko-KR" sz="2200" dirty="0" smtClean="0"/>
+              <a:rPr lang="en-US" altLang="ko-KR" sz="2200" dirty="0"/>
               <a:t>.</a:t>
             </a:r>
           </a:p>
@@ -3438,19 +3549,11 @@
               <a:t>멀티플렉서</a:t>
             </a:r>
             <a:r>
-              <a:rPr lang="ko-KR" altLang="en-US" sz="2200" dirty="0" smtClean="0"/>
-              <a:t>： 두 </a:t>
-            </a:r>
-            <a:r>
               <a:rPr lang="ko-KR" altLang="en-US" sz="2200" dirty="0"/>
-              <a:t>개의 입력 신호 중 하나를 선택하여 하나의 출력으로 보내는 디지털 스위치 역할을 </a:t>
-            </a:r>
-            <a:r>
-              <a:rPr lang="ko-KR" altLang="en-US" sz="2200" dirty="0" smtClean="0"/>
-              <a:t>한다</a:t>
-            </a:r>
-            <a:r>
-              <a:rPr lang="en-US" altLang="ko-KR" sz="2200" dirty="0" smtClean="0"/>
+              <a:t>： 두 개의 입력 신호 중 하나를 선택하여 하나의 출력으로 보내는 디지털 스위치 역할을 한다</a:t>
+            </a:r>
+            <a:r>
+              <a:rPr lang="en-US" altLang="ko-KR" sz="2200" dirty="0"/>
               <a:t>.</a:t>
             </a:r>
             <a:endParaRPr lang="ko-KR" altLang="en-US" sz="2200" dirty="0"/>
@@ -3478,22 +3581,10 @@
             </a:r>
             <a:r>
               <a:rPr lang="ko-KR" altLang="en-US" sz="2200" dirty="0"/>
-              <a:t>논리연산을 </a:t>
-            </a:r>
-            <a:r>
-              <a:rPr lang="ko-KR" altLang="en-US" sz="2200" dirty="0" smtClean="0"/>
-              <a:t>수행한다． 상태 </a:t>
-            </a:r>
-            <a:r>
-              <a:rPr lang="ko-KR" altLang="en-US" sz="2200" dirty="0"/>
-              <a:t>플래그를 </a:t>
-            </a:r>
-            <a:r>
-              <a:rPr lang="ko-KR" altLang="en-US" sz="2200" dirty="0" smtClean="0"/>
-              <a:t>출력하고</a:t>
-            </a:r>
-            <a:r>
-              <a:rPr lang="en-US" altLang="ko-KR" sz="2200" dirty="0" smtClean="0"/>
+              <a:t>논리연산을 수행한다． 상태 플래그를 출력하고</a:t>
+            </a:r>
+            <a:r>
+              <a:rPr lang="en-US" altLang="ko-KR" sz="2200" dirty="0"/>
               <a:t>, CPU</a:t>
             </a:r>
             <a:r>
@@ -3501,57 +3592,57 @@
               <a:t>의 핵심 구성 블록을 담당한다</a:t>
             </a:r>
             <a:r>
-              <a:rPr lang="en-US" altLang="ko-KR" sz="2200" dirty="0" smtClean="0"/>
+              <a:rPr lang="en-US" altLang="ko-KR" sz="2200" dirty="0"/>
               <a:t>.</a:t>
             </a:r>
           </a:p>
           <a:p>
             <a:r>
-              <a:rPr lang="ko-KR" altLang="en-US" sz="2200" dirty="0" smtClean="0"/>
+              <a:rPr lang="ko-KR" altLang="en-US" sz="2200" dirty="0"/>
               <a:t>측정용 더미 블록</a:t>
             </a:r>
             <a:r>
-              <a:rPr lang="en-US" altLang="ko-KR" sz="2200" dirty="0" smtClean="0"/>
+              <a:rPr lang="en-US" altLang="ko-KR" sz="2200" dirty="0"/>
               <a:t>: </a:t>
             </a:r>
             <a:r>
-              <a:rPr lang="ko-KR" altLang="en-US" sz="2200" dirty="0" smtClean="0"/>
+              <a:rPr lang="ko-KR" altLang="en-US" sz="2200" dirty="0"/>
               <a:t>공정 중 레이아웃 밀도 균일화</a:t>
             </a:r>
             <a:r>
-              <a:rPr lang="en-US" altLang="ko-KR" sz="2200" dirty="0" smtClean="0"/>
+              <a:rPr lang="en-US" altLang="ko-KR" sz="2200" dirty="0"/>
               <a:t>, </a:t>
             </a:r>
             <a:r>
-              <a:rPr lang="ko-KR" altLang="en-US" sz="2200" dirty="0" smtClean="0"/>
+              <a:rPr lang="ko-KR" altLang="en-US" sz="2200" dirty="0"/>
               <a:t>메모리의 </a:t>
             </a:r>
             <a:r>
-              <a:rPr lang="ko-KR" altLang="en-US" sz="2200" dirty="0" err="1" smtClean="0"/>
+              <a:rPr lang="ko-KR" altLang="en-US" sz="2200" dirty="0" err="1"/>
               <a:t>기준값</a:t>
             </a:r>
             <a:r>
-              <a:rPr lang="ko-KR" altLang="en-US" sz="2200" dirty="0" smtClean="0"/>
+              <a:rPr lang="ko-KR" altLang="en-US" sz="2200" dirty="0"/>
               <a:t> 제공</a:t>
             </a:r>
             <a:r>
-              <a:rPr lang="en-US" altLang="ko-KR" sz="2200" dirty="0" smtClean="0"/>
+              <a:rPr lang="en-US" altLang="ko-KR" sz="2200" dirty="0"/>
               <a:t>, </a:t>
             </a:r>
             <a:r>
-              <a:rPr lang="ko-KR" altLang="en-US" sz="2200" dirty="0" smtClean="0"/>
+              <a:rPr lang="ko-KR" altLang="en-US" sz="2200" dirty="0"/>
               <a:t>전기적 안정화를 통한 기생 용량 변화 최소화</a:t>
             </a:r>
             <a:r>
-              <a:rPr lang="en-US" altLang="ko-KR" sz="2200" dirty="0" smtClean="0"/>
+              <a:rPr lang="en-US" altLang="ko-KR" sz="2200" dirty="0"/>
               <a:t>, </a:t>
             </a:r>
             <a:r>
-              <a:rPr lang="ko-KR" altLang="en-US" sz="2200" dirty="0" smtClean="0"/>
+              <a:rPr lang="ko-KR" altLang="en-US" sz="2200" dirty="0"/>
               <a:t>회로 특성 예측 정확도 향상의 역할을 담당한다</a:t>
             </a:r>
             <a:r>
-              <a:rPr lang="en-US" altLang="ko-KR" sz="2200" dirty="0" smtClean="0"/>
+              <a:rPr lang="en-US" altLang="ko-KR" sz="2200" dirty="0"/>
               <a:t>.</a:t>
             </a:r>
             <a:endParaRPr lang="ko-KR" altLang="en-US" sz="2200" dirty="0"/>
@@ -3590,6 +3681,268 @@
       </p:grpSpPr>
       <p:sp>
         <p:nvSpPr>
+          <p:cNvPr id="2" name="제목 1">
+            <a:extLst>
+              <a:ext uri="{FF2B5EF4-FFF2-40B4-BE49-F238E27FC236}">
+                <a16:creationId xmlns:a16="http://schemas.microsoft.com/office/drawing/2014/main" id="{CAFD3FCF-13B5-2893-1B7A-C0D15A4CB900}"/>
+              </a:ext>
+            </a:extLst>
+          </p:cNvPr>
+          <p:cNvSpPr>
+            <a:spLocks noGrp="1"/>
+          </p:cNvSpPr>
+          <p:nvPr>
+            <p:ph type="title"/>
+          </p:nvPr>
+        </p:nvSpPr>
+        <p:spPr/>
+        <p:txBody>
+          <a:bodyPr/>
+          <a:lstStyle/>
+          <a:p>
+            <a:r>
+              <a:rPr lang="ko-KR" altLang="en-US" dirty="0"/>
+              <a:t>디지털 </a:t>
+            </a:r>
+            <a:r>
+              <a:rPr lang="ko-KR" altLang="en-US" dirty="0" err="1"/>
+              <a:t>테스트벤치</a:t>
+            </a:r>
+            <a:r>
+              <a:rPr lang="ko-KR" altLang="en-US" dirty="0"/>
+              <a:t> 구조</a:t>
+            </a:r>
+          </a:p>
+        </p:txBody>
+      </p:sp>
+      <p:sp>
+        <p:nvSpPr>
+          <p:cNvPr id="3" name="내용 개체 틀 2">
+            <a:extLst>
+              <a:ext uri="{FF2B5EF4-FFF2-40B4-BE49-F238E27FC236}">
+                <a16:creationId xmlns:a16="http://schemas.microsoft.com/office/drawing/2014/main" id="{464D2D25-BCB8-6A42-6384-870839513A25}"/>
+              </a:ext>
+            </a:extLst>
+          </p:cNvPr>
+          <p:cNvSpPr>
+            <a:spLocks noGrp="1"/>
+          </p:cNvSpPr>
+          <p:nvPr>
+            <p:ph idx="1"/>
+          </p:nvPr>
+        </p:nvSpPr>
+        <p:spPr/>
+        <p:txBody>
+          <a:bodyPr/>
+          <a:lstStyle/>
+          <a:p>
+            <a:endParaRPr lang="ko-KR" altLang="en-US"/>
+          </a:p>
+        </p:txBody>
+      </p:sp>
+    </p:spTree>
+    <p:extLst>
+      <p:ext uri="{BB962C8B-B14F-4D97-AF65-F5344CB8AC3E}">
+        <p14:creationId xmlns:p14="http://schemas.microsoft.com/office/powerpoint/2010/main" val="4112507996"/>
+      </p:ext>
+    </p:extLst>
+  </p:cSld>
+  <p:clrMapOvr>
+    <a:masterClrMapping/>
+  </p:clrMapOvr>
+</p:sld>
+</file>
+
+<file path=ppt/slides/slide5.xml><?xml version="1.0" encoding="utf-8"?>
+<p:sld xmlns:a="http://schemas.openxmlformats.org/drawingml/2006/main" xmlns:r="http://schemas.openxmlformats.org/officeDocument/2006/relationships" xmlns:p="http://schemas.openxmlformats.org/presentationml/2006/main">
+  <p:cSld>
+    <p:spTree>
+      <p:nvGrpSpPr>
+        <p:cNvPr id="1" name=""/>
+        <p:cNvGrpSpPr/>
+        <p:nvPr/>
+      </p:nvGrpSpPr>
+      <p:grpSpPr>
+        <a:xfrm>
+          <a:off x="0" y="0"/>
+          <a:ext cx="0" cy="0"/>
+          <a:chOff x="0" y="0"/>
+          <a:chExt cx="0" cy="0"/>
+        </a:xfrm>
+      </p:grpSpPr>
+      <p:sp>
+        <p:nvSpPr>
+          <p:cNvPr id="2" name="제목 1">
+            <a:extLst>
+              <a:ext uri="{FF2B5EF4-FFF2-40B4-BE49-F238E27FC236}">
+                <a16:creationId xmlns:a16="http://schemas.microsoft.com/office/drawing/2014/main" id="{CCECD2BA-830A-6C90-C17B-E347CB48A6CB}"/>
+              </a:ext>
+            </a:extLst>
+          </p:cNvPr>
+          <p:cNvSpPr>
+            <a:spLocks noGrp="1"/>
+          </p:cNvSpPr>
+          <p:nvPr>
+            <p:ph type="title"/>
+          </p:nvPr>
+        </p:nvSpPr>
+        <p:spPr/>
+        <p:txBody>
+          <a:bodyPr/>
+          <a:lstStyle/>
+          <a:p>
+            <a:r>
+              <a:rPr lang="ko-KR" altLang="en-US" dirty="0"/>
+              <a:t>디지털 </a:t>
+            </a:r>
+            <a:r>
+              <a:rPr lang="ko-KR" altLang="en-US" dirty="0" err="1"/>
+              <a:t>테스트벤치</a:t>
+            </a:r>
+            <a:r>
+              <a:rPr lang="ko-KR" altLang="en-US" dirty="0"/>
+              <a:t> 구조</a:t>
+            </a:r>
+          </a:p>
+        </p:txBody>
+      </p:sp>
+      <p:sp>
+        <p:nvSpPr>
+          <p:cNvPr id="3" name="내용 개체 틀 2">
+            <a:extLst>
+              <a:ext uri="{FF2B5EF4-FFF2-40B4-BE49-F238E27FC236}">
+                <a16:creationId xmlns:a16="http://schemas.microsoft.com/office/drawing/2014/main" id="{DA95D773-687F-A457-641D-06098AA7A34A}"/>
+              </a:ext>
+            </a:extLst>
+          </p:cNvPr>
+          <p:cNvSpPr>
+            <a:spLocks noGrp="1"/>
+          </p:cNvSpPr>
+          <p:nvPr>
+            <p:ph idx="1"/>
+          </p:nvPr>
+        </p:nvSpPr>
+        <p:spPr/>
+        <p:txBody>
+          <a:bodyPr/>
+          <a:lstStyle/>
+          <a:p>
+            <a:endParaRPr lang="ko-KR" altLang="en-US"/>
+          </a:p>
+        </p:txBody>
+      </p:sp>
+    </p:spTree>
+    <p:extLst>
+      <p:ext uri="{BB962C8B-B14F-4D97-AF65-F5344CB8AC3E}">
+        <p14:creationId xmlns:p14="http://schemas.microsoft.com/office/powerpoint/2010/main" val="857959110"/>
+      </p:ext>
+    </p:extLst>
+  </p:cSld>
+  <p:clrMapOvr>
+    <a:masterClrMapping/>
+  </p:clrMapOvr>
+</p:sld>
+</file>
+
+<file path=ppt/slides/slide6.xml><?xml version="1.0" encoding="utf-8"?>
+<p:sld xmlns:a="http://schemas.openxmlformats.org/drawingml/2006/main" xmlns:r="http://schemas.openxmlformats.org/officeDocument/2006/relationships" xmlns:p="http://schemas.openxmlformats.org/presentationml/2006/main">
+  <p:cSld>
+    <p:spTree>
+      <p:nvGrpSpPr>
+        <p:cNvPr id="1" name=""/>
+        <p:cNvGrpSpPr/>
+        <p:nvPr/>
+      </p:nvGrpSpPr>
+      <p:grpSpPr>
+        <a:xfrm>
+          <a:off x="0" y="0"/>
+          <a:ext cx="0" cy="0"/>
+          <a:chOff x="0" y="0"/>
+          <a:chExt cx="0" cy="0"/>
+        </a:xfrm>
+      </p:grpSpPr>
+      <p:sp>
+        <p:nvSpPr>
+          <p:cNvPr id="2" name="제목 1">
+            <a:extLst>
+              <a:ext uri="{FF2B5EF4-FFF2-40B4-BE49-F238E27FC236}">
+                <a16:creationId xmlns:a16="http://schemas.microsoft.com/office/drawing/2014/main" id="{8FE62AE9-4285-B5CB-5B4F-DC232C063ED1}"/>
+              </a:ext>
+            </a:extLst>
+          </p:cNvPr>
+          <p:cNvSpPr>
+            <a:spLocks noGrp="1"/>
+          </p:cNvSpPr>
+          <p:nvPr>
+            <p:ph type="title"/>
+          </p:nvPr>
+        </p:nvSpPr>
+        <p:spPr/>
+        <p:txBody>
+          <a:bodyPr/>
+          <a:lstStyle/>
+          <a:p>
+            <a:endParaRPr lang="ko-KR" altLang="en-US"/>
+          </a:p>
+        </p:txBody>
+      </p:sp>
+      <p:sp>
+        <p:nvSpPr>
+          <p:cNvPr id="3" name="내용 개체 틀 2">
+            <a:extLst>
+              <a:ext uri="{FF2B5EF4-FFF2-40B4-BE49-F238E27FC236}">
+                <a16:creationId xmlns:a16="http://schemas.microsoft.com/office/drawing/2014/main" id="{6511CAA7-6EF9-4380-8C03-C1C1132A6438}"/>
+              </a:ext>
+            </a:extLst>
+          </p:cNvPr>
+          <p:cNvSpPr>
+            <a:spLocks noGrp="1"/>
+          </p:cNvSpPr>
+          <p:nvPr>
+            <p:ph idx="1"/>
+          </p:nvPr>
+        </p:nvSpPr>
+        <p:spPr/>
+        <p:txBody>
+          <a:bodyPr/>
+          <a:lstStyle/>
+          <a:p>
+            <a:endParaRPr lang="ko-KR" altLang="en-US"/>
+          </a:p>
+        </p:txBody>
+      </p:sp>
+    </p:spTree>
+    <p:extLst>
+      <p:ext uri="{BB962C8B-B14F-4D97-AF65-F5344CB8AC3E}">
+        <p14:creationId xmlns:p14="http://schemas.microsoft.com/office/powerpoint/2010/main" val="2034143713"/>
+      </p:ext>
+    </p:extLst>
+  </p:cSld>
+  <p:clrMapOvr>
+    <a:masterClrMapping/>
+  </p:clrMapOvr>
+</p:sld>
+</file>
+
+<file path=ppt/slides/slide7.xml><?xml version="1.0" encoding="utf-8"?>
+<p:sld xmlns:a="http://schemas.openxmlformats.org/drawingml/2006/main" xmlns:r="http://schemas.openxmlformats.org/officeDocument/2006/relationships" xmlns:p="http://schemas.openxmlformats.org/presentationml/2006/main">
+  <p:cSld>
+    <p:spTree>
+      <p:nvGrpSpPr>
+        <p:cNvPr id="1" name=""/>
+        <p:cNvGrpSpPr/>
+        <p:nvPr/>
+      </p:nvGrpSpPr>
+      <p:grpSpPr>
+        <a:xfrm>
+          <a:off x="0" y="0"/>
+          <a:ext cx="0" cy="0"/>
+          <a:chOff x="0" y="0"/>
+          <a:chExt cx="0" cy="0"/>
+        </a:xfrm>
+      </p:grpSpPr>
+      <p:sp>
+        <p:nvSpPr>
           <p:cNvPr id="2" name="제목 1"/>
           <p:cNvSpPr>
             <a:spLocks noGrp="1"/>
@@ -3653,564 +4006,6 @@
 </p:sld>
 </file>
 
-<file path=ppt/slides/slide5.xml><?xml version="1.0" encoding="utf-8"?>
-<p:sld xmlns:a="http://schemas.openxmlformats.org/drawingml/2006/main" xmlns:r="http://schemas.openxmlformats.org/officeDocument/2006/relationships" xmlns:p="http://schemas.openxmlformats.org/presentationml/2006/main">
-  <p:cSld>
-    <p:spTree>
-      <p:nvGrpSpPr>
-        <p:cNvPr id="1" name=""/>
-        <p:cNvGrpSpPr/>
-        <p:nvPr/>
-      </p:nvGrpSpPr>
-      <p:grpSpPr>
-        <a:xfrm>
-          <a:off x="0" y="0"/>
-          <a:ext cx="0" cy="0"/>
-          <a:chOff x="0" y="0"/>
-          <a:chExt cx="0" cy="0"/>
-        </a:xfrm>
-      </p:grpSpPr>
-      <p:sp>
-        <p:nvSpPr>
-          <p:cNvPr id="2" name="제목 1"/>
-          <p:cNvSpPr>
-            <a:spLocks noGrp="1"/>
-          </p:cNvSpPr>
-          <p:nvPr>
-            <p:ph type="title"/>
-          </p:nvPr>
-        </p:nvSpPr>
-        <p:spPr/>
-        <p:txBody>
-          <a:bodyPr/>
-          <a:lstStyle/>
-          <a:p>
-            <a:r>
-              <a:rPr lang="en-US" altLang="ko-KR" dirty="0"/>
-              <a:t>6T SRAM Schematic</a:t>
-            </a:r>
-            <a:r>
-              <a:rPr lang="ko-KR" altLang="en-US" dirty="0"/>
-              <a:t> 설계</a:t>
-            </a:r>
-          </a:p>
-        </p:txBody>
-      </p:sp>
-      <p:sp>
-        <p:nvSpPr>
-          <p:cNvPr id="3" name="내용 개체 틀 2"/>
-          <p:cNvSpPr>
-            <a:spLocks noGrp="1"/>
-          </p:cNvSpPr>
-          <p:nvPr>
-            <p:ph idx="1"/>
-          </p:nvPr>
-        </p:nvSpPr>
-        <p:spPr/>
-        <p:txBody>
-          <a:bodyPr/>
-          <a:lstStyle/>
-          <a:p>
-            <a:r>
-              <a:rPr lang="en-US" altLang="ko-KR" dirty="0" err="1"/>
-              <a:t>Analoglib</a:t>
-            </a:r>
-            <a:r>
-              <a:rPr lang="en-US" altLang="ko-KR" dirty="0"/>
-              <a:t> </a:t>
-            </a:r>
-            <a:r>
-              <a:rPr lang="ko-KR" altLang="en-US" dirty="0"/>
-              <a:t>기단에서 </a:t>
-            </a:r>
-            <a:r>
-              <a:rPr lang="en-US" altLang="ko-KR" dirty="0"/>
-              <a:t>PMOS, NMOS, </a:t>
-            </a:r>
-            <a:r>
-              <a:rPr lang="ko-KR" altLang="en-US" dirty="0"/>
-              <a:t>전원 핀</a:t>
-            </a:r>
-            <a:r>
-              <a:rPr lang="en-US" altLang="ko-KR" dirty="0"/>
-              <a:t>, word-line, bit-line </a:t>
-            </a:r>
-            <a:r>
-              <a:rPr lang="ko-KR" altLang="en-US" dirty="0"/>
-              <a:t>소자를 배치한다</a:t>
-            </a:r>
-            <a:r>
-              <a:rPr lang="en-US" altLang="ko-KR" dirty="0"/>
-              <a:t>.</a:t>
-            </a:r>
-          </a:p>
-          <a:p>
-            <a:r>
-              <a:rPr lang="en-US" altLang="ko-KR" dirty="0"/>
-              <a:t>6</a:t>
-            </a:r>
-            <a:r>
-              <a:rPr lang="ko-KR" altLang="en-US" dirty="0"/>
-              <a:t>개의 트랜지스터</a:t>
-            </a:r>
-            <a:r>
-              <a:rPr lang="en-US" altLang="ko-KR" dirty="0"/>
-              <a:t>(P1, P2, N1, N2, M5, M6)</a:t>
-            </a:r>
-            <a:r>
-              <a:rPr lang="ko-KR" altLang="en-US" dirty="0"/>
-              <a:t>를 교차 연결한다</a:t>
-            </a:r>
-            <a:r>
-              <a:rPr lang="en-US" altLang="ko-KR" dirty="0"/>
-              <a:t>.</a:t>
-            </a:r>
-          </a:p>
-          <a:p>
-            <a:r>
-              <a:rPr lang="ko-KR" altLang="en-US" dirty="0"/>
-              <a:t>초기 충전용 </a:t>
-            </a:r>
-            <a:r>
-              <a:rPr lang="en-US" altLang="ko-KR" dirty="0"/>
-              <a:t>PMOS,</a:t>
-            </a:r>
-            <a:r>
-              <a:rPr lang="ko-KR" altLang="en-US" dirty="0"/>
-              <a:t> 센스 앰프용 소자를 추가한다</a:t>
-            </a:r>
-            <a:r>
-              <a:rPr lang="en-US" altLang="ko-KR" dirty="0"/>
-              <a:t>.</a:t>
-            </a:r>
-          </a:p>
-          <a:p>
-            <a:r>
-              <a:rPr lang="ko-KR" altLang="en-US" dirty="0"/>
-              <a:t>핀을 부착하고 네트 이름을 지정한다</a:t>
-            </a:r>
-            <a:r>
-              <a:rPr lang="en-US" altLang="ko-KR" dirty="0"/>
-              <a:t>.</a:t>
-            </a:r>
-          </a:p>
-        </p:txBody>
-      </p:sp>
-    </p:spTree>
-    <p:extLst>
-      <p:ext uri="{BB962C8B-B14F-4D97-AF65-F5344CB8AC3E}">
-        <p14:creationId xmlns:p14="http://schemas.microsoft.com/office/powerpoint/2010/main" val="2862500190"/>
-      </p:ext>
-    </p:extLst>
-  </p:cSld>
-  <p:clrMapOvr>
-    <a:masterClrMapping/>
-  </p:clrMapOvr>
-</p:sld>
-</file>
-
-<file path=ppt/slides/slide6.xml><?xml version="1.0" encoding="utf-8"?>
-<p:sld xmlns:a="http://schemas.openxmlformats.org/drawingml/2006/main" xmlns:r="http://schemas.openxmlformats.org/officeDocument/2006/relationships" xmlns:p="http://schemas.openxmlformats.org/presentationml/2006/main">
-  <p:cSld>
-    <p:spTree>
-      <p:nvGrpSpPr>
-        <p:cNvPr id="1" name=""/>
-        <p:cNvGrpSpPr/>
-        <p:nvPr/>
-      </p:nvGrpSpPr>
-      <p:grpSpPr>
-        <a:xfrm>
-          <a:off x="0" y="0"/>
-          <a:ext cx="0" cy="0"/>
-          <a:chOff x="0" y="0"/>
-          <a:chExt cx="0" cy="0"/>
-        </a:xfrm>
-      </p:grpSpPr>
-      <p:sp>
-        <p:nvSpPr>
-          <p:cNvPr id="2" name="제목 1"/>
-          <p:cNvSpPr>
-            <a:spLocks noGrp="1"/>
-          </p:cNvSpPr>
-          <p:nvPr>
-            <p:ph type="title"/>
-          </p:nvPr>
-        </p:nvSpPr>
-        <p:spPr/>
-        <p:txBody>
-          <a:bodyPr/>
-          <a:lstStyle/>
-          <a:p>
-            <a:r>
-              <a:rPr lang="en-US" altLang="ko-KR" dirty="0"/>
-              <a:t>6T SRAM </a:t>
-            </a:r>
-            <a:r>
-              <a:rPr lang="ko-KR" altLang="en-US" dirty="0" smtClean="0"/>
-              <a:t>레이아웃 </a:t>
-            </a:r>
-            <a:r>
-              <a:rPr lang="ko-KR" altLang="en-US" dirty="0"/>
-              <a:t>생성과정</a:t>
-            </a:r>
-          </a:p>
-        </p:txBody>
-      </p:sp>
-      <p:sp>
-        <p:nvSpPr>
-          <p:cNvPr id="3" name="내용 개체 틀 2"/>
-          <p:cNvSpPr>
-            <a:spLocks noGrp="1"/>
-          </p:cNvSpPr>
-          <p:nvPr>
-            <p:ph idx="1"/>
-          </p:nvPr>
-        </p:nvSpPr>
-        <p:spPr/>
-        <p:txBody>
-          <a:bodyPr/>
-          <a:lstStyle/>
-          <a:p>
-            <a:r>
-              <a:rPr lang="en-US" altLang="ko-KR" dirty="0"/>
-              <a:t>Schematic</a:t>
-            </a:r>
-            <a:r>
-              <a:rPr lang="ko-KR" altLang="en-US" dirty="0"/>
-              <a:t>에 기반한 서브블록을 생성한다</a:t>
-            </a:r>
-            <a:r>
-              <a:rPr lang="en-US" altLang="ko-KR" dirty="0"/>
-              <a:t>.</a:t>
-            </a:r>
-          </a:p>
-          <a:p>
-            <a:r>
-              <a:rPr lang="en-US" altLang="ko-KR" dirty="0"/>
-              <a:t>SRAM </a:t>
-            </a:r>
-            <a:r>
-              <a:rPr lang="ko-KR" altLang="en-US" dirty="0"/>
-              <a:t>셀을 포함한 각각의 </a:t>
-            </a:r>
-            <a:r>
-              <a:rPr lang="en-US" altLang="ko-KR" dirty="0"/>
-              <a:t>Symbol</a:t>
-            </a:r>
-            <a:r>
-              <a:rPr lang="ko-KR" altLang="en-US" dirty="0"/>
-              <a:t>을 생성한다</a:t>
-            </a:r>
-            <a:r>
-              <a:rPr lang="en-US" altLang="ko-KR" dirty="0"/>
-              <a:t>.</a:t>
-            </a:r>
-          </a:p>
-          <a:p>
-            <a:r>
-              <a:rPr lang="ko-KR" altLang="en-US" dirty="0"/>
-              <a:t>새로운 </a:t>
-            </a:r>
-            <a:r>
-              <a:rPr lang="en-US" altLang="ko-KR" dirty="0" err="1"/>
-              <a:t>cellview</a:t>
-            </a:r>
-            <a:r>
-              <a:rPr lang="ko-KR" altLang="en-US" dirty="0"/>
-              <a:t>로 </a:t>
-            </a:r>
-            <a:r>
-              <a:rPr lang="en-US" altLang="ko-KR" dirty="0"/>
-              <a:t>layout</a:t>
-            </a:r>
-            <a:r>
-              <a:rPr lang="ko-KR" altLang="en-US" dirty="0"/>
-              <a:t>을 생성한다</a:t>
-            </a:r>
-            <a:r>
-              <a:rPr lang="en-US" altLang="ko-KR" dirty="0"/>
-              <a:t>.</a:t>
-            </a:r>
-          </a:p>
-          <a:p>
-            <a:r>
-              <a:rPr lang="ko-KR" altLang="en-US" dirty="0"/>
-              <a:t>트랜지스터를 구현하는데</a:t>
-            </a:r>
-            <a:r>
-              <a:rPr lang="en-US" altLang="ko-KR" dirty="0"/>
-              <a:t>, </a:t>
-            </a:r>
-            <a:r>
-              <a:rPr lang="ko-KR" altLang="en-US" dirty="0"/>
-              <a:t>여기서 </a:t>
-            </a:r>
-            <a:r>
-              <a:rPr lang="en-US" altLang="ko-KR" dirty="0" err="1"/>
-              <a:t>pmos</a:t>
-            </a:r>
-            <a:r>
-              <a:rPr lang="en-US" altLang="ko-KR" dirty="0"/>
-              <a:t> </a:t>
-            </a:r>
-            <a:r>
-              <a:rPr lang="ko-KR" altLang="en-US" dirty="0"/>
-              <a:t>영역은 </a:t>
-            </a:r>
-            <a:r>
-              <a:rPr lang="en-US" altLang="ko-KR" dirty="0"/>
-              <a:t>n-well</a:t>
-            </a:r>
-            <a:r>
-              <a:rPr lang="ko-KR" altLang="en-US" dirty="0"/>
-              <a:t>을 포함해야 한다</a:t>
-            </a:r>
-            <a:r>
-              <a:rPr lang="en-US" altLang="ko-KR" dirty="0"/>
-              <a:t>.</a:t>
-            </a:r>
-          </a:p>
-          <a:p>
-            <a:r>
-              <a:rPr lang="ko-KR" altLang="en-US" dirty="0"/>
-              <a:t>핀 레이어를 통해 신호를 연결한다</a:t>
-            </a:r>
-            <a:r>
-              <a:rPr lang="en-US" altLang="ko-KR" dirty="0"/>
-              <a:t>.</a:t>
-            </a:r>
-          </a:p>
-          <a:p>
-            <a:r>
-              <a:rPr lang="en-US" altLang="ko-KR" dirty="0"/>
-              <a:t>DRC </a:t>
-            </a:r>
-            <a:r>
-              <a:rPr lang="ko-KR" altLang="en-US" dirty="0"/>
-              <a:t>검사 후 오류를 수정한다</a:t>
-            </a:r>
-            <a:r>
-              <a:rPr lang="en-US" altLang="ko-KR" dirty="0"/>
-              <a:t>.</a:t>
-            </a:r>
-            <a:endParaRPr lang="ko-KR" altLang="en-US" dirty="0"/>
-          </a:p>
-        </p:txBody>
-      </p:sp>
-    </p:spTree>
-    <p:extLst>
-      <p:ext uri="{BB962C8B-B14F-4D97-AF65-F5344CB8AC3E}">
-        <p14:creationId xmlns:p14="http://schemas.microsoft.com/office/powerpoint/2010/main" val="1719335813"/>
-      </p:ext>
-    </p:extLst>
-  </p:cSld>
-  <p:clrMapOvr>
-    <a:masterClrMapping/>
-  </p:clrMapOvr>
-</p:sld>
-</file>
-
-<file path=ppt/slides/slide7.xml><?xml version="1.0" encoding="utf-8"?>
-<p:sld xmlns:a="http://schemas.openxmlformats.org/drawingml/2006/main" xmlns:r="http://schemas.openxmlformats.org/officeDocument/2006/relationships" xmlns:p="http://schemas.openxmlformats.org/presentationml/2006/main">
-  <p:cSld>
-    <p:spTree>
-      <p:nvGrpSpPr>
-        <p:cNvPr id="1" name=""/>
-        <p:cNvGrpSpPr/>
-        <p:nvPr/>
-      </p:nvGrpSpPr>
-      <p:grpSpPr>
-        <a:xfrm>
-          <a:off x="0" y="0"/>
-          <a:ext cx="0" cy="0"/>
-          <a:chOff x="0" y="0"/>
-          <a:chExt cx="0" cy="0"/>
-        </a:xfrm>
-      </p:grpSpPr>
-      <p:sp>
-        <p:nvSpPr>
-          <p:cNvPr id="2" name="제목 1">
-            <a:extLst>
-              <a:ext uri="{FF2B5EF4-FFF2-40B4-BE49-F238E27FC236}">
-                <a16:creationId xmlns:a16="http://schemas.microsoft.com/office/drawing/2014/main" id="{33CEF3DE-50AC-AF66-8256-754D24441963}"/>
-              </a:ext>
-            </a:extLst>
-          </p:cNvPr>
-          <p:cNvSpPr>
-            <a:spLocks noGrp="1"/>
-          </p:cNvSpPr>
-          <p:nvPr>
-            <p:ph type="title"/>
-          </p:nvPr>
-        </p:nvSpPr>
-        <p:spPr/>
-        <p:txBody>
-          <a:bodyPr/>
-          <a:lstStyle/>
-          <a:p>
-            <a:r>
-              <a:rPr lang="en-US" altLang="ko-KR" dirty="0"/>
-              <a:t>6T </a:t>
-            </a:r>
-            <a:r>
-              <a:rPr lang="en-US" altLang="ko-KR" dirty="0" smtClean="0"/>
-              <a:t>SRAM </a:t>
-            </a:r>
-            <a:r>
-              <a:rPr lang="ko-KR" altLang="en-US" dirty="0" smtClean="0"/>
-              <a:t>추출 및 시뮬레이션</a:t>
-            </a:r>
-            <a:endParaRPr lang="ko-KR" altLang="en-US" dirty="0"/>
-          </a:p>
-        </p:txBody>
-      </p:sp>
-      <p:sp>
-        <p:nvSpPr>
-          <p:cNvPr id="3" name="내용 개체 틀 2">
-            <a:extLst>
-              <a:ext uri="{FF2B5EF4-FFF2-40B4-BE49-F238E27FC236}">
-                <a16:creationId xmlns:a16="http://schemas.microsoft.com/office/drawing/2014/main" id="{D40D8EA0-854A-F593-9D4B-70BED1C4BE5A}"/>
-              </a:ext>
-            </a:extLst>
-          </p:cNvPr>
-          <p:cNvSpPr>
-            <a:spLocks noGrp="1"/>
-          </p:cNvSpPr>
-          <p:nvPr>
-            <p:ph idx="1"/>
-          </p:nvPr>
-        </p:nvSpPr>
-        <p:spPr/>
-        <p:txBody>
-          <a:bodyPr/>
-          <a:lstStyle/>
-          <a:p>
-            <a:r>
-              <a:rPr lang="ko-KR" altLang="en-US" dirty="0" smtClean="0"/>
-              <a:t>추출된 회로로 </a:t>
-            </a:r>
-            <a:r>
-              <a:rPr lang="en-US" altLang="ko-KR" dirty="0" err="1" smtClean="0"/>
-              <a:t>Spectre</a:t>
-            </a:r>
-            <a:r>
-              <a:rPr lang="en-US" altLang="ko-KR" dirty="0" smtClean="0"/>
-              <a:t> </a:t>
-            </a:r>
-            <a:r>
-              <a:rPr lang="ko-KR" altLang="en-US" dirty="0" smtClean="0"/>
-              <a:t>시뮬레이션 분석</a:t>
-            </a:r>
-            <a:endParaRPr lang="en-US" altLang="ko-KR" dirty="0" smtClean="0"/>
-          </a:p>
-          <a:p>
-            <a:r>
-              <a:rPr lang="en-US" altLang="ko-KR" dirty="0" err="1" smtClean="0"/>
-              <a:t>Wordline</a:t>
-            </a:r>
-            <a:r>
-              <a:rPr lang="en-US" altLang="ko-KR" dirty="0" smtClean="0"/>
-              <a:t> </a:t>
-            </a:r>
-            <a:r>
-              <a:rPr lang="ko-KR" altLang="en-US" dirty="0" smtClean="0"/>
-              <a:t>활성 → </a:t>
-            </a:r>
-            <a:r>
-              <a:rPr lang="en-US" altLang="ko-KR" dirty="0" smtClean="0"/>
-              <a:t>1</a:t>
-            </a:r>
-            <a:r>
-              <a:rPr lang="ko-KR" altLang="en-US" dirty="0" smtClean="0"/>
-              <a:t>개의 </a:t>
-            </a:r>
-            <a:r>
-              <a:rPr lang="ko-KR" altLang="en-US" dirty="0" err="1" smtClean="0"/>
-              <a:t>비트라인</a:t>
-            </a:r>
-            <a:r>
-              <a:rPr lang="ko-KR" altLang="en-US" dirty="0" smtClean="0"/>
-              <a:t> 방전 → </a:t>
-            </a:r>
-            <a:r>
-              <a:rPr lang="ko-KR" altLang="en-US" dirty="0" err="1" smtClean="0"/>
-              <a:t>센스엠프</a:t>
-            </a:r>
-            <a:r>
-              <a:rPr lang="ko-KR" altLang="en-US" dirty="0" smtClean="0"/>
-              <a:t> 증폭</a:t>
-            </a:r>
-            <a:endParaRPr lang="en-US" altLang="ko-KR" dirty="0" smtClean="0"/>
-          </a:p>
-          <a:p>
-            <a:r>
-              <a:rPr lang="ko-KR" altLang="en-US" dirty="0" smtClean="0"/>
-              <a:t>양 </a:t>
-            </a:r>
-            <a:r>
-              <a:rPr lang="ko-KR" altLang="en-US" dirty="0" err="1" smtClean="0"/>
-              <a:t>비트라인에</a:t>
-            </a:r>
-            <a:r>
-              <a:rPr lang="ko-KR" altLang="en-US" dirty="0" smtClean="0"/>
-              <a:t> </a:t>
-            </a:r>
-            <a:r>
-              <a:rPr lang="en-US" altLang="ko-KR" dirty="0" err="1" smtClean="0"/>
-              <a:t>Vdd</a:t>
-            </a:r>
-            <a:r>
-              <a:rPr lang="en-US" altLang="ko-KR" dirty="0" smtClean="0"/>
-              <a:t>/</a:t>
-            </a:r>
-            <a:r>
-              <a:rPr lang="en-US" altLang="ko-KR" dirty="0" err="1" smtClean="0"/>
-              <a:t>Gnd</a:t>
-            </a:r>
-            <a:r>
-              <a:rPr lang="en-US" altLang="ko-KR" dirty="0" smtClean="0"/>
-              <a:t> </a:t>
-            </a:r>
-            <a:r>
-              <a:rPr lang="ko-KR" altLang="en-US" dirty="0" smtClean="0"/>
-              <a:t>제공 → </a:t>
-            </a:r>
-            <a:r>
-              <a:rPr lang="en-US" altLang="ko-KR" dirty="0" smtClean="0"/>
-              <a:t>SRAM </a:t>
-            </a:r>
-            <a:r>
-              <a:rPr lang="ko-KR" altLang="en-US" dirty="0" smtClean="0"/>
-              <a:t>셀 상태 쓰기</a:t>
-            </a:r>
-            <a:endParaRPr lang="en-US" altLang="ko-KR" dirty="0" smtClean="0"/>
-          </a:p>
-          <a:p>
-            <a:r>
-              <a:rPr lang="en-US" altLang="ko-KR" smtClean="0"/>
-              <a:t>SNM </a:t>
-            </a:r>
-            <a:r>
-              <a:rPr lang="ko-KR" altLang="en-US" smtClean="0"/>
-              <a:t>분석 가능</a:t>
-            </a:r>
-            <a:endParaRPr lang="ko-KR" altLang="en-US" dirty="0"/>
-          </a:p>
-        </p:txBody>
-      </p:sp>
-    </p:spTree>
-    <p:extLst>
-      <p:ext uri="{BB962C8B-B14F-4D97-AF65-F5344CB8AC3E}">
-        <p14:creationId xmlns:p14="http://schemas.microsoft.com/office/powerpoint/2010/main" val="3869624506"/>
-      </p:ext>
-    </p:extLst>
-  </p:cSld>
-  <p:clrMapOvr>
-    <a:masterClrMapping/>
-  </p:clrMapOvr>
-</p:sld>
-</file>
-
 <file path=ppt/slides/slide8.xml><?xml version="1.0" encoding="utf-8"?>
 <p:sld xmlns:a="http://schemas.openxmlformats.org/drawingml/2006/main" xmlns:r="http://schemas.openxmlformats.org/officeDocument/2006/relationships" xmlns:p="http://schemas.openxmlformats.org/presentationml/2006/main">
   <p:cSld>
@@ -4230,13 +4025,7 @@
       </p:grpSpPr>
       <p:sp>
         <p:nvSpPr>
-          <p:cNvPr id="2" name="제목 1">
-            <a:extLst>
-              <a:ext uri="{FF2B5EF4-FFF2-40B4-BE49-F238E27FC236}">
-                <a16:creationId xmlns:a16="http://schemas.microsoft.com/office/drawing/2014/main" id="{8FE62AE9-4285-B5CB-5B4F-DC232C063ED1}"/>
-              </a:ext>
-            </a:extLst>
-          </p:cNvPr>
+          <p:cNvPr id="2" name="제목 1"/>
           <p:cNvSpPr>
             <a:spLocks noGrp="1"/>
           </p:cNvSpPr>
@@ -4249,19 +4038,20 @@
           <a:bodyPr/>
           <a:lstStyle/>
           <a:p>
-            <a:endParaRPr lang="ko-KR" altLang="en-US"/>
-          </a:p>
-        </p:txBody>
-      </p:sp>
-      <p:sp>
-        <p:nvSpPr>
-          <p:cNvPr id="3" name="내용 개체 틀 2">
-            <a:extLst>
-              <a:ext uri="{FF2B5EF4-FFF2-40B4-BE49-F238E27FC236}">
-                <a16:creationId xmlns:a16="http://schemas.microsoft.com/office/drawing/2014/main" id="{6511CAA7-6EF9-4380-8C03-C1C1132A6438}"/>
-              </a:ext>
-            </a:extLst>
-          </p:cNvPr>
+            <a:r>
+              <a:rPr lang="en-US" altLang="ko-KR" dirty="0"/>
+              <a:t>6T SRAM Schematic</a:t>
+            </a:r>
+            <a:r>
+              <a:rPr lang="ko-KR" altLang="en-US" dirty="0"/>
+              <a:t> 설계</a:t>
+            </a:r>
+          </a:p>
+        </p:txBody>
+      </p:sp>
+      <p:sp>
+        <p:nvSpPr>
+          <p:cNvPr id="3" name="내용 개체 틀 2"/>
           <p:cNvSpPr>
             <a:spLocks noGrp="1"/>
           </p:cNvSpPr>
@@ -4274,14 +4064,95 @@
           <a:bodyPr/>
           <a:lstStyle/>
           <a:p>
-            <a:endParaRPr lang="ko-KR" altLang="en-US"/>
+            <a:r>
+              <a:rPr lang="en-US" altLang="ko-KR" dirty="0" err="1"/>
+              <a:t>Analoglib</a:t>
+            </a:r>
+            <a:r>
+              <a:rPr lang="en-US" altLang="ko-KR" dirty="0"/>
+              <a:t> </a:t>
+            </a:r>
+            <a:r>
+              <a:rPr lang="ko-KR" altLang="en-US" dirty="0"/>
+              <a:t>기단에서 </a:t>
+            </a:r>
+            <a:r>
+              <a:rPr lang="en-US" altLang="ko-KR" dirty="0"/>
+              <a:t>PMOS, NMOS, </a:t>
+            </a:r>
+            <a:r>
+              <a:rPr lang="ko-KR" altLang="en-US" dirty="0"/>
+              <a:t>전원 핀</a:t>
+            </a:r>
+            <a:r>
+              <a:rPr lang="en-US" altLang="ko-KR" dirty="0"/>
+              <a:t>, word-line, bit-line </a:t>
+            </a:r>
+            <a:r>
+              <a:rPr lang="ko-KR" altLang="en-US" dirty="0"/>
+              <a:t>소자를 배치한다</a:t>
+            </a:r>
+            <a:r>
+              <a:rPr lang="en-US" altLang="ko-KR" dirty="0"/>
+              <a:t>.</a:t>
+            </a:r>
+          </a:p>
+          <a:p>
+            <a:r>
+              <a:rPr lang="en-US" altLang="ko-KR" dirty="0"/>
+              <a:t>6</a:t>
+            </a:r>
+            <a:r>
+              <a:rPr lang="ko-KR" altLang="en-US" dirty="0"/>
+              <a:t>개의 트랜지스터</a:t>
+            </a:r>
+            <a:r>
+              <a:rPr lang="en-US" altLang="ko-KR" dirty="0"/>
+              <a:t>(P1, P2, N1, N2, M5, M6)</a:t>
+            </a:r>
+            <a:r>
+              <a:rPr lang="ko-KR" altLang="en-US" dirty="0"/>
+              <a:t>를 교차 연결한다</a:t>
+            </a:r>
+            <a:r>
+              <a:rPr lang="en-US" altLang="ko-KR" dirty="0"/>
+              <a:t>.</a:t>
+            </a:r>
+          </a:p>
+          <a:p>
+            <a:r>
+              <a:rPr lang="ko-KR" altLang="en-US" dirty="0"/>
+              <a:t>초기 충전용 </a:t>
+            </a:r>
+            <a:r>
+              <a:rPr lang="en-US" altLang="ko-KR" dirty="0"/>
+              <a:t>PMOS,</a:t>
+            </a:r>
+            <a:r>
+              <a:rPr lang="ko-KR" altLang="en-US" dirty="0"/>
+              <a:t> 센스 앰프용 소자를 추가한다</a:t>
+            </a:r>
+            <a:r>
+              <a:rPr lang="en-US" altLang="ko-KR" dirty="0"/>
+              <a:t>.</a:t>
+            </a:r>
+          </a:p>
+          <a:p>
+            <a:r>
+              <a:rPr lang="ko-KR" altLang="en-US" dirty="0"/>
+              <a:t>핀을 부착하고 네트 이름을 지정한다</a:t>
+            </a:r>
+            <a:r>
+              <a:rPr lang="en-US" altLang="ko-KR" dirty="0"/>
+              <a:t>.</a:t>
+            </a:r>
           </a:p>
         </p:txBody>
       </p:sp>
     </p:spTree>
     <p:extLst>
       <p:ext uri="{BB962C8B-B14F-4D97-AF65-F5344CB8AC3E}">
-        <p14:creationId xmlns:p14="http://schemas.microsoft.com/office/powerpoint/2010/main" val="2034143713"/>
+        <p14:creationId xmlns:p14="http://schemas.microsoft.com/office/powerpoint/2010/main" val="2862500190"/>
       </p:ext>
     </p:extLst>
   </p:cSld>
@@ -4310,13 +4181,7 @@
       </p:grpSpPr>
       <p:sp>
         <p:nvSpPr>
-          <p:cNvPr id="2" name="제목 1">
-            <a:extLst>
-              <a:ext uri="{FF2B5EF4-FFF2-40B4-BE49-F238E27FC236}">
-                <a16:creationId xmlns:a16="http://schemas.microsoft.com/office/drawing/2014/main" id="{CCECD2BA-830A-6C90-C17B-E347CB48A6CB}"/>
-              </a:ext>
-            </a:extLst>
-          </p:cNvPr>
+          <p:cNvPr id="2" name="제목 1"/>
           <p:cNvSpPr>
             <a:spLocks noGrp="1"/>
           </p:cNvSpPr>
@@ -4329,19 +4194,20 @@
           <a:bodyPr/>
           <a:lstStyle/>
           <a:p>
-            <a:endParaRPr lang="ko-KR" altLang="en-US"/>
-          </a:p>
-        </p:txBody>
-      </p:sp>
-      <p:sp>
-        <p:nvSpPr>
-          <p:cNvPr id="3" name="내용 개체 틀 2">
-            <a:extLst>
-              <a:ext uri="{FF2B5EF4-FFF2-40B4-BE49-F238E27FC236}">
-                <a16:creationId xmlns:a16="http://schemas.microsoft.com/office/drawing/2014/main" id="{DA95D773-687F-A457-641D-06098AA7A34A}"/>
-              </a:ext>
-            </a:extLst>
-          </p:cNvPr>
+            <a:r>
+              <a:rPr lang="en-US" altLang="ko-KR" dirty="0"/>
+              <a:t>6T SRAM </a:t>
+            </a:r>
+            <a:r>
+              <a:rPr lang="ko-KR" altLang="en-US" dirty="0"/>
+              <a:t>레이아웃 생성과정</a:t>
+            </a:r>
+          </a:p>
+        </p:txBody>
+      </p:sp>
+      <p:sp>
+        <p:nvSpPr>
+          <p:cNvPr id="3" name="내용 개체 틀 2"/>
           <p:cNvSpPr>
             <a:spLocks noGrp="1"/>
           </p:cNvSpPr>
@@ -4354,14 +4220,136 @@
           <a:bodyPr/>
           <a:lstStyle/>
           <a:p>
-            <a:endParaRPr lang="ko-KR" altLang="en-US"/>
+            <a:r>
+              <a:rPr lang="en-US" altLang="ko-KR" dirty="0"/>
+              <a:t>Schematic</a:t>
+            </a:r>
+            <a:r>
+              <a:rPr lang="ko-KR" altLang="en-US" dirty="0"/>
+              <a:t>에 기반한 서브블록을 생성한다</a:t>
+            </a:r>
+            <a:r>
+              <a:rPr lang="en-US" altLang="ko-KR" dirty="0"/>
+              <a:t>.</a:t>
+            </a:r>
+          </a:p>
+          <a:p>
+            <a:r>
+              <a:rPr lang="en-US" altLang="ko-KR" dirty="0"/>
+              <a:t>SRAM </a:t>
+            </a:r>
+            <a:r>
+              <a:rPr lang="ko-KR" altLang="en-US" dirty="0"/>
+              <a:t>셀을 포함한 각각의 </a:t>
+            </a:r>
+            <a:r>
+              <a:rPr lang="en-US" altLang="ko-KR" dirty="0"/>
+              <a:t>Symbol</a:t>
+            </a:r>
+            <a:r>
+              <a:rPr lang="ko-KR" altLang="en-US" dirty="0"/>
+              <a:t>을 생성한다</a:t>
+            </a:r>
+            <a:r>
+              <a:rPr lang="en-US" altLang="ko-KR" dirty="0"/>
+              <a:t>.</a:t>
+            </a:r>
+          </a:p>
+          <a:p>
+            <a:r>
+              <a:rPr lang="ko-KR" altLang="en-US" dirty="0"/>
+              <a:t>새로운 </a:t>
+            </a:r>
+            <a:r>
+              <a:rPr lang="en-US" altLang="ko-KR" dirty="0" err="1"/>
+              <a:t>cellview</a:t>
+            </a:r>
+            <a:r>
+              <a:rPr lang="ko-KR" altLang="en-US" dirty="0"/>
+              <a:t>로 </a:t>
+            </a:r>
+            <a:r>
+              <a:rPr lang="en-US" altLang="ko-KR" dirty="0"/>
+              <a:t>layout</a:t>
+            </a:r>
+            <a:r>
+              <a:rPr lang="ko-KR" altLang="en-US" dirty="0"/>
+              <a:t>을 생성한다</a:t>
+            </a:r>
+            <a:r>
+              <a:rPr lang="en-US" altLang="ko-KR" dirty="0"/>
+              <a:t>.</a:t>
+            </a:r>
+          </a:p>
+          <a:p>
+            <a:r>
+              <a:rPr lang="ko-KR" altLang="en-US" dirty="0"/>
+              <a:t>트랜지스터를 구현하는데</a:t>
+            </a:r>
+            <a:r>
+              <a:rPr lang="en-US" altLang="ko-KR" dirty="0"/>
+              <a:t>, </a:t>
+            </a:r>
+            <a:r>
+              <a:rPr lang="ko-KR" altLang="en-US" dirty="0"/>
+              <a:t>여기서 </a:t>
+            </a:r>
+            <a:r>
+              <a:rPr lang="en-US" altLang="ko-KR" dirty="0" err="1"/>
+              <a:t>pmos</a:t>
+            </a:r>
+            <a:r>
+              <a:rPr lang="en-US" altLang="ko-KR" dirty="0"/>
+              <a:t> </a:t>
+            </a:r>
+            <a:r>
+              <a:rPr lang="ko-KR" altLang="en-US" dirty="0"/>
+              <a:t>영역은 </a:t>
+            </a:r>
+            <a:r>
+              <a:rPr lang="en-US" altLang="ko-KR" dirty="0"/>
+              <a:t>n-well</a:t>
+            </a:r>
+            <a:r>
+              <a:rPr lang="ko-KR" altLang="en-US" dirty="0"/>
+              <a:t>을 포함해야 한다</a:t>
+            </a:r>
+            <a:r>
+              <a:rPr lang="en-US" altLang="ko-KR" dirty="0"/>
+              <a:t>.</a:t>
+            </a:r>
+          </a:p>
+          <a:p>
+            <a:r>
+              <a:rPr lang="ko-KR" altLang="en-US" dirty="0"/>
+              <a:t>핀 레이어를 통해 신호를 연결한다</a:t>
+            </a:r>
+            <a:r>
+              <a:rPr lang="en-US" altLang="ko-KR" dirty="0"/>
+              <a:t>.</a:t>
+            </a:r>
+          </a:p>
+          <a:p>
+            <a:r>
+              <a:rPr lang="en-US" altLang="ko-KR" dirty="0"/>
+              <a:t>DRC </a:t>
+            </a:r>
+            <a:r>
+              <a:rPr lang="ko-KR" altLang="en-US" dirty="0"/>
+              <a:t>검사 후 오류를 수정한다</a:t>
+            </a:r>
+            <a:r>
+              <a:rPr lang="en-US" altLang="ko-KR" dirty="0"/>
+              <a:t>.</a:t>
+            </a:r>
+            <a:endParaRPr lang="ko-KR" altLang="en-US" dirty="0"/>
           </a:p>
         </p:txBody>
       </p:sp>
     </p:spTree>
     <p:extLst>
       <p:ext uri="{BB962C8B-B14F-4D97-AF65-F5344CB8AC3E}">
-        <p14:creationId xmlns:p14="http://schemas.microsoft.com/office/powerpoint/2010/main" val="857959110"/>
+        <p14:creationId xmlns:p14="http://schemas.microsoft.com/office/powerpoint/2010/main" val="1719335813"/>
       </p:ext>
     </p:extLst>
   </p:cSld>

--- a/VLSI design 설계 실습/2025-06-13.pptx
+++ b/VLSI design 설계 실습/2025-06-13.pptx
@@ -251,7 +251,7 @@
           <a:p>
             <a:fld id="{088498B5-61CB-4D33-9D13-11B461C68DAA}" type="datetimeFigureOut">
               <a:rPr lang="ko-KR" altLang="en-US" smtClean="0"/>
-              <a:t>2025-06-17</a:t>
+              <a:t>2025-06-18</a:t>
             </a:fld>
             <a:endParaRPr lang="ko-KR" altLang="en-US"/>
           </a:p>
@@ -419,7 +419,7 @@
           <a:p>
             <a:fld id="{088498B5-61CB-4D33-9D13-11B461C68DAA}" type="datetimeFigureOut">
               <a:rPr lang="ko-KR" altLang="en-US" smtClean="0"/>
-              <a:t>2025-06-17</a:t>
+              <a:t>2025-06-18</a:t>
             </a:fld>
             <a:endParaRPr lang="ko-KR" altLang="en-US"/>
           </a:p>
@@ -597,7 +597,7 @@
           <a:p>
             <a:fld id="{088498B5-61CB-4D33-9D13-11B461C68DAA}" type="datetimeFigureOut">
               <a:rPr lang="ko-KR" altLang="en-US" smtClean="0"/>
-              <a:t>2025-06-17</a:t>
+              <a:t>2025-06-18</a:t>
             </a:fld>
             <a:endParaRPr lang="ko-KR" altLang="en-US"/>
           </a:p>
@@ -765,7 +765,7 @@
           <a:p>
             <a:fld id="{088498B5-61CB-4D33-9D13-11B461C68DAA}" type="datetimeFigureOut">
               <a:rPr lang="ko-KR" altLang="en-US" smtClean="0"/>
-              <a:t>2025-06-17</a:t>
+              <a:t>2025-06-18</a:t>
             </a:fld>
             <a:endParaRPr lang="ko-KR" altLang="en-US"/>
           </a:p>
@@ -1010,7 +1010,7 @@
           <a:p>
             <a:fld id="{088498B5-61CB-4D33-9D13-11B461C68DAA}" type="datetimeFigureOut">
               <a:rPr lang="ko-KR" altLang="en-US" smtClean="0"/>
-              <a:t>2025-06-17</a:t>
+              <a:t>2025-06-18</a:t>
             </a:fld>
             <a:endParaRPr lang="ko-KR" altLang="en-US"/>
           </a:p>
@@ -1239,7 +1239,7 @@
           <a:p>
             <a:fld id="{088498B5-61CB-4D33-9D13-11B461C68DAA}" type="datetimeFigureOut">
               <a:rPr lang="ko-KR" altLang="en-US" smtClean="0"/>
-              <a:t>2025-06-17</a:t>
+              <a:t>2025-06-18</a:t>
             </a:fld>
             <a:endParaRPr lang="ko-KR" altLang="en-US"/>
           </a:p>
@@ -1603,7 +1603,7 @@
           <a:p>
             <a:fld id="{088498B5-61CB-4D33-9D13-11B461C68DAA}" type="datetimeFigureOut">
               <a:rPr lang="ko-KR" altLang="en-US" smtClean="0"/>
-              <a:t>2025-06-17</a:t>
+              <a:t>2025-06-18</a:t>
             </a:fld>
             <a:endParaRPr lang="ko-KR" altLang="en-US"/>
           </a:p>
@@ -1720,7 +1720,7 @@
           <a:p>
             <a:fld id="{088498B5-61CB-4D33-9D13-11B461C68DAA}" type="datetimeFigureOut">
               <a:rPr lang="ko-KR" altLang="en-US" smtClean="0"/>
-              <a:t>2025-06-17</a:t>
+              <a:t>2025-06-18</a:t>
             </a:fld>
             <a:endParaRPr lang="ko-KR" altLang="en-US"/>
           </a:p>
@@ -1815,7 +1815,7 @@
           <a:p>
             <a:fld id="{088498B5-61CB-4D33-9D13-11B461C68DAA}" type="datetimeFigureOut">
               <a:rPr lang="ko-KR" altLang="en-US" smtClean="0"/>
-              <a:t>2025-06-17</a:t>
+              <a:t>2025-06-18</a:t>
             </a:fld>
             <a:endParaRPr lang="ko-KR" altLang="en-US"/>
           </a:p>
@@ -2090,7 +2090,7 @@
           <a:p>
             <a:fld id="{088498B5-61CB-4D33-9D13-11B461C68DAA}" type="datetimeFigureOut">
               <a:rPr lang="ko-KR" altLang="en-US" smtClean="0"/>
-              <a:t>2025-06-17</a:t>
+              <a:t>2025-06-18</a:t>
             </a:fld>
             <a:endParaRPr lang="ko-KR" altLang="en-US"/>
           </a:p>
@@ -2342,7 +2342,7 @@
           <a:p>
             <a:fld id="{088498B5-61CB-4D33-9D13-11B461C68DAA}" type="datetimeFigureOut">
               <a:rPr lang="ko-KR" altLang="en-US" smtClean="0"/>
-              <a:t>2025-06-17</a:t>
+              <a:t>2025-06-18</a:t>
             </a:fld>
             <a:endParaRPr lang="ko-KR" altLang="en-US"/>
           </a:p>
@@ -2571,7 +2571,7 @@
           <a:p>
             <a:fld id="{088498B5-61CB-4D33-9D13-11B461C68DAA}" type="datetimeFigureOut">
               <a:rPr lang="ko-KR" altLang="en-US" smtClean="0"/>
-              <a:t>2025-06-17</a:t>
+              <a:t>2025-06-18</a:t>
             </a:fld>
             <a:endParaRPr lang="ko-KR" altLang="en-US"/>
           </a:p>
@@ -3697,20 +3697,30 @@
         </p:nvSpPr>
         <p:spPr/>
         <p:txBody>
-          <a:bodyPr/>
-          <a:lstStyle/>
-          <a:p>
-            <a:r>
-              <a:rPr lang="ko-KR" altLang="en-US" dirty="0"/>
+          <a:bodyPr>
+            <a:normAutofit/>
+          </a:bodyPr>
+          <a:lstStyle/>
+          <a:p>
+            <a:r>
+              <a:rPr lang="ko-KR" altLang="en-US" sz="4000" dirty="0"/>
               <a:t>디지털 </a:t>
             </a:r>
             <a:r>
-              <a:rPr lang="ko-KR" altLang="en-US" dirty="0" err="1"/>
+              <a:rPr lang="ko-KR" altLang="en-US" sz="4000" dirty="0" err="1"/>
               <a:t>테스트벤치</a:t>
             </a:r>
             <a:r>
-              <a:rPr lang="ko-KR" altLang="en-US" dirty="0"/>
-              <a:t> 구조</a:t>
+              <a:rPr lang="ko-KR" altLang="en-US" sz="4000" dirty="0"/>
+              <a:t> </a:t>
+            </a:r>
+            <a:r>
+              <a:rPr lang="en-US" altLang="ko-KR" sz="4000" dirty="0"/>
+              <a:t>Schematic, </a:t>
+            </a:r>
+            <a:r>
+              <a:rPr lang="ko-KR" altLang="en-US" sz="4000" dirty="0"/>
+              <a:t>레이아웃 설계</a:t>
             </a:r>
           </a:p>
         </p:txBody>
@@ -3736,7 +3746,145 @@
           <a:bodyPr/>
           <a:lstStyle/>
           <a:p>
-            <a:endParaRPr lang="ko-KR" altLang="en-US"/>
+            <a:r>
+              <a:rPr lang="ko-KR" altLang="en-US" dirty="0"/>
+              <a:t>링 </a:t>
+            </a:r>
+            <a:r>
+              <a:rPr lang="ko-KR" altLang="en-US" dirty="0" err="1"/>
+              <a:t>오실레이터</a:t>
+            </a:r>
+            <a:r>
+              <a:rPr lang="en-US" altLang="ko-KR" dirty="0"/>
+              <a:t>: </a:t>
+            </a:r>
+            <a:r>
+              <a:rPr lang="ko-KR" altLang="en-US" dirty="0"/>
+              <a:t>버퍼</a:t>
+            </a:r>
+            <a:r>
+              <a:rPr lang="en-US" altLang="ko-KR" dirty="0"/>
+              <a:t>/</a:t>
+            </a:r>
+            <a:r>
+              <a:rPr lang="ko-KR" altLang="en-US" dirty="0"/>
+              <a:t>인버터 </a:t>
+            </a:r>
+            <a:r>
+              <a:rPr lang="en-US" altLang="ko-KR" dirty="0"/>
+              <a:t>3~5</a:t>
+            </a:r>
+            <a:r>
+              <a:rPr lang="ko-KR" altLang="en-US" dirty="0"/>
+              <a:t>개 연결 루프 설계</a:t>
+            </a:r>
+            <a:endParaRPr lang="en-US" altLang="ko-KR" dirty="0"/>
+          </a:p>
+          <a:p>
+            <a:r>
+              <a:rPr lang="en-US" altLang="ko-KR" dirty="0"/>
+              <a:t>6_CNT_C: </a:t>
+            </a:r>
+            <a:r>
+              <a:rPr lang="ko-KR" altLang="en-US" dirty="0"/>
+              <a:t>플립플롭 기반 </a:t>
+            </a:r>
+            <a:r>
+              <a:rPr lang="en-US" altLang="ko-KR" dirty="0"/>
+              <a:t>3~6</a:t>
+            </a:r>
+            <a:r>
+              <a:rPr lang="ko-KR" altLang="en-US" dirty="0"/>
+              <a:t> 비트 카운터</a:t>
+            </a:r>
+            <a:endParaRPr lang="en-US" altLang="ko-KR" dirty="0"/>
+          </a:p>
+          <a:p>
+            <a:r>
+              <a:rPr lang="ko-KR" altLang="en-US" dirty="0"/>
+              <a:t>각 블록에 핀 부여한 다음</a:t>
+            </a:r>
+            <a:r>
+              <a:rPr lang="en-US" altLang="ko-KR" dirty="0"/>
+              <a:t>, </a:t>
+            </a:r>
+            <a:r>
+              <a:rPr lang="ko-KR" altLang="en-US" dirty="0"/>
+              <a:t>상위 </a:t>
+            </a:r>
+            <a:r>
+              <a:rPr lang="en-US" altLang="ko-KR" dirty="0"/>
+              <a:t>Schematic</a:t>
+            </a:r>
+            <a:r>
+              <a:rPr lang="ko-KR" altLang="en-US" dirty="0"/>
+              <a:t>에서 서브블록들을 심볼로 연결한다</a:t>
+            </a:r>
+            <a:r>
+              <a:rPr lang="en-US" altLang="ko-KR" dirty="0"/>
+              <a:t>.</a:t>
+            </a:r>
+          </a:p>
+          <a:p>
+            <a:r>
+              <a:rPr lang="ko-KR" altLang="en-US" dirty="0"/>
+              <a:t>레이아웃 에디터에서 트랜지스터 구현</a:t>
+            </a:r>
+            <a:r>
+              <a:rPr lang="en-US" altLang="ko-KR" dirty="0"/>
+              <a:t>, </a:t>
+            </a:r>
+            <a:r>
+              <a:rPr lang="ko-KR" altLang="en-US" dirty="0"/>
+              <a:t>메탈 레이어 연결</a:t>
+            </a:r>
+            <a:r>
+              <a:rPr lang="en-US" altLang="ko-KR" dirty="0"/>
+              <a:t> </a:t>
+            </a:r>
+            <a:r>
+              <a:rPr lang="ko-KR" altLang="en-US" dirty="0"/>
+              <a:t>및</a:t>
+            </a:r>
+            <a:r>
+              <a:rPr lang="en-US" altLang="ko-KR" dirty="0"/>
+              <a:t> </a:t>
+            </a:r>
+            <a:r>
+              <a:rPr lang="ko-KR" altLang="en-US" dirty="0"/>
+              <a:t>핀 이름 부여</a:t>
+            </a:r>
+            <a:r>
+              <a:rPr lang="en-US" altLang="ko-KR" dirty="0"/>
+              <a:t>, DRC </a:t>
+            </a:r>
+            <a:r>
+              <a:rPr lang="ko-KR" altLang="en-US" dirty="0"/>
+              <a:t>수행 과정을 거친다</a:t>
+            </a:r>
+            <a:r>
+              <a:rPr lang="en-US" altLang="ko-KR" dirty="0"/>
+              <a:t>.</a:t>
+            </a:r>
+          </a:p>
+          <a:p>
+            <a:r>
+              <a:rPr lang="ko-KR" altLang="en-US" dirty="0"/>
+              <a:t>레이아웃에서 추출</a:t>
+            </a:r>
+            <a:r>
+              <a:rPr lang="en-US" altLang="ko-KR" dirty="0"/>
+              <a:t>, LVS </a:t>
+            </a:r>
+            <a:r>
+              <a:rPr lang="ko-KR" altLang="en-US" dirty="0"/>
+              <a:t>검증 과정을 실행한다</a:t>
+            </a:r>
+            <a:r>
+              <a:rPr lang="en-US" altLang="ko-KR"/>
+              <a:t>.</a:t>
+            </a:r>
+            <a:endParaRPr lang="ko-KR" altLang="en-US" dirty="0"/>
           </a:p>
         </p:txBody>
       </p:sp>
@@ -3801,7 +3949,7 @@
             </a:r>
             <a:r>
               <a:rPr lang="ko-KR" altLang="en-US" dirty="0"/>
-              <a:t> 구조</a:t>
+              <a:t> 레이아웃 단계</a:t>
             </a:r>
           </a:p>
         </p:txBody>
@@ -3882,7 +4030,18 @@
           <a:bodyPr/>
           <a:lstStyle/>
           <a:p>
-            <a:endParaRPr lang="ko-KR" altLang="en-US"/>
+            <a:r>
+              <a:rPr lang="ko-KR" altLang="en-US" dirty="0"/>
+              <a:t>디지털 </a:t>
+            </a:r>
+            <a:r>
+              <a:rPr lang="ko-KR" altLang="en-US" dirty="0" err="1"/>
+              <a:t>테스트벤치</a:t>
+            </a:r>
+            <a:r>
+              <a:rPr lang="ko-KR" altLang="en-US" dirty="0"/>
+              <a:t> 시뮬레이션 단계</a:t>
+            </a:r>
           </a:p>
         </p:txBody>
       </p:sp>
@@ -3907,7 +4066,120 @@
           <a:bodyPr/>
           <a:lstStyle/>
           <a:p>
-            <a:endParaRPr lang="ko-KR" altLang="en-US"/>
+            <a:r>
+              <a:rPr lang="en-US" altLang="ko-KR" dirty="0"/>
+              <a:t>Schematic </a:t>
+            </a:r>
+            <a:r>
+              <a:rPr lang="ko-KR" altLang="en-US" dirty="0"/>
+              <a:t>기반으로 전원</a:t>
+            </a:r>
+            <a:r>
+              <a:rPr lang="en-US" altLang="ko-KR" dirty="0"/>
+              <a:t>, GND, </a:t>
+            </a:r>
+            <a:r>
+              <a:rPr lang="ko-KR" altLang="en-US" dirty="0" err="1"/>
+              <a:t>발진기를</a:t>
+            </a:r>
+            <a:r>
+              <a:rPr lang="ko-KR" altLang="en-US" dirty="0"/>
+              <a:t> 구동하고</a:t>
+            </a:r>
+            <a:r>
+              <a:rPr lang="en-US" altLang="ko-KR" dirty="0"/>
+              <a:t>, PRE/CLR/LCK </a:t>
+            </a:r>
+            <a:r>
+              <a:rPr lang="ko-KR" altLang="en-US" dirty="0"/>
+              <a:t>신호를 주입한다</a:t>
+            </a:r>
+            <a:r>
+              <a:rPr lang="en-US" altLang="ko-KR" dirty="0"/>
+              <a:t>.</a:t>
+            </a:r>
+          </a:p>
+          <a:p>
+            <a:r>
+              <a:rPr lang="en-US" altLang="ko-KR" dirty="0" err="1"/>
+              <a:t>Spectre</a:t>
+            </a:r>
+            <a:r>
+              <a:rPr lang="en-US" altLang="ko-KR" dirty="0"/>
+              <a:t>/</a:t>
+            </a:r>
+            <a:r>
+              <a:rPr lang="en-US" altLang="ko-KR" dirty="0" err="1"/>
+              <a:t>Hspice</a:t>
+            </a:r>
+            <a:r>
+              <a:rPr lang="en-US" altLang="ko-KR" dirty="0"/>
+              <a:t> </a:t>
+            </a:r>
+            <a:r>
+              <a:rPr lang="ko-KR" altLang="en-US" dirty="0"/>
+              <a:t>시뮬레이션에서 링 </a:t>
+            </a:r>
+            <a:r>
+              <a:rPr lang="ko-KR" altLang="en-US" dirty="0" err="1"/>
+              <a:t>오실레이터의</a:t>
+            </a:r>
+            <a:r>
+              <a:rPr lang="ko-KR" altLang="en-US" dirty="0"/>
+              <a:t> 주파수를 분석하고 카운터 결과 확인 및 정상 동작 여부를 검증한다</a:t>
+            </a:r>
+            <a:r>
+              <a:rPr lang="en-US" altLang="ko-KR" dirty="0"/>
+              <a:t>.</a:t>
+            </a:r>
+          </a:p>
+          <a:p>
+            <a:r>
+              <a:rPr lang="en-US" altLang="ko-KR" dirty="0"/>
+              <a:t>Full Adder + MUX </a:t>
+            </a:r>
+            <a:r>
+              <a:rPr lang="ko-KR" altLang="en-US" dirty="0"/>
+              <a:t>논리 테스트를 거친다</a:t>
+            </a:r>
+            <a:r>
+              <a:rPr lang="en-US" altLang="ko-KR" dirty="0"/>
+              <a:t>.</a:t>
+            </a:r>
+          </a:p>
+          <a:p>
+            <a:r>
+              <a:rPr lang="ko-KR" altLang="en-US" dirty="0"/>
+              <a:t>측정 결과가 나오면</a:t>
+            </a:r>
+            <a:r>
+              <a:rPr lang="en-US" altLang="ko-KR" dirty="0"/>
+              <a:t>, </a:t>
+            </a:r>
+            <a:r>
+              <a:rPr lang="ko-KR" altLang="en-US" dirty="0"/>
+              <a:t>타이밍</a:t>
+            </a:r>
+            <a:r>
+              <a:rPr lang="en-US" altLang="ko-KR" dirty="0"/>
+              <a:t>, </a:t>
+            </a:r>
+            <a:r>
+              <a:rPr lang="ko-KR" altLang="en-US" dirty="0"/>
+              <a:t>소비전력</a:t>
+            </a:r>
+            <a:r>
+              <a:rPr lang="en-US" altLang="ko-KR" dirty="0"/>
+              <a:t>,</a:t>
+            </a:r>
+            <a:r>
+              <a:rPr lang="ko-KR" altLang="en-US" dirty="0"/>
+              <a:t> 동작 안정성을 분석한다</a:t>
+            </a:r>
+            <a:r>
+              <a:rPr lang="en-US" altLang="ko-KR" dirty="0"/>
+              <a:t>.</a:t>
+            </a:r>
           </a:p>
         </p:txBody>
       </p:sp>

--- a/VLSI design 설계 실습/2025-06-13.pptx
+++ b/VLSI design 설계 실습/2025-06-13.pptx
@@ -6,16 +6,19 @@
   </p:sldMasterIdLst>
   <p:sldIdLst>
     <p:sldId id="256" r:id="rId2"/>
-    <p:sldId id="257" r:id="rId3"/>
-    <p:sldId id="263" r:id="rId4"/>
-    <p:sldId id="267" r:id="rId5"/>
-    <p:sldId id="266" r:id="rId6"/>
-    <p:sldId id="265" r:id="rId7"/>
-    <p:sldId id="258" r:id="rId8"/>
-    <p:sldId id="260" r:id="rId9"/>
-    <p:sldId id="261" r:id="rId10"/>
-    <p:sldId id="264" r:id="rId11"/>
-    <p:sldId id="259" r:id="rId12"/>
+    <p:sldId id="269" r:id="rId3"/>
+    <p:sldId id="268" r:id="rId4"/>
+    <p:sldId id="270" r:id="rId5"/>
+    <p:sldId id="271" r:id="rId6"/>
+    <p:sldId id="257" r:id="rId7"/>
+    <p:sldId id="263" r:id="rId8"/>
+    <p:sldId id="267" r:id="rId9"/>
+    <p:sldId id="265" r:id="rId10"/>
+    <p:sldId id="258" r:id="rId11"/>
+    <p:sldId id="260" r:id="rId12"/>
+    <p:sldId id="261" r:id="rId13"/>
+    <p:sldId id="264" r:id="rId14"/>
+    <p:sldId id="259" r:id="rId15"/>
   </p:sldIdLst>
   <p:sldSz cx="12192000" cy="6858000"/>
   <p:notesSz cx="6858000" cy="9144000"/>
@@ -251,7 +254,7 @@
           <a:p>
             <a:fld id="{088498B5-61CB-4D33-9D13-11B461C68DAA}" type="datetimeFigureOut">
               <a:rPr lang="ko-KR" altLang="en-US" smtClean="0"/>
-              <a:t>2025-06-18</a:t>
+              <a:t>2025-06-19</a:t>
             </a:fld>
             <a:endParaRPr lang="ko-KR" altLang="en-US"/>
           </a:p>
@@ -419,7 +422,7 @@
           <a:p>
             <a:fld id="{088498B5-61CB-4D33-9D13-11B461C68DAA}" type="datetimeFigureOut">
               <a:rPr lang="ko-KR" altLang="en-US" smtClean="0"/>
-              <a:t>2025-06-18</a:t>
+              <a:t>2025-06-19</a:t>
             </a:fld>
             <a:endParaRPr lang="ko-KR" altLang="en-US"/>
           </a:p>
@@ -597,7 +600,7 @@
           <a:p>
             <a:fld id="{088498B5-61CB-4D33-9D13-11B461C68DAA}" type="datetimeFigureOut">
               <a:rPr lang="ko-KR" altLang="en-US" smtClean="0"/>
-              <a:t>2025-06-18</a:t>
+              <a:t>2025-06-19</a:t>
             </a:fld>
             <a:endParaRPr lang="ko-KR" altLang="en-US"/>
           </a:p>
@@ -765,7 +768,7 @@
           <a:p>
             <a:fld id="{088498B5-61CB-4D33-9D13-11B461C68DAA}" type="datetimeFigureOut">
               <a:rPr lang="ko-KR" altLang="en-US" smtClean="0"/>
-              <a:t>2025-06-18</a:t>
+              <a:t>2025-06-19</a:t>
             </a:fld>
             <a:endParaRPr lang="ko-KR" altLang="en-US"/>
           </a:p>
@@ -1010,7 +1013,7 @@
           <a:p>
             <a:fld id="{088498B5-61CB-4D33-9D13-11B461C68DAA}" type="datetimeFigureOut">
               <a:rPr lang="ko-KR" altLang="en-US" smtClean="0"/>
-              <a:t>2025-06-18</a:t>
+              <a:t>2025-06-19</a:t>
             </a:fld>
             <a:endParaRPr lang="ko-KR" altLang="en-US"/>
           </a:p>
@@ -1239,7 +1242,7 @@
           <a:p>
             <a:fld id="{088498B5-61CB-4D33-9D13-11B461C68DAA}" type="datetimeFigureOut">
               <a:rPr lang="ko-KR" altLang="en-US" smtClean="0"/>
-              <a:t>2025-06-18</a:t>
+              <a:t>2025-06-19</a:t>
             </a:fld>
             <a:endParaRPr lang="ko-KR" altLang="en-US"/>
           </a:p>
@@ -1603,7 +1606,7 @@
           <a:p>
             <a:fld id="{088498B5-61CB-4D33-9D13-11B461C68DAA}" type="datetimeFigureOut">
               <a:rPr lang="ko-KR" altLang="en-US" smtClean="0"/>
-              <a:t>2025-06-18</a:t>
+              <a:t>2025-06-19</a:t>
             </a:fld>
             <a:endParaRPr lang="ko-KR" altLang="en-US"/>
           </a:p>
@@ -1720,7 +1723,7 @@
           <a:p>
             <a:fld id="{088498B5-61CB-4D33-9D13-11B461C68DAA}" type="datetimeFigureOut">
               <a:rPr lang="ko-KR" altLang="en-US" smtClean="0"/>
-              <a:t>2025-06-18</a:t>
+              <a:t>2025-06-19</a:t>
             </a:fld>
             <a:endParaRPr lang="ko-KR" altLang="en-US"/>
           </a:p>
@@ -1815,7 +1818,7 @@
           <a:p>
             <a:fld id="{088498B5-61CB-4D33-9D13-11B461C68DAA}" type="datetimeFigureOut">
               <a:rPr lang="ko-KR" altLang="en-US" smtClean="0"/>
-              <a:t>2025-06-18</a:t>
+              <a:t>2025-06-19</a:t>
             </a:fld>
             <a:endParaRPr lang="ko-KR" altLang="en-US"/>
           </a:p>
@@ -2090,7 +2093,7 @@
           <a:p>
             <a:fld id="{088498B5-61CB-4D33-9D13-11B461C68DAA}" type="datetimeFigureOut">
               <a:rPr lang="ko-KR" altLang="en-US" smtClean="0"/>
-              <a:t>2025-06-18</a:t>
+              <a:t>2025-06-19</a:t>
             </a:fld>
             <a:endParaRPr lang="ko-KR" altLang="en-US"/>
           </a:p>
@@ -2342,7 +2345,7 @@
           <a:p>
             <a:fld id="{088498B5-61CB-4D33-9D13-11B461C68DAA}" type="datetimeFigureOut">
               <a:rPr lang="ko-KR" altLang="en-US" smtClean="0"/>
-              <a:t>2025-06-18</a:t>
+              <a:t>2025-06-19</a:t>
             </a:fld>
             <a:endParaRPr lang="ko-KR" altLang="en-US"/>
           </a:p>
@@ -2571,7 +2574,7 @@
           <a:p>
             <a:fld id="{088498B5-61CB-4D33-9D13-11B461C68DAA}" type="datetimeFigureOut">
               <a:rPr lang="ko-KR" altLang="en-US" smtClean="0"/>
-              <a:t>2025-06-18</a:t>
+              <a:t>2025-06-19</a:t>
             </a:fld>
             <a:endParaRPr lang="ko-KR" altLang="en-US"/>
           </a:p>
@@ -3053,6 +3056,441 @@
       </p:grpSpPr>
       <p:sp>
         <p:nvSpPr>
+          <p:cNvPr id="2" name="제목 1"/>
+          <p:cNvSpPr>
+            <a:spLocks noGrp="1"/>
+          </p:cNvSpPr>
+          <p:nvPr>
+            <p:ph type="title"/>
+          </p:nvPr>
+        </p:nvSpPr>
+        <p:spPr/>
+        <p:txBody>
+          <a:bodyPr/>
+          <a:lstStyle/>
+          <a:p>
+            <a:r>
+              <a:rPr lang="en-US" altLang="ko-KR" dirty="0"/>
+              <a:t>6T SRAM </a:t>
+            </a:r>
+            <a:r>
+              <a:rPr lang="ko-KR" altLang="en-US" dirty="0"/>
+              <a:t>메모리 셀 레이아웃</a:t>
+            </a:r>
+          </a:p>
+        </p:txBody>
+      </p:sp>
+      <p:pic>
+        <p:nvPicPr>
+          <p:cNvPr id="4" name="내용 개체 틀 3"/>
+          <p:cNvPicPr>
+            <a:picLocks noGrp="1" noChangeAspect="1"/>
+          </p:cNvPicPr>
+          <p:nvPr>
+            <p:ph idx="1"/>
+          </p:nvPr>
+        </p:nvPicPr>
+        <p:blipFill>
+          <a:blip r:embed="rId2"/>
+          <a:stretch>
+            <a:fillRect/>
+          </a:stretch>
+        </p:blipFill>
+        <p:spPr>
+          <a:xfrm>
+            <a:off x="838200" y="1967807"/>
+            <a:ext cx="10607566" cy="4351338"/>
+          </a:xfrm>
+          <a:prstGeom prst="rect">
+            <a:avLst/>
+          </a:prstGeom>
+        </p:spPr>
+      </p:pic>
+    </p:spTree>
+    <p:extLst>
+      <p:ext uri="{BB962C8B-B14F-4D97-AF65-F5344CB8AC3E}">
+        <p14:creationId xmlns:p14="http://schemas.microsoft.com/office/powerpoint/2010/main" val="2420465811"/>
+      </p:ext>
+    </p:extLst>
+  </p:cSld>
+  <p:clrMapOvr>
+    <a:masterClrMapping/>
+  </p:clrMapOvr>
+</p:sld>
+</file>
+
+<file path=ppt/slides/slide11.xml><?xml version="1.0" encoding="utf-8"?>
+<p:sld xmlns:a="http://schemas.openxmlformats.org/drawingml/2006/main" xmlns:r="http://schemas.openxmlformats.org/officeDocument/2006/relationships" xmlns:p="http://schemas.openxmlformats.org/presentationml/2006/main">
+  <p:cSld>
+    <p:spTree>
+      <p:nvGrpSpPr>
+        <p:cNvPr id="1" name=""/>
+        <p:cNvGrpSpPr/>
+        <p:nvPr/>
+      </p:nvGrpSpPr>
+      <p:grpSpPr>
+        <a:xfrm>
+          <a:off x="0" y="0"/>
+          <a:ext cx="0" cy="0"/>
+          <a:chOff x="0" y="0"/>
+          <a:chExt cx="0" cy="0"/>
+        </a:xfrm>
+      </p:grpSpPr>
+      <p:sp>
+        <p:nvSpPr>
+          <p:cNvPr id="2" name="제목 1"/>
+          <p:cNvSpPr>
+            <a:spLocks noGrp="1"/>
+          </p:cNvSpPr>
+          <p:nvPr>
+            <p:ph type="title"/>
+          </p:nvPr>
+        </p:nvSpPr>
+        <p:spPr/>
+        <p:txBody>
+          <a:bodyPr/>
+          <a:lstStyle/>
+          <a:p>
+            <a:r>
+              <a:rPr lang="en-US" altLang="ko-KR" dirty="0"/>
+              <a:t>6T SRAM Schematic</a:t>
+            </a:r>
+            <a:r>
+              <a:rPr lang="ko-KR" altLang="en-US" dirty="0"/>
+              <a:t> 설계</a:t>
+            </a:r>
+          </a:p>
+        </p:txBody>
+      </p:sp>
+      <p:sp>
+        <p:nvSpPr>
+          <p:cNvPr id="3" name="내용 개체 틀 2"/>
+          <p:cNvSpPr>
+            <a:spLocks noGrp="1"/>
+          </p:cNvSpPr>
+          <p:nvPr>
+            <p:ph idx="1"/>
+          </p:nvPr>
+        </p:nvSpPr>
+        <p:spPr/>
+        <p:txBody>
+          <a:bodyPr/>
+          <a:lstStyle/>
+          <a:p>
+            <a:r>
+              <a:rPr lang="en-US" altLang="ko-KR" dirty="0" err="1"/>
+              <a:t>Analoglib</a:t>
+            </a:r>
+            <a:r>
+              <a:rPr lang="en-US" altLang="ko-KR" dirty="0"/>
+              <a:t> </a:t>
+            </a:r>
+            <a:r>
+              <a:rPr lang="ko-KR" altLang="en-US" dirty="0"/>
+              <a:t>기단에서 </a:t>
+            </a:r>
+            <a:r>
+              <a:rPr lang="en-US" altLang="ko-KR" dirty="0"/>
+              <a:t>PMOS, NMOS, </a:t>
+            </a:r>
+            <a:r>
+              <a:rPr lang="ko-KR" altLang="en-US" dirty="0"/>
+              <a:t>전원 핀</a:t>
+            </a:r>
+            <a:r>
+              <a:rPr lang="en-US" altLang="ko-KR" dirty="0"/>
+              <a:t>, word-line, bit-line </a:t>
+            </a:r>
+            <a:r>
+              <a:rPr lang="ko-KR" altLang="en-US" dirty="0"/>
+              <a:t>소자를 배치한다</a:t>
+            </a:r>
+            <a:r>
+              <a:rPr lang="en-US" altLang="ko-KR" dirty="0"/>
+              <a:t>.</a:t>
+            </a:r>
+          </a:p>
+          <a:p>
+            <a:r>
+              <a:rPr lang="en-US" altLang="ko-KR" dirty="0"/>
+              <a:t>6</a:t>
+            </a:r>
+            <a:r>
+              <a:rPr lang="ko-KR" altLang="en-US" dirty="0"/>
+              <a:t>개의 트랜지스터</a:t>
+            </a:r>
+            <a:r>
+              <a:rPr lang="en-US" altLang="ko-KR" dirty="0"/>
+              <a:t>(P1, P2, N1, N2, M5, M6)</a:t>
+            </a:r>
+            <a:r>
+              <a:rPr lang="ko-KR" altLang="en-US" dirty="0"/>
+              <a:t>를 교차 연결한다</a:t>
+            </a:r>
+            <a:r>
+              <a:rPr lang="en-US" altLang="ko-KR" dirty="0"/>
+              <a:t>.</a:t>
+            </a:r>
+          </a:p>
+          <a:p>
+            <a:r>
+              <a:rPr lang="ko-KR" altLang="en-US" dirty="0"/>
+              <a:t>초기 충전용 </a:t>
+            </a:r>
+            <a:r>
+              <a:rPr lang="en-US" altLang="ko-KR" dirty="0"/>
+              <a:t>PMOS,</a:t>
+            </a:r>
+            <a:r>
+              <a:rPr lang="ko-KR" altLang="en-US" dirty="0"/>
+              <a:t> 센스 앰프용 소자를 추가한다</a:t>
+            </a:r>
+            <a:r>
+              <a:rPr lang="en-US" altLang="ko-KR" dirty="0"/>
+              <a:t>.</a:t>
+            </a:r>
+          </a:p>
+          <a:p>
+            <a:r>
+              <a:rPr lang="ko-KR" altLang="en-US" dirty="0"/>
+              <a:t>핀을 부착하고 네트 이름을 지정한다</a:t>
+            </a:r>
+            <a:r>
+              <a:rPr lang="en-US" altLang="ko-KR" dirty="0"/>
+              <a:t>.</a:t>
+            </a:r>
+          </a:p>
+        </p:txBody>
+      </p:sp>
+    </p:spTree>
+    <p:extLst>
+      <p:ext uri="{BB962C8B-B14F-4D97-AF65-F5344CB8AC3E}">
+        <p14:creationId xmlns:p14="http://schemas.microsoft.com/office/powerpoint/2010/main" val="2862500190"/>
+      </p:ext>
+    </p:extLst>
+  </p:cSld>
+  <p:clrMapOvr>
+    <a:masterClrMapping/>
+  </p:clrMapOvr>
+</p:sld>
+</file>
+
+<file path=ppt/slides/slide12.xml><?xml version="1.0" encoding="utf-8"?>
+<p:sld xmlns:a="http://schemas.openxmlformats.org/drawingml/2006/main" xmlns:r="http://schemas.openxmlformats.org/officeDocument/2006/relationships" xmlns:p="http://schemas.openxmlformats.org/presentationml/2006/main">
+  <p:cSld>
+    <p:spTree>
+      <p:nvGrpSpPr>
+        <p:cNvPr id="1" name=""/>
+        <p:cNvGrpSpPr/>
+        <p:nvPr/>
+      </p:nvGrpSpPr>
+      <p:grpSpPr>
+        <a:xfrm>
+          <a:off x="0" y="0"/>
+          <a:ext cx="0" cy="0"/>
+          <a:chOff x="0" y="0"/>
+          <a:chExt cx="0" cy="0"/>
+        </a:xfrm>
+      </p:grpSpPr>
+      <p:sp>
+        <p:nvSpPr>
+          <p:cNvPr id="2" name="제목 1"/>
+          <p:cNvSpPr>
+            <a:spLocks noGrp="1"/>
+          </p:cNvSpPr>
+          <p:nvPr>
+            <p:ph type="title"/>
+          </p:nvPr>
+        </p:nvSpPr>
+        <p:spPr/>
+        <p:txBody>
+          <a:bodyPr/>
+          <a:lstStyle/>
+          <a:p>
+            <a:r>
+              <a:rPr lang="en-US" altLang="ko-KR" dirty="0"/>
+              <a:t>6T SRAM </a:t>
+            </a:r>
+            <a:r>
+              <a:rPr lang="ko-KR" altLang="en-US" dirty="0"/>
+              <a:t>레이아웃 생성과정</a:t>
+            </a:r>
+          </a:p>
+        </p:txBody>
+      </p:sp>
+      <p:sp>
+        <p:nvSpPr>
+          <p:cNvPr id="3" name="내용 개체 틀 2"/>
+          <p:cNvSpPr>
+            <a:spLocks noGrp="1"/>
+          </p:cNvSpPr>
+          <p:nvPr>
+            <p:ph idx="1"/>
+          </p:nvPr>
+        </p:nvSpPr>
+        <p:spPr/>
+        <p:txBody>
+          <a:bodyPr/>
+          <a:lstStyle/>
+          <a:p>
+            <a:r>
+              <a:rPr lang="en-US" altLang="ko-KR" dirty="0"/>
+              <a:t>Schematic</a:t>
+            </a:r>
+            <a:r>
+              <a:rPr lang="ko-KR" altLang="en-US" dirty="0"/>
+              <a:t>에 기반한 서브블록을 생성한다</a:t>
+            </a:r>
+            <a:r>
+              <a:rPr lang="en-US" altLang="ko-KR" dirty="0"/>
+              <a:t>.</a:t>
+            </a:r>
+          </a:p>
+          <a:p>
+            <a:r>
+              <a:rPr lang="en-US" altLang="ko-KR" dirty="0"/>
+              <a:t>SRAM </a:t>
+            </a:r>
+            <a:r>
+              <a:rPr lang="ko-KR" altLang="en-US" dirty="0"/>
+              <a:t>셀을 포함한 각각의 </a:t>
+            </a:r>
+            <a:r>
+              <a:rPr lang="en-US" altLang="ko-KR" dirty="0"/>
+              <a:t>Symbol</a:t>
+            </a:r>
+            <a:r>
+              <a:rPr lang="ko-KR" altLang="en-US" dirty="0"/>
+              <a:t>을 생성한다</a:t>
+            </a:r>
+            <a:r>
+              <a:rPr lang="en-US" altLang="ko-KR" dirty="0"/>
+              <a:t>.</a:t>
+            </a:r>
+          </a:p>
+          <a:p>
+            <a:r>
+              <a:rPr lang="ko-KR" altLang="en-US" dirty="0"/>
+              <a:t>새로운 </a:t>
+            </a:r>
+            <a:r>
+              <a:rPr lang="en-US" altLang="ko-KR" dirty="0" err="1"/>
+              <a:t>cellview</a:t>
+            </a:r>
+            <a:r>
+              <a:rPr lang="ko-KR" altLang="en-US" dirty="0"/>
+              <a:t>로 </a:t>
+            </a:r>
+            <a:r>
+              <a:rPr lang="en-US" altLang="ko-KR" dirty="0"/>
+              <a:t>layout</a:t>
+            </a:r>
+            <a:r>
+              <a:rPr lang="ko-KR" altLang="en-US" dirty="0"/>
+              <a:t>을 생성한다</a:t>
+            </a:r>
+            <a:r>
+              <a:rPr lang="en-US" altLang="ko-KR" dirty="0"/>
+              <a:t>.</a:t>
+            </a:r>
+          </a:p>
+          <a:p>
+            <a:r>
+              <a:rPr lang="ko-KR" altLang="en-US" dirty="0"/>
+              <a:t>트랜지스터를 구현하는데</a:t>
+            </a:r>
+            <a:r>
+              <a:rPr lang="en-US" altLang="ko-KR" dirty="0"/>
+              <a:t>, </a:t>
+            </a:r>
+            <a:r>
+              <a:rPr lang="ko-KR" altLang="en-US" dirty="0"/>
+              <a:t>여기서 </a:t>
+            </a:r>
+            <a:r>
+              <a:rPr lang="en-US" altLang="ko-KR" dirty="0" err="1"/>
+              <a:t>pmos</a:t>
+            </a:r>
+            <a:r>
+              <a:rPr lang="en-US" altLang="ko-KR" dirty="0"/>
+              <a:t> </a:t>
+            </a:r>
+            <a:r>
+              <a:rPr lang="ko-KR" altLang="en-US" dirty="0"/>
+              <a:t>영역은 </a:t>
+            </a:r>
+            <a:r>
+              <a:rPr lang="en-US" altLang="ko-KR" dirty="0"/>
+              <a:t>n-well</a:t>
+            </a:r>
+            <a:r>
+              <a:rPr lang="ko-KR" altLang="en-US" dirty="0"/>
+              <a:t>을 포함해야 한다</a:t>
+            </a:r>
+            <a:r>
+              <a:rPr lang="en-US" altLang="ko-KR" dirty="0"/>
+              <a:t>.</a:t>
+            </a:r>
+          </a:p>
+          <a:p>
+            <a:r>
+              <a:rPr lang="ko-KR" altLang="en-US" dirty="0"/>
+              <a:t>핀 레이어를 통해 신호를 연결한다</a:t>
+            </a:r>
+            <a:r>
+              <a:rPr lang="en-US" altLang="ko-KR" dirty="0"/>
+              <a:t>.</a:t>
+            </a:r>
+          </a:p>
+          <a:p>
+            <a:r>
+              <a:rPr lang="en-US" altLang="ko-KR" dirty="0"/>
+              <a:t>DRC </a:t>
+            </a:r>
+            <a:r>
+              <a:rPr lang="ko-KR" altLang="en-US" dirty="0"/>
+              <a:t>검사 후 오류를 수정한다</a:t>
+            </a:r>
+            <a:r>
+              <a:rPr lang="en-US" altLang="ko-KR" dirty="0"/>
+              <a:t>.</a:t>
+            </a:r>
+            <a:endParaRPr lang="ko-KR" altLang="en-US" dirty="0"/>
+          </a:p>
+        </p:txBody>
+      </p:sp>
+    </p:spTree>
+    <p:extLst>
+      <p:ext uri="{BB962C8B-B14F-4D97-AF65-F5344CB8AC3E}">
+        <p14:creationId xmlns:p14="http://schemas.microsoft.com/office/powerpoint/2010/main" val="1719335813"/>
+      </p:ext>
+    </p:extLst>
+  </p:cSld>
+  <p:clrMapOvr>
+    <a:masterClrMapping/>
+  </p:clrMapOvr>
+</p:sld>
+</file>
+
+<file path=ppt/slides/slide13.xml><?xml version="1.0" encoding="utf-8"?>
+<p:sld xmlns:a="http://schemas.openxmlformats.org/drawingml/2006/main" xmlns:r="http://schemas.openxmlformats.org/officeDocument/2006/relationships" xmlns:p="http://schemas.openxmlformats.org/presentationml/2006/main">
+  <p:cSld>
+    <p:spTree>
+      <p:nvGrpSpPr>
+        <p:cNvPr id="1" name=""/>
+        <p:cNvGrpSpPr/>
+        <p:nvPr/>
+      </p:nvGrpSpPr>
+      <p:grpSpPr>
+        <a:xfrm>
+          <a:off x="0" y="0"/>
+          <a:ext cx="0" cy="0"/>
+          <a:chOff x="0" y="0"/>
+          <a:chExt cx="0" cy="0"/>
+        </a:xfrm>
+      </p:grpSpPr>
+      <p:sp>
+        <p:nvSpPr>
           <p:cNvPr id="2" name="제목 1">
             <a:extLst>
               <a:ext uri="{FF2B5EF4-FFF2-40B4-BE49-F238E27FC236}">
@@ -3230,7 +3668,7 @@
 </p:sld>
 </file>
 
-<file path=ppt/slides/slide11.xml><?xml version="1.0" encoding="utf-8"?>
+<file path=ppt/slides/slide14.xml><?xml version="1.0" encoding="utf-8"?>
 <p:sld xmlns:a="http://schemas.openxmlformats.org/drawingml/2006/main" xmlns:r="http://schemas.openxmlformats.org/officeDocument/2006/relationships" xmlns:p="http://schemas.openxmlformats.org/presentationml/2006/main">
   <p:cSld>
     <p:spTree>
@@ -3338,6 +3776,334 @@
           <a:lstStyle/>
           <a:p>
             <a:r>
+              <a:rPr lang="en-US" altLang="ko-KR" dirty="0" smtClean="0"/>
+              <a:t>T_FF Schematic</a:t>
+            </a:r>
+            <a:endParaRPr lang="ko-KR" altLang="en-US" dirty="0"/>
+          </a:p>
+        </p:txBody>
+      </p:sp>
+      <p:pic>
+        <p:nvPicPr>
+          <p:cNvPr id="4" name="내용 개체 틀 3"/>
+          <p:cNvPicPr>
+            <a:picLocks noGrp="1" noChangeAspect="1"/>
+          </p:cNvPicPr>
+          <p:nvPr>
+            <p:ph idx="1"/>
+          </p:nvPr>
+        </p:nvPicPr>
+        <p:blipFill>
+          <a:blip r:embed="rId2"/>
+          <a:stretch>
+            <a:fillRect/>
+          </a:stretch>
+        </p:blipFill>
+        <p:spPr>
+          <a:xfrm>
+            <a:off x="838200" y="1841124"/>
+            <a:ext cx="10515600" cy="4351338"/>
+          </a:xfrm>
+          <a:prstGeom prst="rect">
+            <a:avLst/>
+          </a:prstGeom>
+        </p:spPr>
+      </p:pic>
+    </p:spTree>
+    <p:extLst>
+      <p:ext uri="{BB962C8B-B14F-4D97-AF65-F5344CB8AC3E}">
+        <p14:creationId xmlns:p14="http://schemas.microsoft.com/office/powerpoint/2010/main" val="1561662423"/>
+      </p:ext>
+    </p:extLst>
+  </p:cSld>
+  <p:clrMapOvr>
+    <a:masterClrMapping/>
+  </p:clrMapOvr>
+</p:sld>
+</file>
+
+<file path=ppt/slides/slide3.xml><?xml version="1.0" encoding="utf-8"?>
+<p:sld xmlns:a="http://schemas.openxmlformats.org/drawingml/2006/main" xmlns:r="http://schemas.openxmlformats.org/officeDocument/2006/relationships" xmlns:p="http://schemas.openxmlformats.org/presentationml/2006/main">
+  <p:cSld>
+    <p:spTree>
+      <p:nvGrpSpPr>
+        <p:cNvPr id="1" name=""/>
+        <p:cNvGrpSpPr/>
+        <p:nvPr/>
+      </p:nvGrpSpPr>
+      <p:grpSpPr>
+        <a:xfrm>
+          <a:off x="0" y="0"/>
+          <a:ext cx="0" cy="0"/>
+          <a:chOff x="0" y="0"/>
+          <a:chExt cx="0" cy="0"/>
+        </a:xfrm>
+      </p:grpSpPr>
+      <p:sp>
+        <p:nvSpPr>
+          <p:cNvPr id="2" name="제목 1"/>
+          <p:cNvSpPr>
+            <a:spLocks noGrp="1"/>
+          </p:cNvSpPr>
+          <p:nvPr>
+            <p:ph type="title"/>
+          </p:nvPr>
+        </p:nvSpPr>
+        <p:spPr/>
+        <p:txBody>
+          <a:bodyPr/>
+          <a:lstStyle/>
+          <a:p>
+            <a:r>
+              <a:rPr lang="en-US" altLang="ko-KR" dirty="0" smtClean="0"/>
+              <a:t>T_FF </a:t>
+            </a:r>
+            <a:r>
+              <a:rPr lang="ko-KR" altLang="en-US" dirty="0" smtClean="0"/>
+              <a:t>레이아웃</a:t>
+            </a:r>
+            <a:endParaRPr lang="ko-KR" altLang="en-US" dirty="0"/>
+          </a:p>
+        </p:txBody>
+      </p:sp>
+      <p:pic>
+        <p:nvPicPr>
+          <p:cNvPr id="4" name="내용 개체 틀 3"/>
+          <p:cNvPicPr>
+            <a:picLocks noGrp="1" noChangeAspect="1"/>
+          </p:cNvPicPr>
+          <p:nvPr>
+            <p:ph idx="1"/>
+          </p:nvPr>
+        </p:nvPicPr>
+        <p:blipFill>
+          <a:blip r:embed="rId2"/>
+          <a:stretch>
+            <a:fillRect/>
+          </a:stretch>
+        </p:blipFill>
+        <p:spPr>
+          <a:xfrm>
+            <a:off x="838200" y="1841123"/>
+            <a:ext cx="10515600" cy="4351338"/>
+          </a:xfrm>
+          <a:prstGeom prst="rect">
+            <a:avLst/>
+          </a:prstGeom>
+        </p:spPr>
+      </p:pic>
+    </p:spTree>
+    <p:extLst>
+      <p:ext uri="{BB962C8B-B14F-4D97-AF65-F5344CB8AC3E}">
+        <p14:creationId xmlns:p14="http://schemas.microsoft.com/office/powerpoint/2010/main" val="2445746067"/>
+      </p:ext>
+    </p:extLst>
+  </p:cSld>
+  <p:clrMapOvr>
+    <a:masterClrMapping/>
+  </p:clrMapOvr>
+</p:sld>
+</file>
+
+<file path=ppt/slides/slide4.xml><?xml version="1.0" encoding="utf-8"?>
+<p:sld xmlns:a="http://schemas.openxmlformats.org/drawingml/2006/main" xmlns:r="http://schemas.openxmlformats.org/officeDocument/2006/relationships" xmlns:p="http://schemas.openxmlformats.org/presentationml/2006/main">
+  <p:cSld>
+    <p:spTree>
+      <p:nvGrpSpPr>
+        <p:cNvPr id="1" name=""/>
+        <p:cNvGrpSpPr/>
+        <p:nvPr/>
+      </p:nvGrpSpPr>
+      <p:grpSpPr>
+        <a:xfrm>
+          <a:off x="0" y="0"/>
+          <a:ext cx="0" cy="0"/>
+          <a:chOff x="0" y="0"/>
+          <a:chExt cx="0" cy="0"/>
+        </a:xfrm>
+      </p:grpSpPr>
+      <p:sp>
+        <p:nvSpPr>
+          <p:cNvPr id="2" name="제목 1"/>
+          <p:cNvSpPr>
+            <a:spLocks noGrp="1"/>
+          </p:cNvSpPr>
+          <p:nvPr>
+            <p:ph type="title"/>
+          </p:nvPr>
+        </p:nvSpPr>
+        <p:spPr/>
+        <p:txBody>
+          <a:bodyPr/>
+          <a:lstStyle/>
+          <a:p>
+            <a:r>
+              <a:rPr lang="en-US" altLang="ko-KR" dirty="0"/>
+              <a:t>T_FF </a:t>
+            </a:r>
+            <a:r>
+              <a:rPr lang="ko-KR" altLang="en-US" dirty="0" smtClean="0"/>
+              <a:t>그래프</a:t>
+            </a:r>
+            <a:endParaRPr lang="ko-KR" altLang="en-US" dirty="0"/>
+          </a:p>
+        </p:txBody>
+      </p:sp>
+      <p:pic>
+        <p:nvPicPr>
+          <p:cNvPr id="4" name="내용 개체 틀 3"/>
+          <p:cNvPicPr>
+            <a:picLocks noGrp="1" noChangeAspect="1"/>
+          </p:cNvPicPr>
+          <p:nvPr>
+            <p:ph idx="1"/>
+          </p:nvPr>
+        </p:nvPicPr>
+        <p:blipFill>
+          <a:blip r:embed="rId2"/>
+          <a:stretch>
+            <a:fillRect/>
+          </a:stretch>
+        </p:blipFill>
+        <p:spPr>
+          <a:xfrm>
+            <a:off x="838200" y="1825625"/>
+            <a:ext cx="10515600" cy="4351338"/>
+          </a:xfrm>
+          <a:prstGeom prst="rect">
+            <a:avLst/>
+          </a:prstGeom>
+        </p:spPr>
+      </p:pic>
+    </p:spTree>
+    <p:extLst>
+      <p:ext uri="{BB962C8B-B14F-4D97-AF65-F5344CB8AC3E}">
+        <p14:creationId xmlns:p14="http://schemas.microsoft.com/office/powerpoint/2010/main" val="713704506"/>
+      </p:ext>
+    </p:extLst>
+  </p:cSld>
+  <p:clrMapOvr>
+    <a:masterClrMapping/>
+  </p:clrMapOvr>
+</p:sld>
+</file>
+
+<file path=ppt/slides/slide5.xml><?xml version="1.0" encoding="utf-8"?>
+<p:sld xmlns:a="http://schemas.openxmlformats.org/drawingml/2006/main" xmlns:r="http://schemas.openxmlformats.org/officeDocument/2006/relationships" xmlns:p="http://schemas.openxmlformats.org/presentationml/2006/main">
+  <p:cSld>
+    <p:spTree>
+      <p:nvGrpSpPr>
+        <p:cNvPr id="1" name=""/>
+        <p:cNvGrpSpPr/>
+        <p:nvPr/>
+      </p:nvGrpSpPr>
+      <p:grpSpPr>
+        <a:xfrm>
+          <a:off x="0" y="0"/>
+          <a:ext cx="0" cy="0"/>
+          <a:chOff x="0" y="0"/>
+          <a:chExt cx="0" cy="0"/>
+        </a:xfrm>
+      </p:grpSpPr>
+      <p:sp>
+        <p:nvSpPr>
+          <p:cNvPr id="2" name="제목 1"/>
+          <p:cNvSpPr>
+            <a:spLocks noGrp="1"/>
+          </p:cNvSpPr>
+          <p:nvPr>
+            <p:ph type="title"/>
+          </p:nvPr>
+        </p:nvSpPr>
+        <p:spPr/>
+        <p:txBody>
+          <a:bodyPr/>
+          <a:lstStyle/>
+          <a:p>
+            <a:r>
+              <a:rPr lang="en-US" altLang="ko-KR" dirty="0" smtClean="0"/>
+              <a:t>T_FF </a:t>
+            </a:r>
+            <a:r>
+              <a:rPr lang="ko-KR" altLang="en-US" dirty="0" smtClean="0"/>
+              <a:t>그래프</a:t>
+            </a:r>
+            <a:endParaRPr lang="ko-KR" altLang="en-US" dirty="0"/>
+          </a:p>
+        </p:txBody>
+      </p:sp>
+      <p:pic>
+        <p:nvPicPr>
+          <p:cNvPr id="5" name="내용 개체 틀 4"/>
+          <p:cNvPicPr>
+            <a:picLocks noGrp="1" noChangeAspect="1"/>
+          </p:cNvPicPr>
+          <p:nvPr>
+            <p:ph idx="1"/>
+          </p:nvPr>
+        </p:nvPicPr>
+        <p:blipFill>
+          <a:blip r:embed="rId2"/>
+          <a:stretch>
+            <a:fillRect/>
+          </a:stretch>
+        </p:blipFill>
+        <p:spPr>
+          <a:xfrm>
+            <a:off x="838200" y="1690688"/>
+            <a:ext cx="10515600" cy="4351338"/>
+          </a:xfrm>
+          <a:prstGeom prst="rect">
+            <a:avLst/>
+          </a:prstGeom>
+        </p:spPr>
+      </p:pic>
+    </p:spTree>
+    <p:extLst>
+      <p:ext uri="{BB962C8B-B14F-4D97-AF65-F5344CB8AC3E}">
+        <p14:creationId xmlns:p14="http://schemas.microsoft.com/office/powerpoint/2010/main" val="1079217682"/>
+      </p:ext>
+    </p:extLst>
+  </p:cSld>
+  <p:clrMapOvr>
+    <a:masterClrMapping/>
+  </p:clrMapOvr>
+</p:sld>
+</file>
+
+<file path=ppt/slides/slide6.xml><?xml version="1.0" encoding="utf-8"?>
+<p:sld xmlns:a="http://schemas.openxmlformats.org/drawingml/2006/main" xmlns:r="http://schemas.openxmlformats.org/officeDocument/2006/relationships" xmlns:p="http://schemas.openxmlformats.org/presentationml/2006/main">
+  <p:cSld>
+    <p:spTree>
+      <p:nvGrpSpPr>
+        <p:cNvPr id="1" name=""/>
+        <p:cNvGrpSpPr/>
+        <p:nvPr/>
+      </p:nvGrpSpPr>
+      <p:grpSpPr>
+        <a:xfrm>
+          <a:off x="0" y="0"/>
+          <a:ext cx="0" cy="0"/>
+          <a:chOff x="0" y="0"/>
+          <a:chExt cx="0" cy="0"/>
+        </a:xfrm>
+      </p:grpSpPr>
+      <p:sp>
+        <p:nvSpPr>
+          <p:cNvPr id="2" name="제목 1"/>
+          <p:cNvSpPr>
+            <a:spLocks noGrp="1"/>
+          </p:cNvSpPr>
+          <p:nvPr>
+            <p:ph type="title"/>
+          </p:nvPr>
+        </p:nvSpPr>
+        <p:spPr/>
+        <p:txBody>
+          <a:bodyPr/>
+          <a:lstStyle/>
+          <a:p>
+            <a:r>
               <a:rPr lang="ko-KR" altLang="en-US" dirty="0"/>
               <a:t>디지털 </a:t>
             </a:r>
@@ -3391,811 +4157,6 @@
 </p:sld>
 </file>
 
-<file path=ppt/slides/slide3.xml><?xml version="1.0" encoding="utf-8"?>
-<p:sld xmlns:a="http://schemas.openxmlformats.org/drawingml/2006/main" xmlns:r="http://schemas.openxmlformats.org/officeDocument/2006/relationships" xmlns:p="http://schemas.openxmlformats.org/presentationml/2006/main">
-  <p:cSld>
-    <p:spTree>
-      <p:nvGrpSpPr>
-        <p:cNvPr id="1" name=""/>
-        <p:cNvGrpSpPr/>
-        <p:nvPr/>
-      </p:nvGrpSpPr>
-      <p:grpSpPr>
-        <a:xfrm>
-          <a:off x="0" y="0"/>
-          <a:ext cx="0" cy="0"/>
-          <a:chOff x="0" y="0"/>
-          <a:chExt cx="0" cy="0"/>
-        </a:xfrm>
-      </p:grpSpPr>
-      <p:sp>
-        <p:nvSpPr>
-          <p:cNvPr id="2" name="제목 1">
-            <a:extLst>
-              <a:ext uri="{FF2B5EF4-FFF2-40B4-BE49-F238E27FC236}">
-                <a16:creationId xmlns:a16="http://schemas.microsoft.com/office/drawing/2014/main" id="{0EE89004-4F2A-B8AC-A1D3-A45A29CB7D66}"/>
-              </a:ext>
-            </a:extLst>
-          </p:cNvPr>
-          <p:cNvSpPr>
-            <a:spLocks noGrp="1"/>
-          </p:cNvSpPr>
-          <p:nvPr>
-            <p:ph type="title"/>
-          </p:nvPr>
-        </p:nvSpPr>
-        <p:spPr/>
-        <p:txBody>
-          <a:bodyPr/>
-          <a:lstStyle/>
-          <a:p>
-            <a:r>
-              <a:rPr lang="ko-KR" altLang="en-US" dirty="0"/>
-              <a:t>디지털 </a:t>
-            </a:r>
-            <a:r>
-              <a:rPr lang="ko-KR" altLang="en-US" dirty="0" err="1"/>
-              <a:t>테스트벤치</a:t>
-            </a:r>
-            <a:r>
-              <a:rPr lang="ko-KR" altLang="en-US" dirty="0"/>
-              <a:t> 구조</a:t>
-            </a:r>
-          </a:p>
-        </p:txBody>
-      </p:sp>
-      <p:sp>
-        <p:nvSpPr>
-          <p:cNvPr id="3" name="내용 개체 틀 2">
-            <a:extLst>
-              <a:ext uri="{FF2B5EF4-FFF2-40B4-BE49-F238E27FC236}">
-                <a16:creationId xmlns:a16="http://schemas.microsoft.com/office/drawing/2014/main" id="{39F1ADE9-9E8A-4C04-9696-49C358CFDCF8}"/>
-              </a:ext>
-            </a:extLst>
-          </p:cNvPr>
-          <p:cNvSpPr>
-            <a:spLocks noGrp="1"/>
-          </p:cNvSpPr>
-          <p:nvPr>
-            <p:ph idx="1"/>
-          </p:nvPr>
-        </p:nvSpPr>
-        <p:spPr/>
-        <p:txBody>
-          <a:bodyPr>
-            <a:normAutofit/>
-          </a:bodyPr>
-          <a:lstStyle/>
-          <a:p>
-            <a:r>
-              <a:rPr lang="ko-KR" altLang="en-US" sz="2200" dirty="0"/>
-              <a:t>링 </a:t>
-            </a:r>
-            <a:r>
-              <a:rPr lang="ko-KR" altLang="en-US" sz="2200" dirty="0" err="1"/>
-              <a:t>오실레이터</a:t>
-            </a:r>
-            <a:r>
-              <a:rPr lang="en-US" altLang="ko-KR" sz="2200" dirty="0"/>
-              <a:t>: </a:t>
-            </a:r>
-            <a:r>
-              <a:rPr lang="ko-KR" altLang="en-US" sz="2200" dirty="0"/>
-              <a:t>ＣＭＯＳ 버퍼나 인버터로 구성되며， 테스트 또는 지연 소스로 사용된다．</a:t>
-            </a:r>
-            <a:endParaRPr lang="en-US" altLang="ko-KR" sz="2200" dirty="0"/>
-          </a:p>
-          <a:p>
-            <a:r>
-              <a:rPr lang="en-US" altLang="ko-KR" sz="2200" dirty="0"/>
-              <a:t>6_cnt_6</a:t>
-            </a:r>
-            <a:r>
-              <a:rPr lang="ko-KR" altLang="en-US" sz="2200" dirty="0"/>
-              <a:t>：</a:t>
-            </a:r>
-            <a:r>
-              <a:rPr lang="en-US" altLang="ko-KR" sz="2200" dirty="0"/>
-              <a:t>PLL </a:t>
-            </a:r>
-            <a:r>
-              <a:rPr lang="ko-KR" altLang="en-US" sz="2200" dirty="0"/>
-              <a:t>테스트</a:t>
-            </a:r>
-            <a:r>
-              <a:rPr lang="en-US" altLang="ko-KR" sz="2200" dirty="0"/>
-              <a:t>, </a:t>
-            </a:r>
-            <a:r>
-              <a:rPr lang="ko-KR" altLang="en-US" sz="2200" dirty="0"/>
-              <a:t>타이밍 분석</a:t>
-            </a:r>
-            <a:r>
-              <a:rPr lang="en-US" altLang="ko-KR" sz="2200" dirty="0"/>
-              <a:t>, </a:t>
-            </a:r>
-            <a:r>
-              <a:rPr lang="ko-KR" altLang="en-US" sz="2200" dirty="0"/>
-              <a:t>주파수 분할</a:t>
-            </a:r>
-            <a:r>
-              <a:rPr lang="en-US" altLang="ko-KR" sz="2200" dirty="0"/>
-              <a:t>, </a:t>
-            </a:r>
-            <a:r>
-              <a:rPr lang="ko-KR" altLang="en-US" sz="2200" dirty="0"/>
-              <a:t>고속 </a:t>
-            </a:r>
-            <a:r>
-              <a:rPr lang="ko-KR" altLang="en-US" sz="2200" dirty="0" err="1"/>
-              <a:t>카운팅</a:t>
-            </a:r>
-            <a:r>
-              <a:rPr lang="ko-KR" altLang="en-US" sz="2200" dirty="0"/>
-              <a:t> 등에 활용된다</a:t>
-            </a:r>
-            <a:r>
-              <a:rPr lang="en-US" altLang="ko-KR" sz="2200" dirty="0"/>
-              <a:t>.</a:t>
-            </a:r>
-          </a:p>
-          <a:p>
-            <a:r>
-              <a:rPr lang="en-US" altLang="ko-KR" sz="2200" dirty="0"/>
-              <a:t>2:1 </a:t>
-            </a:r>
-            <a:r>
-              <a:rPr lang="ko-KR" altLang="en-US" sz="2200" dirty="0" err="1"/>
-              <a:t>멀티플렉서</a:t>
-            </a:r>
-            <a:r>
-              <a:rPr lang="ko-KR" altLang="en-US" sz="2200" dirty="0"/>
-              <a:t>： 두 개의 입력 신호 중 하나를 선택하여 하나의 출력으로 보내는 디지털 스위치 역할을 한다</a:t>
-            </a:r>
-            <a:r>
-              <a:rPr lang="en-US" altLang="ko-KR" sz="2200" dirty="0"/>
-              <a:t>.</a:t>
-            </a:r>
-            <a:endParaRPr lang="ko-KR" altLang="en-US" sz="2200" dirty="0"/>
-          </a:p>
-          <a:p>
-            <a:r>
-              <a:rPr lang="en-US" altLang="ko-KR" sz="2200" dirty="0"/>
-              <a:t>ALU </a:t>
-            </a:r>
-            <a:r>
-              <a:rPr lang="ko-KR" altLang="en-US" sz="2200" dirty="0"/>
-              <a:t>블록</a:t>
-            </a:r>
-            <a:r>
-              <a:rPr lang="en-US" altLang="ko-KR" sz="2200" dirty="0"/>
-              <a:t>: </a:t>
-            </a:r>
-            <a:r>
-              <a:rPr lang="ko-KR" altLang="en-US" sz="2200" dirty="0" err="1"/>
-              <a:t>산술연산</a:t>
-            </a:r>
-            <a:r>
-              <a:rPr lang="en-US" altLang="ko-KR" sz="2200" dirty="0"/>
-              <a:t>, </a:t>
-            </a:r>
-            <a:r>
-              <a:rPr lang="ko-KR" altLang="en-US" sz="2200" dirty="0"/>
-              <a:t>논리연산을 수행한다． 상태 플래그를 출력하고</a:t>
-            </a:r>
-            <a:r>
-              <a:rPr lang="en-US" altLang="ko-KR" sz="2200" dirty="0"/>
-              <a:t>, CPU</a:t>
-            </a:r>
-            <a:r>
-              <a:rPr lang="ko-KR" altLang="en-US" sz="2200" dirty="0"/>
-              <a:t>의 핵심 구성 블록을 담당한다</a:t>
-            </a:r>
-            <a:r>
-              <a:rPr lang="en-US" altLang="ko-KR" sz="2200" dirty="0"/>
-              <a:t>.</a:t>
-            </a:r>
-          </a:p>
-          <a:p>
-            <a:r>
-              <a:rPr lang="ko-KR" altLang="en-US" sz="2200" dirty="0"/>
-              <a:t>측정용 더미 블록</a:t>
-            </a:r>
-            <a:r>
-              <a:rPr lang="en-US" altLang="ko-KR" sz="2200" dirty="0"/>
-              <a:t>: </a:t>
-            </a:r>
-            <a:r>
-              <a:rPr lang="ko-KR" altLang="en-US" sz="2200" dirty="0"/>
-              <a:t>공정 중 레이아웃 밀도 균일화</a:t>
-            </a:r>
-            <a:r>
-              <a:rPr lang="en-US" altLang="ko-KR" sz="2200" dirty="0"/>
-              <a:t>, </a:t>
-            </a:r>
-            <a:r>
-              <a:rPr lang="ko-KR" altLang="en-US" sz="2200" dirty="0"/>
-              <a:t>메모리의 </a:t>
-            </a:r>
-            <a:r>
-              <a:rPr lang="ko-KR" altLang="en-US" sz="2200" dirty="0" err="1"/>
-              <a:t>기준값</a:t>
-            </a:r>
-            <a:r>
-              <a:rPr lang="ko-KR" altLang="en-US" sz="2200" dirty="0"/>
-              <a:t> 제공</a:t>
-            </a:r>
-            <a:r>
-              <a:rPr lang="en-US" altLang="ko-KR" sz="2200" dirty="0"/>
-              <a:t>, </a:t>
-            </a:r>
-            <a:r>
-              <a:rPr lang="ko-KR" altLang="en-US" sz="2200" dirty="0"/>
-              <a:t>전기적 안정화를 통한 기생 용량 변화 최소화</a:t>
-            </a:r>
-            <a:r>
-              <a:rPr lang="en-US" altLang="ko-KR" sz="2200" dirty="0"/>
-              <a:t>, </a:t>
-            </a:r>
-            <a:r>
-              <a:rPr lang="ko-KR" altLang="en-US" sz="2200" dirty="0"/>
-              <a:t>회로 특성 예측 정확도 향상의 역할을 담당한다</a:t>
-            </a:r>
-            <a:r>
-              <a:rPr lang="en-US" altLang="ko-KR" sz="2200" dirty="0"/>
-              <a:t>.</a:t>
-            </a:r>
-            <a:endParaRPr lang="ko-KR" altLang="en-US" sz="2200" dirty="0"/>
-          </a:p>
-        </p:txBody>
-      </p:sp>
-    </p:spTree>
-    <p:extLst>
-      <p:ext uri="{BB962C8B-B14F-4D97-AF65-F5344CB8AC3E}">
-        <p14:creationId xmlns:p14="http://schemas.microsoft.com/office/powerpoint/2010/main" val="2513305449"/>
-      </p:ext>
-    </p:extLst>
-  </p:cSld>
-  <p:clrMapOvr>
-    <a:masterClrMapping/>
-  </p:clrMapOvr>
-</p:sld>
-</file>
-
-<file path=ppt/slides/slide4.xml><?xml version="1.0" encoding="utf-8"?>
-<p:sld xmlns:a="http://schemas.openxmlformats.org/drawingml/2006/main" xmlns:r="http://schemas.openxmlformats.org/officeDocument/2006/relationships" xmlns:p="http://schemas.openxmlformats.org/presentationml/2006/main">
-  <p:cSld>
-    <p:spTree>
-      <p:nvGrpSpPr>
-        <p:cNvPr id="1" name=""/>
-        <p:cNvGrpSpPr/>
-        <p:nvPr/>
-      </p:nvGrpSpPr>
-      <p:grpSpPr>
-        <a:xfrm>
-          <a:off x="0" y="0"/>
-          <a:ext cx="0" cy="0"/>
-          <a:chOff x="0" y="0"/>
-          <a:chExt cx="0" cy="0"/>
-        </a:xfrm>
-      </p:grpSpPr>
-      <p:sp>
-        <p:nvSpPr>
-          <p:cNvPr id="2" name="제목 1">
-            <a:extLst>
-              <a:ext uri="{FF2B5EF4-FFF2-40B4-BE49-F238E27FC236}">
-                <a16:creationId xmlns:a16="http://schemas.microsoft.com/office/drawing/2014/main" id="{CAFD3FCF-13B5-2893-1B7A-C0D15A4CB900}"/>
-              </a:ext>
-            </a:extLst>
-          </p:cNvPr>
-          <p:cNvSpPr>
-            <a:spLocks noGrp="1"/>
-          </p:cNvSpPr>
-          <p:nvPr>
-            <p:ph type="title"/>
-          </p:nvPr>
-        </p:nvSpPr>
-        <p:spPr/>
-        <p:txBody>
-          <a:bodyPr>
-            <a:normAutofit/>
-          </a:bodyPr>
-          <a:lstStyle/>
-          <a:p>
-            <a:r>
-              <a:rPr lang="ko-KR" altLang="en-US" sz="4000" dirty="0"/>
-              <a:t>디지털 </a:t>
-            </a:r>
-            <a:r>
-              <a:rPr lang="ko-KR" altLang="en-US" sz="4000" dirty="0" err="1"/>
-              <a:t>테스트벤치</a:t>
-            </a:r>
-            <a:r>
-              <a:rPr lang="ko-KR" altLang="en-US" sz="4000" dirty="0"/>
-              <a:t> </a:t>
-            </a:r>
-            <a:r>
-              <a:rPr lang="en-US" altLang="ko-KR" sz="4000" dirty="0"/>
-              <a:t>Schematic, </a:t>
-            </a:r>
-            <a:r>
-              <a:rPr lang="ko-KR" altLang="en-US" sz="4000" dirty="0"/>
-              <a:t>레이아웃 설계</a:t>
-            </a:r>
-          </a:p>
-        </p:txBody>
-      </p:sp>
-      <p:sp>
-        <p:nvSpPr>
-          <p:cNvPr id="3" name="내용 개체 틀 2">
-            <a:extLst>
-              <a:ext uri="{FF2B5EF4-FFF2-40B4-BE49-F238E27FC236}">
-                <a16:creationId xmlns:a16="http://schemas.microsoft.com/office/drawing/2014/main" id="{464D2D25-BCB8-6A42-6384-870839513A25}"/>
-              </a:ext>
-            </a:extLst>
-          </p:cNvPr>
-          <p:cNvSpPr>
-            <a:spLocks noGrp="1"/>
-          </p:cNvSpPr>
-          <p:nvPr>
-            <p:ph idx="1"/>
-          </p:nvPr>
-        </p:nvSpPr>
-        <p:spPr/>
-        <p:txBody>
-          <a:bodyPr/>
-          <a:lstStyle/>
-          <a:p>
-            <a:r>
-              <a:rPr lang="ko-KR" altLang="en-US" dirty="0"/>
-              <a:t>링 </a:t>
-            </a:r>
-            <a:r>
-              <a:rPr lang="ko-KR" altLang="en-US" dirty="0" err="1"/>
-              <a:t>오실레이터</a:t>
-            </a:r>
-            <a:r>
-              <a:rPr lang="en-US" altLang="ko-KR" dirty="0"/>
-              <a:t>: </a:t>
-            </a:r>
-            <a:r>
-              <a:rPr lang="ko-KR" altLang="en-US" dirty="0"/>
-              <a:t>버퍼</a:t>
-            </a:r>
-            <a:r>
-              <a:rPr lang="en-US" altLang="ko-KR" dirty="0"/>
-              <a:t>/</a:t>
-            </a:r>
-            <a:r>
-              <a:rPr lang="ko-KR" altLang="en-US" dirty="0"/>
-              <a:t>인버터 </a:t>
-            </a:r>
-            <a:r>
-              <a:rPr lang="en-US" altLang="ko-KR" dirty="0"/>
-              <a:t>3~5</a:t>
-            </a:r>
-            <a:r>
-              <a:rPr lang="ko-KR" altLang="en-US" dirty="0"/>
-              <a:t>개 연결 루프 설계</a:t>
-            </a:r>
-            <a:endParaRPr lang="en-US" altLang="ko-KR" dirty="0"/>
-          </a:p>
-          <a:p>
-            <a:r>
-              <a:rPr lang="en-US" altLang="ko-KR" dirty="0"/>
-              <a:t>6_CNT_C: </a:t>
-            </a:r>
-            <a:r>
-              <a:rPr lang="ko-KR" altLang="en-US" dirty="0"/>
-              <a:t>플립플롭 기반 </a:t>
-            </a:r>
-            <a:r>
-              <a:rPr lang="en-US" altLang="ko-KR" dirty="0"/>
-              <a:t>3~6</a:t>
-            </a:r>
-            <a:r>
-              <a:rPr lang="ko-KR" altLang="en-US" dirty="0"/>
-              <a:t> 비트 카운터</a:t>
-            </a:r>
-            <a:endParaRPr lang="en-US" altLang="ko-KR" dirty="0"/>
-          </a:p>
-          <a:p>
-            <a:r>
-              <a:rPr lang="ko-KR" altLang="en-US" dirty="0"/>
-              <a:t>각 블록에 핀 부여한 다음</a:t>
-            </a:r>
-            <a:r>
-              <a:rPr lang="en-US" altLang="ko-KR" dirty="0"/>
-              <a:t>, </a:t>
-            </a:r>
-            <a:r>
-              <a:rPr lang="ko-KR" altLang="en-US" dirty="0"/>
-              <a:t>상위 </a:t>
-            </a:r>
-            <a:r>
-              <a:rPr lang="en-US" altLang="ko-KR" dirty="0"/>
-              <a:t>Schematic</a:t>
-            </a:r>
-            <a:r>
-              <a:rPr lang="ko-KR" altLang="en-US" dirty="0"/>
-              <a:t>에서 서브블록들을 심볼로 연결한다</a:t>
-            </a:r>
-            <a:r>
-              <a:rPr lang="en-US" altLang="ko-KR" dirty="0"/>
-              <a:t>.</a:t>
-            </a:r>
-          </a:p>
-          <a:p>
-            <a:r>
-              <a:rPr lang="ko-KR" altLang="en-US" dirty="0"/>
-              <a:t>레이아웃 에디터에서 트랜지스터 구현</a:t>
-            </a:r>
-            <a:r>
-              <a:rPr lang="en-US" altLang="ko-KR" dirty="0"/>
-              <a:t>, </a:t>
-            </a:r>
-            <a:r>
-              <a:rPr lang="ko-KR" altLang="en-US" dirty="0"/>
-              <a:t>메탈 레이어 연결</a:t>
-            </a:r>
-            <a:r>
-              <a:rPr lang="en-US" altLang="ko-KR" dirty="0"/>
-              <a:t> </a:t>
-            </a:r>
-            <a:r>
-              <a:rPr lang="ko-KR" altLang="en-US" dirty="0"/>
-              <a:t>및</a:t>
-            </a:r>
-            <a:r>
-              <a:rPr lang="en-US" altLang="ko-KR" dirty="0"/>
-              <a:t> </a:t>
-            </a:r>
-            <a:r>
-              <a:rPr lang="ko-KR" altLang="en-US" dirty="0"/>
-              <a:t>핀 이름 부여</a:t>
-            </a:r>
-            <a:r>
-              <a:rPr lang="en-US" altLang="ko-KR" dirty="0"/>
-              <a:t>, DRC </a:t>
-            </a:r>
-            <a:r>
-              <a:rPr lang="ko-KR" altLang="en-US" dirty="0"/>
-              <a:t>수행 과정을 거친다</a:t>
-            </a:r>
-            <a:r>
-              <a:rPr lang="en-US" altLang="ko-KR" dirty="0"/>
-              <a:t>.</a:t>
-            </a:r>
-          </a:p>
-          <a:p>
-            <a:r>
-              <a:rPr lang="ko-KR" altLang="en-US" dirty="0"/>
-              <a:t>레이아웃에서 추출</a:t>
-            </a:r>
-            <a:r>
-              <a:rPr lang="en-US" altLang="ko-KR" dirty="0"/>
-              <a:t>, LVS </a:t>
-            </a:r>
-            <a:r>
-              <a:rPr lang="ko-KR" altLang="en-US" dirty="0"/>
-              <a:t>검증 과정을 실행한다</a:t>
-            </a:r>
-            <a:r>
-              <a:rPr lang="en-US" altLang="ko-KR"/>
-              <a:t>.</a:t>
-            </a:r>
-            <a:endParaRPr lang="ko-KR" altLang="en-US" dirty="0"/>
-          </a:p>
-        </p:txBody>
-      </p:sp>
-    </p:spTree>
-    <p:extLst>
-      <p:ext uri="{BB962C8B-B14F-4D97-AF65-F5344CB8AC3E}">
-        <p14:creationId xmlns:p14="http://schemas.microsoft.com/office/powerpoint/2010/main" val="4112507996"/>
-      </p:ext>
-    </p:extLst>
-  </p:cSld>
-  <p:clrMapOvr>
-    <a:masterClrMapping/>
-  </p:clrMapOvr>
-</p:sld>
-</file>
-
-<file path=ppt/slides/slide5.xml><?xml version="1.0" encoding="utf-8"?>
-<p:sld xmlns:a="http://schemas.openxmlformats.org/drawingml/2006/main" xmlns:r="http://schemas.openxmlformats.org/officeDocument/2006/relationships" xmlns:p="http://schemas.openxmlformats.org/presentationml/2006/main">
-  <p:cSld>
-    <p:spTree>
-      <p:nvGrpSpPr>
-        <p:cNvPr id="1" name=""/>
-        <p:cNvGrpSpPr/>
-        <p:nvPr/>
-      </p:nvGrpSpPr>
-      <p:grpSpPr>
-        <a:xfrm>
-          <a:off x="0" y="0"/>
-          <a:ext cx="0" cy="0"/>
-          <a:chOff x="0" y="0"/>
-          <a:chExt cx="0" cy="0"/>
-        </a:xfrm>
-      </p:grpSpPr>
-      <p:sp>
-        <p:nvSpPr>
-          <p:cNvPr id="2" name="제목 1">
-            <a:extLst>
-              <a:ext uri="{FF2B5EF4-FFF2-40B4-BE49-F238E27FC236}">
-                <a16:creationId xmlns:a16="http://schemas.microsoft.com/office/drawing/2014/main" id="{CCECD2BA-830A-6C90-C17B-E347CB48A6CB}"/>
-              </a:ext>
-            </a:extLst>
-          </p:cNvPr>
-          <p:cNvSpPr>
-            <a:spLocks noGrp="1"/>
-          </p:cNvSpPr>
-          <p:nvPr>
-            <p:ph type="title"/>
-          </p:nvPr>
-        </p:nvSpPr>
-        <p:spPr/>
-        <p:txBody>
-          <a:bodyPr/>
-          <a:lstStyle/>
-          <a:p>
-            <a:r>
-              <a:rPr lang="ko-KR" altLang="en-US" dirty="0"/>
-              <a:t>디지털 </a:t>
-            </a:r>
-            <a:r>
-              <a:rPr lang="ko-KR" altLang="en-US" dirty="0" err="1"/>
-              <a:t>테스트벤치</a:t>
-            </a:r>
-            <a:r>
-              <a:rPr lang="ko-KR" altLang="en-US" dirty="0"/>
-              <a:t> 레이아웃 단계</a:t>
-            </a:r>
-          </a:p>
-        </p:txBody>
-      </p:sp>
-      <p:sp>
-        <p:nvSpPr>
-          <p:cNvPr id="3" name="내용 개체 틀 2">
-            <a:extLst>
-              <a:ext uri="{FF2B5EF4-FFF2-40B4-BE49-F238E27FC236}">
-                <a16:creationId xmlns:a16="http://schemas.microsoft.com/office/drawing/2014/main" id="{DA95D773-687F-A457-641D-06098AA7A34A}"/>
-              </a:ext>
-            </a:extLst>
-          </p:cNvPr>
-          <p:cNvSpPr>
-            <a:spLocks noGrp="1"/>
-          </p:cNvSpPr>
-          <p:nvPr>
-            <p:ph idx="1"/>
-          </p:nvPr>
-        </p:nvSpPr>
-        <p:spPr/>
-        <p:txBody>
-          <a:bodyPr/>
-          <a:lstStyle/>
-          <a:p>
-            <a:endParaRPr lang="ko-KR" altLang="en-US"/>
-          </a:p>
-        </p:txBody>
-      </p:sp>
-    </p:spTree>
-    <p:extLst>
-      <p:ext uri="{BB962C8B-B14F-4D97-AF65-F5344CB8AC3E}">
-        <p14:creationId xmlns:p14="http://schemas.microsoft.com/office/powerpoint/2010/main" val="857959110"/>
-      </p:ext>
-    </p:extLst>
-  </p:cSld>
-  <p:clrMapOvr>
-    <a:masterClrMapping/>
-  </p:clrMapOvr>
-</p:sld>
-</file>
-
-<file path=ppt/slides/slide6.xml><?xml version="1.0" encoding="utf-8"?>
-<p:sld xmlns:a="http://schemas.openxmlformats.org/drawingml/2006/main" xmlns:r="http://schemas.openxmlformats.org/officeDocument/2006/relationships" xmlns:p="http://schemas.openxmlformats.org/presentationml/2006/main">
-  <p:cSld>
-    <p:spTree>
-      <p:nvGrpSpPr>
-        <p:cNvPr id="1" name=""/>
-        <p:cNvGrpSpPr/>
-        <p:nvPr/>
-      </p:nvGrpSpPr>
-      <p:grpSpPr>
-        <a:xfrm>
-          <a:off x="0" y="0"/>
-          <a:ext cx="0" cy="0"/>
-          <a:chOff x="0" y="0"/>
-          <a:chExt cx="0" cy="0"/>
-        </a:xfrm>
-      </p:grpSpPr>
-      <p:sp>
-        <p:nvSpPr>
-          <p:cNvPr id="2" name="제목 1">
-            <a:extLst>
-              <a:ext uri="{FF2B5EF4-FFF2-40B4-BE49-F238E27FC236}">
-                <a16:creationId xmlns:a16="http://schemas.microsoft.com/office/drawing/2014/main" id="{8FE62AE9-4285-B5CB-5B4F-DC232C063ED1}"/>
-              </a:ext>
-            </a:extLst>
-          </p:cNvPr>
-          <p:cNvSpPr>
-            <a:spLocks noGrp="1"/>
-          </p:cNvSpPr>
-          <p:nvPr>
-            <p:ph type="title"/>
-          </p:nvPr>
-        </p:nvSpPr>
-        <p:spPr/>
-        <p:txBody>
-          <a:bodyPr/>
-          <a:lstStyle/>
-          <a:p>
-            <a:r>
-              <a:rPr lang="ko-KR" altLang="en-US" dirty="0"/>
-              <a:t>디지털 </a:t>
-            </a:r>
-            <a:r>
-              <a:rPr lang="ko-KR" altLang="en-US" dirty="0" err="1"/>
-              <a:t>테스트벤치</a:t>
-            </a:r>
-            <a:r>
-              <a:rPr lang="ko-KR" altLang="en-US" dirty="0"/>
-              <a:t> 시뮬레이션 단계</a:t>
-            </a:r>
-          </a:p>
-        </p:txBody>
-      </p:sp>
-      <p:sp>
-        <p:nvSpPr>
-          <p:cNvPr id="3" name="내용 개체 틀 2">
-            <a:extLst>
-              <a:ext uri="{FF2B5EF4-FFF2-40B4-BE49-F238E27FC236}">
-                <a16:creationId xmlns:a16="http://schemas.microsoft.com/office/drawing/2014/main" id="{6511CAA7-6EF9-4380-8C03-C1C1132A6438}"/>
-              </a:ext>
-            </a:extLst>
-          </p:cNvPr>
-          <p:cNvSpPr>
-            <a:spLocks noGrp="1"/>
-          </p:cNvSpPr>
-          <p:nvPr>
-            <p:ph idx="1"/>
-          </p:nvPr>
-        </p:nvSpPr>
-        <p:spPr/>
-        <p:txBody>
-          <a:bodyPr/>
-          <a:lstStyle/>
-          <a:p>
-            <a:r>
-              <a:rPr lang="en-US" altLang="ko-KR" dirty="0"/>
-              <a:t>Schematic </a:t>
-            </a:r>
-            <a:r>
-              <a:rPr lang="ko-KR" altLang="en-US" dirty="0"/>
-              <a:t>기반으로 전원</a:t>
-            </a:r>
-            <a:r>
-              <a:rPr lang="en-US" altLang="ko-KR" dirty="0"/>
-              <a:t>, GND, </a:t>
-            </a:r>
-            <a:r>
-              <a:rPr lang="ko-KR" altLang="en-US" dirty="0" err="1"/>
-              <a:t>발진기를</a:t>
-            </a:r>
-            <a:r>
-              <a:rPr lang="ko-KR" altLang="en-US" dirty="0"/>
-              <a:t> 구동하고</a:t>
-            </a:r>
-            <a:r>
-              <a:rPr lang="en-US" altLang="ko-KR" dirty="0"/>
-              <a:t>, PRE/CLR/LCK </a:t>
-            </a:r>
-            <a:r>
-              <a:rPr lang="ko-KR" altLang="en-US" dirty="0"/>
-              <a:t>신호를 주입한다</a:t>
-            </a:r>
-            <a:r>
-              <a:rPr lang="en-US" altLang="ko-KR" dirty="0"/>
-              <a:t>.</a:t>
-            </a:r>
-          </a:p>
-          <a:p>
-            <a:r>
-              <a:rPr lang="en-US" altLang="ko-KR" dirty="0" err="1"/>
-              <a:t>Spectre</a:t>
-            </a:r>
-            <a:r>
-              <a:rPr lang="en-US" altLang="ko-KR" dirty="0"/>
-              <a:t>/</a:t>
-            </a:r>
-            <a:r>
-              <a:rPr lang="en-US" altLang="ko-KR" dirty="0" err="1"/>
-              <a:t>Hspice</a:t>
-            </a:r>
-            <a:r>
-              <a:rPr lang="en-US" altLang="ko-KR" dirty="0"/>
-              <a:t> </a:t>
-            </a:r>
-            <a:r>
-              <a:rPr lang="ko-KR" altLang="en-US" dirty="0"/>
-              <a:t>시뮬레이션에서 링 </a:t>
-            </a:r>
-            <a:r>
-              <a:rPr lang="ko-KR" altLang="en-US" dirty="0" err="1"/>
-              <a:t>오실레이터의</a:t>
-            </a:r>
-            <a:r>
-              <a:rPr lang="ko-KR" altLang="en-US" dirty="0"/>
-              <a:t> 주파수를 분석하고 카운터 결과 확인 및 정상 동작 여부를 검증한다</a:t>
-            </a:r>
-            <a:r>
-              <a:rPr lang="en-US" altLang="ko-KR" dirty="0"/>
-              <a:t>.</a:t>
-            </a:r>
-          </a:p>
-          <a:p>
-            <a:r>
-              <a:rPr lang="en-US" altLang="ko-KR" dirty="0"/>
-              <a:t>Full Adder + MUX </a:t>
-            </a:r>
-            <a:r>
-              <a:rPr lang="ko-KR" altLang="en-US" dirty="0"/>
-              <a:t>논리 테스트를 거친다</a:t>
-            </a:r>
-            <a:r>
-              <a:rPr lang="en-US" altLang="ko-KR" dirty="0"/>
-              <a:t>.</a:t>
-            </a:r>
-          </a:p>
-          <a:p>
-            <a:r>
-              <a:rPr lang="ko-KR" altLang="en-US" dirty="0"/>
-              <a:t>측정 결과가 나오면</a:t>
-            </a:r>
-            <a:r>
-              <a:rPr lang="en-US" altLang="ko-KR" dirty="0"/>
-              <a:t>, </a:t>
-            </a:r>
-            <a:r>
-              <a:rPr lang="ko-KR" altLang="en-US" dirty="0"/>
-              <a:t>타이밍</a:t>
-            </a:r>
-            <a:r>
-              <a:rPr lang="en-US" altLang="ko-KR" dirty="0"/>
-              <a:t>, </a:t>
-            </a:r>
-            <a:r>
-              <a:rPr lang="ko-KR" altLang="en-US" dirty="0"/>
-              <a:t>소비전력</a:t>
-            </a:r>
-            <a:r>
-              <a:rPr lang="en-US" altLang="ko-KR" dirty="0"/>
-              <a:t>,</a:t>
-            </a:r>
-            <a:r>
-              <a:rPr lang="ko-KR" altLang="en-US" dirty="0"/>
-              <a:t> 동작 안정성을 분석한다</a:t>
-            </a:r>
-            <a:r>
-              <a:rPr lang="en-US" altLang="ko-KR" dirty="0"/>
-              <a:t>.</a:t>
-            </a:r>
-          </a:p>
-        </p:txBody>
-      </p:sp>
-    </p:spTree>
-    <p:extLst>
-      <p:ext uri="{BB962C8B-B14F-4D97-AF65-F5344CB8AC3E}">
-        <p14:creationId xmlns:p14="http://schemas.microsoft.com/office/powerpoint/2010/main" val="2034143713"/>
-      </p:ext>
-    </p:extLst>
-  </p:cSld>
-  <p:clrMapOvr>
-    <a:masterClrMapping/>
-  </p:clrMapOvr>
-</p:sld>
-</file>
-
 <file path=ppt/slides/slide7.xml><?xml version="1.0" encoding="utf-8"?>
 <p:sld xmlns:a="http://schemas.openxmlformats.org/drawingml/2006/main" xmlns:r="http://schemas.openxmlformats.org/officeDocument/2006/relationships" xmlns:p="http://schemas.openxmlformats.org/presentationml/2006/main">
   <p:cSld>
@@ -4215,7 +4176,13 @@
       </p:grpSpPr>
       <p:sp>
         <p:nvSpPr>
-          <p:cNvPr id="2" name="제목 1"/>
+          <p:cNvPr id="2" name="제목 1">
+            <a:extLst>
+              <a:ext uri="{FF2B5EF4-FFF2-40B4-BE49-F238E27FC236}">
+                <a16:creationId xmlns:a16="http://schemas.microsoft.com/office/drawing/2014/main" id="{0EE89004-4F2A-B8AC-A1D3-A45A29CB7D66}"/>
+              </a:ext>
+            </a:extLst>
+          </p:cNvPr>
           <p:cNvSpPr>
             <a:spLocks noGrp="1"/>
           </p:cNvSpPr>
@@ -4229,46 +4196,229 @@
           <a:lstStyle/>
           <a:p>
             <a:r>
-              <a:rPr lang="en-US" altLang="ko-KR" dirty="0"/>
-              <a:t>6T SRAM </a:t>
-            </a:r>
-            <a:r>
-              <a:rPr lang="ko-KR" altLang="en-US" dirty="0"/>
-              <a:t>메모리 셀 레이아웃</a:t>
-            </a:r>
-          </a:p>
-        </p:txBody>
-      </p:sp>
-      <p:pic>
-        <p:nvPicPr>
-          <p:cNvPr id="4" name="내용 개체 틀 3"/>
-          <p:cNvPicPr>
-            <a:picLocks noGrp="1" noChangeAspect="1"/>
-          </p:cNvPicPr>
+              <a:rPr lang="ko-KR" altLang="en-US" dirty="0"/>
+              <a:t>디지털 </a:t>
+            </a:r>
+            <a:r>
+              <a:rPr lang="ko-KR" altLang="en-US" dirty="0" err="1"/>
+              <a:t>테스트벤치</a:t>
+            </a:r>
+            <a:r>
+              <a:rPr lang="ko-KR" altLang="en-US" dirty="0"/>
+              <a:t> 구조</a:t>
+            </a:r>
+          </a:p>
+        </p:txBody>
+      </p:sp>
+      <p:sp>
+        <p:nvSpPr>
+          <p:cNvPr id="3" name="내용 개체 틀 2">
+            <a:extLst>
+              <a:ext uri="{FF2B5EF4-FFF2-40B4-BE49-F238E27FC236}">
+                <a16:creationId xmlns:a16="http://schemas.microsoft.com/office/drawing/2014/main" id="{39F1ADE9-9E8A-4C04-9696-49C358CFDCF8}"/>
+              </a:ext>
+            </a:extLst>
+          </p:cNvPr>
+          <p:cNvSpPr>
+            <a:spLocks noGrp="1"/>
+          </p:cNvSpPr>
           <p:nvPr>
             <p:ph idx="1"/>
           </p:nvPr>
-        </p:nvPicPr>
-        <p:blipFill>
-          <a:blip r:embed="rId2"/>
-          <a:stretch>
-            <a:fillRect/>
-          </a:stretch>
-        </p:blipFill>
-        <p:spPr>
-          <a:xfrm>
-            <a:off x="838200" y="1967807"/>
-            <a:ext cx="10607566" cy="4351338"/>
-          </a:xfrm>
-          <a:prstGeom prst="rect">
-            <a:avLst/>
-          </a:prstGeom>
-        </p:spPr>
-      </p:pic>
+        </p:nvSpPr>
+        <p:spPr/>
+        <p:txBody>
+          <a:bodyPr>
+            <a:normAutofit/>
+          </a:bodyPr>
+          <a:lstStyle/>
+          <a:p>
+            <a:r>
+              <a:rPr lang="ko-KR" altLang="en-US" sz="2200" dirty="0"/>
+              <a:t>링 </a:t>
+            </a:r>
+            <a:r>
+              <a:rPr lang="ko-KR" altLang="en-US" sz="2200" dirty="0" err="1"/>
+              <a:t>오실레이터</a:t>
+            </a:r>
+            <a:r>
+              <a:rPr lang="en-US" altLang="ko-KR" sz="2200" dirty="0"/>
+              <a:t>: </a:t>
+            </a:r>
+            <a:r>
+              <a:rPr lang="ko-KR" altLang="en-US" sz="2200" dirty="0"/>
+              <a:t>ＣＭＯＳ 버퍼나 인버터로 구성되며， 테스트 또는 지연 소스로 사용된다．</a:t>
+            </a:r>
+            <a:endParaRPr lang="en-US" altLang="ko-KR" sz="2200" dirty="0"/>
+          </a:p>
+          <a:p>
+            <a:r>
+              <a:rPr lang="en-US" altLang="ko-KR" sz="2200" dirty="0"/>
+              <a:t>6_cnt_6</a:t>
+            </a:r>
+            <a:r>
+              <a:rPr lang="ko-KR" altLang="en-US" sz="2200" dirty="0"/>
+              <a:t>：</a:t>
+            </a:r>
+            <a:r>
+              <a:rPr lang="en-US" altLang="ko-KR" sz="2200" dirty="0"/>
+              <a:t>PLL </a:t>
+            </a:r>
+            <a:r>
+              <a:rPr lang="ko-KR" altLang="en-US" sz="2200" dirty="0"/>
+              <a:t>테스트</a:t>
+            </a:r>
+            <a:r>
+              <a:rPr lang="en-US" altLang="ko-KR" sz="2200" dirty="0"/>
+              <a:t>, </a:t>
+            </a:r>
+            <a:r>
+              <a:rPr lang="ko-KR" altLang="en-US" sz="2200" dirty="0"/>
+              <a:t>타이밍 분석</a:t>
+            </a:r>
+            <a:r>
+              <a:rPr lang="en-US" altLang="ko-KR" sz="2200" dirty="0"/>
+              <a:t>, </a:t>
+            </a:r>
+            <a:r>
+              <a:rPr lang="ko-KR" altLang="en-US" sz="2200" dirty="0"/>
+              <a:t>주파수 분할</a:t>
+            </a:r>
+            <a:r>
+              <a:rPr lang="en-US" altLang="ko-KR" sz="2200" dirty="0"/>
+              <a:t>, </a:t>
+            </a:r>
+            <a:r>
+              <a:rPr lang="ko-KR" altLang="en-US" sz="2200" dirty="0"/>
+              <a:t>고속 </a:t>
+            </a:r>
+            <a:r>
+              <a:rPr lang="ko-KR" altLang="en-US" sz="2200" dirty="0" err="1"/>
+              <a:t>카운팅</a:t>
+            </a:r>
+            <a:r>
+              <a:rPr lang="ko-KR" altLang="en-US" sz="2200" dirty="0"/>
+              <a:t> 등에 활용된다</a:t>
+            </a:r>
+            <a:r>
+              <a:rPr lang="en-US" altLang="ko-KR" sz="2200" dirty="0"/>
+              <a:t>.</a:t>
+            </a:r>
+          </a:p>
+          <a:p>
+            <a:r>
+              <a:rPr lang="en-US" altLang="ko-KR" sz="2200" dirty="0"/>
+              <a:t>2:1 </a:t>
+            </a:r>
+            <a:r>
+              <a:rPr lang="ko-KR" altLang="en-US" sz="2200" dirty="0" err="1"/>
+              <a:t>멀티플렉서</a:t>
+            </a:r>
+            <a:r>
+              <a:rPr lang="ko-KR" altLang="en-US" sz="2200" dirty="0"/>
+              <a:t>： 두 개의 입력 신호 중 하나를 선택하여 하나의 출력으로 보내는 디지털 스위치 역할을 한다</a:t>
+            </a:r>
+            <a:r>
+              <a:rPr lang="en-US" altLang="ko-KR" sz="2200" dirty="0"/>
+              <a:t>.</a:t>
+            </a:r>
+            <a:endParaRPr lang="ko-KR" altLang="en-US" sz="2200" dirty="0"/>
+          </a:p>
+          <a:p>
+            <a:r>
+              <a:rPr lang="en-US" altLang="ko-KR" sz="2200" dirty="0"/>
+              <a:t>ALU </a:t>
+            </a:r>
+            <a:r>
+              <a:rPr lang="ko-KR" altLang="en-US" sz="2200" dirty="0"/>
+              <a:t>블록</a:t>
+            </a:r>
+            <a:r>
+              <a:rPr lang="en-US" altLang="ko-KR" sz="2200" dirty="0"/>
+              <a:t>: </a:t>
+            </a:r>
+            <a:r>
+              <a:rPr lang="ko-KR" altLang="en-US" sz="2200" dirty="0" err="1"/>
+              <a:t>산술연산</a:t>
+            </a:r>
+            <a:r>
+              <a:rPr lang="en-US" altLang="ko-KR" sz="2200" dirty="0"/>
+              <a:t>, </a:t>
+            </a:r>
+            <a:r>
+              <a:rPr lang="ko-KR" altLang="en-US" sz="2200" dirty="0"/>
+              <a:t>논리연산을 수행한다． 상태 플래그를 출력하고</a:t>
+            </a:r>
+            <a:r>
+              <a:rPr lang="en-US" altLang="ko-KR" sz="2200" dirty="0"/>
+              <a:t>, CPU</a:t>
+            </a:r>
+            <a:r>
+              <a:rPr lang="ko-KR" altLang="en-US" sz="2200" dirty="0"/>
+              <a:t>의 핵심 구성 블록을 담당한다</a:t>
+            </a:r>
+            <a:r>
+              <a:rPr lang="en-US" altLang="ko-KR" sz="2200" dirty="0"/>
+              <a:t>.</a:t>
+            </a:r>
+          </a:p>
+          <a:p>
+            <a:r>
+              <a:rPr lang="ko-KR" altLang="en-US" sz="2200" dirty="0"/>
+              <a:t>측정용 더미 블록</a:t>
+            </a:r>
+            <a:r>
+              <a:rPr lang="en-US" altLang="ko-KR" sz="2200" dirty="0"/>
+              <a:t>: </a:t>
+            </a:r>
+            <a:r>
+              <a:rPr lang="ko-KR" altLang="en-US" sz="2200" dirty="0"/>
+              <a:t>공정 중 레이아웃 밀도 균일화</a:t>
+            </a:r>
+            <a:r>
+              <a:rPr lang="en-US" altLang="ko-KR" sz="2200" dirty="0"/>
+              <a:t>, </a:t>
+            </a:r>
+            <a:r>
+              <a:rPr lang="ko-KR" altLang="en-US" sz="2200" dirty="0"/>
+              <a:t>메모리의 </a:t>
+            </a:r>
+            <a:r>
+              <a:rPr lang="ko-KR" altLang="en-US" sz="2200" dirty="0" err="1"/>
+              <a:t>기준값</a:t>
+            </a:r>
+            <a:r>
+              <a:rPr lang="ko-KR" altLang="en-US" sz="2200" dirty="0"/>
+              <a:t> 제공</a:t>
+            </a:r>
+            <a:r>
+              <a:rPr lang="en-US" altLang="ko-KR" sz="2200" dirty="0"/>
+              <a:t>, </a:t>
+            </a:r>
+            <a:r>
+              <a:rPr lang="ko-KR" altLang="en-US" sz="2200" dirty="0"/>
+              <a:t>전기적 안정화를 통한 기생 용량 변화 최소화</a:t>
+            </a:r>
+            <a:r>
+              <a:rPr lang="en-US" altLang="ko-KR" sz="2200" dirty="0"/>
+              <a:t>, </a:t>
+            </a:r>
+            <a:r>
+              <a:rPr lang="ko-KR" altLang="en-US" sz="2200" dirty="0"/>
+              <a:t>회로 특성 예측 정확도 향상의 역할을 담당한다</a:t>
+            </a:r>
+            <a:r>
+              <a:rPr lang="en-US" altLang="ko-KR" sz="2200" dirty="0"/>
+              <a:t>.</a:t>
+            </a:r>
+            <a:endParaRPr lang="ko-KR" altLang="en-US" sz="2200" dirty="0"/>
+          </a:p>
+        </p:txBody>
+      </p:sp>
     </p:spTree>
     <p:extLst>
       <p:ext uri="{BB962C8B-B14F-4D97-AF65-F5344CB8AC3E}">
-        <p14:creationId xmlns:p14="http://schemas.microsoft.com/office/powerpoint/2010/main" val="2420465811"/>
+        <p14:creationId xmlns:p14="http://schemas.microsoft.com/office/powerpoint/2010/main" val="2513305449"/>
       </p:ext>
     </p:extLst>
   </p:cSld>
@@ -4297,7 +4447,13 @@
       </p:grpSpPr>
       <p:sp>
         <p:nvSpPr>
-          <p:cNvPr id="2" name="제목 1"/>
+          <p:cNvPr id="2" name="제목 1">
+            <a:extLst>
+              <a:ext uri="{FF2B5EF4-FFF2-40B4-BE49-F238E27FC236}">
+                <a16:creationId xmlns:a16="http://schemas.microsoft.com/office/drawing/2014/main" id="{CAFD3FCF-13B5-2893-1B7A-C0D15A4CB900}"/>
+              </a:ext>
+            </a:extLst>
+          </p:cNvPr>
           <p:cNvSpPr>
             <a:spLocks noGrp="1"/>
           </p:cNvSpPr>
@@ -4307,23 +4463,43 @@
         </p:nvSpPr>
         <p:spPr/>
         <p:txBody>
-          <a:bodyPr/>
-          <a:lstStyle/>
-          <a:p>
-            <a:r>
-              <a:rPr lang="en-US" altLang="ko-KR" dirty="0"/>
-              <a:t>6T SRAM Schematic</a:t>
-            </a:r>
-            <a:r>
-              <a:rPr lang="ko-KR" altLang="en-US" dirty="0"/>
-              <a:t> 설계</a:t>
-            </a:r>
-          </a:p>
-        </p:txBody>
-      </p:sp>
-      <p:sp>
-        <p:nvSpPr>
-          <p:cNvPr id="3" name="내용 개체 틀 2"/>
+          <a:bodyPr>
+            <a:normAutofit/>
+          </a:bodyPr>
+          <a:lstStyle/>
+          <a:p>
+            <a:r>
+              <a:rPr lang="ko-KR" altLang="en-US" sz="4000" dirty="0"/>
+              <a:t>디지털 </a:t>
+            </a:r>
+            <a:r>
+              <a:rPr lang="ko-KR" altLang="en-US" sz="4000" dirty="0" err="1"/>
+              <a:t>테스트벤치</a:t>
+            </a:r>
+            <a:r>
+              <a:rPr lang="ko-KR" altLang="en-US" sz="4000" dirty="0"/>
+              <a:t> </a:t>
+            </a:r>
+            <a:r>
+              <a:rPr lang="en-US" altLang="ko-KR" sz="4000" dirty="0"/>
+              <a:t>Schematic, </a:t>
+            </a:r>
+            <a:r>
+              <a:rPr lang="ko-KR" altLang="en-US" sz="4000" dirty="0"/>
+              <a:t>레이아웃 설계</a:t>
+            </a:r>
+          </a:p>
+        </p:txBody>
+      </p:sp>
+      <p:sp>
+        <p:nvSpPr>
+          <p:cNvPr id="3" name="내용 개체 틀 2">
+            <a:extLst>
+              <a:ext uri="{FF2B5EF4-FFF2-40B4-BE49-F238E27FC236}">
+                <a16:creationId xmlns:a16="http://schemas.microsoft.com/office/drawing/2014/main" id="{464D2D25-BCB8-6A42-6384-870839513A25}"/>
+              </a:ext>
+            </a:extLst>
+          </p:cNvPr>
           <p:cNvSpPr>
             <a:spLocks noGrp="1"/>
           </p:cNvSpPr>
@@ -4337,8 +4513,96 @@
           <a:lstStyle/>
           <a:p>
             <a:r>
-              <a:rPr lang="en-US" altLang="ko-KR" dirty="0" err="1"/>
-              <a:t>Analoglib</a:t>
+              <a:rPr lang="ko-KR" altLang="en-US" dirty="0"/>
+              <a:t>링 </a:t>
+            </a:r>
+            <a:r>
+              <a:rPr lang="ko-KR" altLang="en-US" dirty="0" err="1"/>
+              <a:t>오실레이터</a:t>
+            </a:r>
+            <a:r>
+              <a:rPr lang="en-US" altLang="ko-KR" dirty="0"/>
+              <a:t>: </a:t>
+            </a:r>
+            <a:r>
+              <a:rPr lang="ko-KR" altLang="en-US" dirty="0"/>
+              <a:t>버퍼</a:t>
+            </a:r>
+            <a:r>
+              <a:rPr lang="en-US" altLang="ko-KR" dirty="0"/>
+              <a:t>/</a:t>
+            </a:r>
+            <a:r>
+              <a:rPr lang="ko-KR" altLang="en-US" dirty="0"/>
+              <a:t>인버터 </a:t>
+            </a:r>
+            <a:r>
+              <a:rPr lang="en-US" altLang="ko-KR" dirty="0"/>
+              <a:t>3~5</a:t>
+            </a:r>
+            <a:r>
+              <a:rPr lang="ko-KR" altLang="en-US" dirty="0"/>
+              <a:t>개 연결 루프 설계</a:t>
+            </a:r>
+            <a:endParaRPr lang="en-US" altLang="ko-KR" dirty="0"/>
+          </a:p>
+          <a:p>
+            <a:r>
+              <a:rPr lang="en-US" altLang="ko-KR" dirty="0"/>
+              <a:t>6_CNT_C: </a:t>
+            </a:r>
+            <a:r>
+              <a:rPr lang="ko-KR" altLang="en-US" dirty="0"/>
+              <a:t>플립플롭 기반 </a:t>
+            </a:r>
+            <a:r>
+              <a:rPr lang="en-US" altLang="ko-KR" dirty="0"/>
+              <a:t>3~6</a:t>
+            </a:r>
+            <a:r>
+              <a:rPr lang="ko-KR" altLang="en-US" dirty="0"/>
+              <a:t> 비트 카운터</a:t>
+            </a:r>
+            <a:endParaRPr lang="en-US" altLang="ko-KR" dirty="0"/>
+          </a:p>
+          <a:p>
+            <a:r>
+              <a:rPr lang="ko-KR" altLang="en-US" dirty="0"/>
+              <a:t>각 블록에 핀 부여한 다음</a:t>
+            </a:r>
+            <a:r>
+              <a:rPr lang="en-US" altLang="ko-KR" dirty="0"/>
+              <a:t>, </a:t>
+            </a:r>
+            <a:r>
+              <a:rPr lang="ko-KR" altLang="en-US" dirty="0"/>
+              <a:t>상위 </a:t>
+            </a:r>
+            <a:r>
+              <a:rPr lang="en-US" altLang="ko-KR" dirty="0"/>
+              <a:t>Schematic</a:t>
+            </a:r>
+            <a:r>
+              <a:rPr lang="ko-KR" altLang="en-US" dirty="0"/>
+              <a:t>에서 서브블록들을 심볼로 연결한다</a:t>
+            </a:r>
+            <a:r>
+              <a:rPr lang="en-US" altLang="ko-KR" dirty="0"/>
+              <a:t>.</a:t>
+            </a:r>
+          </a:p>
+          <a:p>
+            <a:r>
+              <a:rPr lang="ko-KR" altLang="en-US" dirty="0"/>
+              <a:t>레이아웃 에디터에서 트랜지스터 구현</a:t>
+            </a:r>
+            <a:r>
+              <a:rPr lang="en-US" altLang="ko-KR" dirty="0"/>
+              <a:t>, </a:t>
+            </a:r>
+            <a:r>
+              <a:rPr lang="ko-KR" altLang="en-US" dirty="0"/>
+              <a:t>메탈 레이어 연결</a:t>
             </a:r>
             <a:r>
               <a:rPr lang="en-US" altLang="ko-KR" dirty="0"/>
@@ -4346,23 +4610,23 @@
             </a:r>
             <a:r>
               <a:rPr lang="ko-KR" altLang="en-US" dirty="0"/>
-              <a:t>기단에서 </a:t>
-            </a:r>
-            <a:r>
-              <a:rPr lang="en-US" altLang="ko-KR" dirty="0"/>
-              <a:t>PMOS, NMOS, </a:t>
-            </a:r>
-            <a:r>
-              <a:rPr lang="ko-KR" altLang="en-US" dirty="0"/>
-              <a:t>전원 핀</a:t>
-            </a:r>
-            <a:r>
-              <a:rPr lang="en-US" altLang="ko-KR" dirty="0"/>
-              <a:t>, word-line, bit-line </a:t>
-            </a:r>
-            <a:r>
-              <a:rPr lang="ko-KR" altLang="en-US" dirty="0"/>
-              <a:t>소자를 배치한다</a:t>
+              <a:t>및</a:t>
+            </a:r>
+            <a:r>
+              <a:rPr lang="en-US" altLang="ko-KR" dirty="0"/>
+              <a:t> </a:t>
+            </a:r>
+            <a:r>
+              <a:rPr lang="ko-KR" altLang="en-US" dirty="0"/>
+              <a:t>핀 이름 부여</a:t>
+            </a:r>
+            <a:r>
+              <a:rPr lang="en-US" altLang="ko-KR" dirty="0"/>
+              <a:t>, DRC </a:t>
+            </a:r>
+            <a:r>
+              <a:rPr lang="ko-KR" altLang="en-US" dirty="0"/>
+              <a:t>수행 과정을 거친다</a:t>
             </a:r>
             <a:r>
               <a:rPr lang="en-US" altLang="ko-KR" dirty="0"/>
@@ -4371,60 +4635,29 @@
           </a:p>
           <a:p>
             <a:r>
-              <a:rPr lang="en-US" altLang="ko-KR" dirty="0"/>
-              <a:t>6</a:t>
-            </a:r>
-            <a:r>
-              <a:rPr lang="ko-KR" altLang="en-US" dirty="0"/>
-              <a:t>개의 트랜지스터</a:t>
-            </a:r>
-            <a:r>
-              <a:rPr lang="en-US" altLang="ko-KR" dirty="0"/>
-              <a:t>(P1, P2, N1, N2, M5, M6)</a:t>
-            </a:r>
-            <a:r>
-              <a:rPr lang="ko-KR" altLang="en-US" dirty="0"/>
-              <a:t>를 교차 연결한다</a:t>
-            </a:r>
-            <a:r>
-              <a:rPr lang="en-US" altLang="ko-KR" dirty="0"/>
+              <a:rPr lang="ko-KR" altLang="en-US" dirty="0"/>
+              <a:t>레이아웃에서 추출</a:t>
+            </a:r>
+            <a:r>
+              <a:rPr lang="en-US" altLang="ko-KR" dirty="0"/>
+              <a:t>, LVS </a:t>
+            </a:r>
+            <a:r>
+              <a:rPr lang="ko-KR" altLang="en-US" dirty="0"/>
+              <a:t>검증 과정을 실행한다</a:t>
+            </a:r>
+            <a:r>
+              <a:rPr lang="en-US" altLang="ko-KR"/>
               <a:t>.</a:t>
             </a:r>
-          </a:p>
-          <a:p>
-            <a:r>
-              <a:rPr lang="ko-KR" altLang="en-US" dirty="0"/>
-              <a:t>초기 충전용 </a:t>
-            </a:r>
-            <a:r>
-              <a:rPr lang="en-US" altLang="ko-KR" dirty="0"/>
-              <a:t>PMOS,</a:t>
-            </a:r>
-            <a:r>
-              <a:rPr lang="ko-KR" altLang="en-US" dirty="0"/>
-              <a:t> 센스 앰프용 소자를 추가한다</a:t>
-            </a:r>
-            <a:r>
-              <a:rPr lang="en-US" altLang="ko-KR" dirty="0"/>
-              <a:t>.</a:t>
-            </a:r>
-          </a:p>
-          <a:p>
-            <a:r>
-              <a:rPr lang="ko-KR" altLang="en-US" dirty="0"/>
-              <a:t>핀을 부착하고 네트 이름을 지정한다</a:t>
-            </a:r>
-            <a:r>
-              <a:rPr lang="en-US" altLang="ko-KR" dirty="0"/>
-              <a:t>.</a:t>
-            </a:r>
+            <a:endParaRPr lang="ko-KR" altLang="en-US" dirty="0"/>
           </a:p>
         </p:txBody>
       </p:sp>
     </p:spTree>
     <p:extLst>
       <p:ext uri="{BB962C8B-B14F-4D97-AF65-F5344CB8AC3E}">
-        <p14:creationId xmlns:p14="http://schemas.microsoft.com/office/powerpoint/2010/main" val="2862500190"/>
+        <p14:creationId xmlns:p14="http://schemas.microsoft.com/office/powerpoint/2010/main" val="4112507996"/>
       </p:ext>
     </p:extLst>
   </p:cSld>
@@ -4453,7 +4686,13 @@
       </p:grpSpPr>
       <p:sp>
         <p:nvSpPr>
-          <p:cNvPr id="2" name="제목 1"/>
+          <p:cNvPr id="2" name="제목 1">
+            <a:extLst>
+              <a:ext uri="{FF2B5EF4-FFF2-40B4-BE49-F238E27FC236}">
+                <a16:creationId xmlns:a16="http://schemas.microsoft.com/office/drawing/2014/main" id="{8FE62AE9-4285-B5CB-5B4F-DC232C063ED1}"/>
+              </a:ext>
+            </a:extLst>
+          </p:cNvPr>
           <p:cNvSpPr>
             <a:spLocks noGrp="1"/>
           </p:cNvSpPr>
@@ -4467,19 +4706,29 @@
           <a:lstStyle/>
           <a:p>
             <a:r>
-              <a:rPr lang="en-US" altLang="ko-KR" dirty="0"/>
-              <a:t>6T SRAM </a:t>
-            </a:r>
-            <a:r>
-              <a:rPr lang="ko-KR" altLang="en-US" dirty="0"/>
-              <a:t>레이아웃 생성과정</a:t>
-            </a:r>
-          </a:p>
-        </p:txBody>
-      </p:sp>
-      <p:sp>
-        <p:nvSpPr>
-          <p:cNvPr id="3" name="내용 개체 틀 2"/>
+              <a:rPr lang="ko-KR" altLang="en-US" dirty="0"/>
+              <a:t>디지털 </a:t>
+            </a:r>
+            <a:r>
+              <a:rPr lang="ko-KR" altLang="en-US" dirty="0" err="1"/>
+              <a:t>테스트벤치</a:t>
+            </a:r>
+            <a:r>
+              <a:rPr lang="ko-KR" altLang="en-US" dirty="0"/>
+              <a:t> 시뮬레이션 단계</a:t>
+            </a:r>
+          </a:p>
+        </p:txBody>
+      </p:sp>
+      <p:sp>
+        <p:nvSpPr>
+          <p:cNvPr id="3" name="내용 개체 틀 2">
+            <a:extLst>
+              <a:ext uri="{FF2B5EF4-FFF2-40B4-BE49-F238E27FC236}">
+                <a16:creationId xmlns:a16="http://schemas.microsoft.com/office/drawing/2014/main" id="{6511CAA7-6EF9-4380-8C03-C1C1132A6438}"/>
+              </a:ext>
+            </a:extLst>
+          </p:cNvPr>
           <p:cNvSpPr>
             <a:spLocks noGrp="1"/>
           </p:cNvSpPr>
@@ -4494,11 +4743,31 @@
           <a:p>
             <a:r>
               <a:rPr lang="en-US" altLang="ko-KR" dirty="0"/>
-              <a:t>Schematic</a:t>
-            </a:r>
-            <a:r>
-              <a:rPr lang="ko-KR" altLang="en-US" dirty="0"/>
-              <a:t>에 기반한 서브블록을 생성한다</a:t>
+              <a:t>Schematic </a:t>
+            </a:r>
+            <a:r>
+              <a:rPr lang="ko-KR" altLang="en-US" dirty="0"/>
+              <a:t>기반으로 전원</a:t>
+            </a:r>
+            <a:r>
+              <a:rPr lang="en-US" altLang="ko-KR" dirty="0"/>
+              <a:t>, GND, </a:t>
+            </a:r>
+            <a:r>
+              <a:rPr lang="ko-KR" altLang="en-US" dirty="0" err="1"/>
+              <a:t>발진기를</a:t>
+            </a:r>
+            <a:r>
+              <a:rPr lang="ko-KR" altLang="en-US" dirty="0"/>
+              <a:t> 구동하고</a:t>
+            </a:r>
+            <a:r>
+              <a:rPr lang="en-US" altLang="ko-KR" dirty="0"/>
+              <a:t>, PRE/CLR/LCK </a:t>
+            </a:r>
+            <a:r>
+              <a:rPr lang="ko-KR" altLang="en-US" dirty="0"/>
+              <a:t>신호를 주입한다</a:t>
             </a:r>
             <a:r>
               <a:rPr lang="en-US" altLang="ko-KR" dirty="0"/>
@@ -4507,20 +4776,32 @@
           </a:p>
           <a:p>
             <a:r>
-              <a:rPr lang="en-US" altLang="ko-KR" dirty="0"/>
-              <a:t>SRAM </a:t>
-            </a:r>
-            <a:r>
-              <a:rPr lang="ko-KR" altLang="en-US" dirty="0"/>
-              <a:t>셀을 포함한 각각의 </a:t>
-            </a:r>
-            <a:r>
-              <a:rPr lang="en-US" altLang="ko-KR" dirty="0"/>
-              <a:t>Symbol</a:t>
-            </a:r>
-            <a:r>
-              <a:rPr lang="ko-KR" altLang="en-US" dirty="0"/>
-              <a:t>을 생성한다</a:t>
+              <a:rPr lang="en-US" altLang="ko-KR" dirty="0" err="1"/>
+              <a:t>Spectre</a:t>
+            </a:r>
+            <a:r>
+              <a:rPr lang="en-US" altLang="ko-KR" dirty="0"/>
+              <a:t>/</a:t>
+            </a:r>
+            <a:r>
+              <a:rPr lang="en-US" altLang="ko-KR" dirty="0" err="1"/>
+              <a:t>Hspice</a:t>
+            </a:r>
+            <a:r>
+              <a:rPr lang="en-US" altLang="ko-KR" dirty="0"/>
+              <a:t> </a:t>
+            </a:r>
+            <a:r>
+              <a:rPr lang="ko-KR" altLang="en-US" dirty="0"/>
+              <a:t>시뮬레이션에서 링 </a:t>
+            </a:r>
+            <a:r>
+              <a:rPr lang="ko-KR" altLang="en-US" dirty="0" err="1"/>
+              <a:t>오실레이터의</a:t>
+            </a:r>
+            <a:r>
+              <a:rPr lang="ko-KR" altLang="en-US" dirty="0"/>
+              <a:t> 주파수를 분석하고 카운터 결과 확인 및 정상 동작 여부를 검증한다</a:t>
             </a:r>
             <a:r>
               <a:rPr lang="en-US" altLang="ko-KR" dirty="0"/>
@@ -4529,24 +4810,12 @@
           </a:p>
           <a:p>
             <a:r>
-              <a:rPr lang="ko-KR" altLang="en-US" dirty="0"/>
-              <a:t>새로운 </a:t>
-            </a:r>
-            <a:r>
-              <a:rPr lang="en-US" altLang="ko-KR" dirty="0" err="1"/>
-              <a:t>cellview</a:t>
-            </a:r>
-            <a:r>
-              <a:rPr lang="ko-KR" altLang="en-US" dirty="0"/>
-              <a:t>로 </a:t>
-            </a:r>
-            <a:r>
-              <a:rPr lang="en-US" altLang="ko-KR" dirty="0"/>
-              <a:t>layout</a:t>
-            </a:r>
-            <a:r>
-              <a:rPr lang="ko-KR" altLang="en-US" dirty="0"/>
-              <a:t>을 생성한다</a:t>
+              <a:rPr lang="en-US" altLang="ko-KR" dirty="0"/>
+              <a:t>Full Adder + MUX </a:t>
+            </a:r>
+            <a:r>
+              <a:rPr lang="ko-KR" altLang="en-US" dirty="0"/>
+              <a:t>논리 테스트를 거친다</a:t>
             </a:r>
             <a:r>
               <a:rPr lang="en-US" altLang="ko-KR" dirty="0"/>
@@ -4556,7 +4825,7 @@
           <a:p>
             <a:r>
               <a:rPr lang="ko-KR" altLang="en-US" dirty="0"/>
-              <a:t>트랜지스터를 구현하는데</a:t>
+              <a:t>측정 결과가 나오면</a:t>
             </a:r>
             <a:r>
               <a:rPr lang="en-US" altLang="ko-KR" dirty="0"/>
@@ -4564,64 +4833,35 @@
             </a:r>
             <a:r>
               <a:rPr lang="ko-KR" altLang="en-US" dirty="0"/>
-              <a:t>여기서 </a:t>
-            </a:r>
-            <a:r>
-              <a:rPr lang="en-US" altLang="ko-KR" dirty="0" err="1"/>
-              <a:t>pmos</a:t>
-            </a:r>
-            <a:r>
-              <a:rPr lang="en-US" altLang="ko-KR" dirty="0"/>
-              <a:t> </a:t>
-            </a:r>
-            <a:r>
-              <a:rPr lang="ko-KR" altLang="en-US" dirty="0"/>
-              <a:t>영역은 </a:t>
-            </a:r>
-            <a:r>
-              <a:rPr lang="en-US" altLang="ko-KR" dirty="0"/>
-              <a:t>n-well</a:t>
-            </a:r>
-            <a:r>
-              <a:rPr lang="ko-KR" altLang="en-US" dirty="0"/>
-              <a:t>을 포함해야 한다</a:t>
+              <a:t>타이밍</a:t>
+            </a:r>
+            <a:r>
+              <a:rPr lang="en-US" altLang="ko-KR" dirty="0"/>
+              <a:t>, </a:t>
+            </a:r>
+            <a:r>
+              <a:rPr lang="ko-KR" altLang="en-US" dirty="0"/>
+              <a:t>소비전력</a:t>
+            </a:r>
+            <a:r>
+              <a:rPr lang="en-US" altLang="ko-KR" dirty="0"/>
+              <a:t>,</a:t>
+            </a:r>
+            <a:r>
+              <a:rPr lang="ko-KR" altLang="en-US" dirty="0"/>
+              <a:t> 동작 안정성을 분석한다</a:t>
             </a:r>
             <a:r>
               <a:rPr lang="en-US" altLang="ko-KR" dirty="0"/>
               <a:t>.</a:t>
             </a:r>
-          </a:p>
-          <a:p>
-            <a:r>
-              <a:rPr lang="ko-KR" altLang="en-US" dirty="0"/>
-              <a:t>핀 레이어를 통해 신호를 연결한다</a:t>
-            </a:r>
-            <a:r>
-              <a:rPr lang="en-US" altLang="ko-KR" dirty="0"/>
-              <a:t>.</a:t>
-            </a:r>
-          </a:p>
-          <a:p>
-            <a:r>
-              <a:rPr lang="en-US" altLang="ko-KR" dirty="0"/>
-              <a:t>DRC </a:t>
-            </a:r>
-            <a:r>
-              <a:rPr lang="ko-KR" altLang="en-US" dirty="0"/>
-              <a:t>검사 후 오류를 수정한다</a:t>
-            </a:r>
-            <a:r>
-              <a:rPr lang="en-US" altLang="ko-KR" dirty="0"/>
-              <a:t>.</a:t>
-            </a:r>
-            <a:endParaRPr lang="ko-KR" altLang="en-US" dirty="0"/>
           </a:p>
         </p:txBody>
       </p:sp>
     </p:spTree>
     <p:extLst>
       <p:ext uri="{BB962C8B-B14F-4D97-AF65-F5344CB8AC3E}">
-        <p14:creationId xmlns:p14="http://schemas.microsoft.com/office/powerpoint/2010/main" val="1719335813"/>
+        <p14:creationId xmlns:p14="http://schemas.microsoft.com/office/powerpoint/2010/main" val="2034143713"/>
       </p:ext>
     </p:extLst>
   </p:cSld>
